--- a/03_今年度用/最終発表_20260825/本実験_実験結果まとめ.pptx
+++ b/03_今年度用/最終発表_20260825/本実験_実験結果まとめ.pptx
@@ -5,28 +5,28 @@
     <p:sldMasterId id="2147483648" r:id="rId1"/>
   </p:sldMasterIdLst>
   <p:sldIdLst>
-    <p:sldId id="256" r:id="rId7"/>
-    <p:sldId id="257" r:id="rId8"/>
-    <p:sldId id="258" r:id="rId9"/>
-    <p:sldId id="259" r:id="rId10"/>
-    <p:sldId id="260" r:id="rId11"/>
-    <p:sldId id="261" r:id="rId12"/>
-    <p:sldId id="262" r:id="rId13"/>
-    <p:sldId id="263" r:id="rId14"/>
-    <p:sldId id="264" r:id="rId15"/>
-    <p:sldId id="265" r:id="rId16"/>
-    <p:sldId id="266" r:id="rId17"/>
-    <p:sldId id="267" r:id="rId18"/>
-    <p:sldId id="268" r:id="rId19"/>
-    <p:sldId id="269" r:id="rId20"/>
-    <p:sldId id="270" r:id="rId21"/>
-    <p:sldId id="271" r:id="rId22"/>
-    <p:sldId id="272" r:id="rId23"/>
-    <p:sldId id="273" r:id="rId24"/>
-    <p:sldId id="274" r:id="rId25"/>
-    <p:sldId id="275" r:id="rId26"/>
+    <p:sldId id="256" r:id="rId2"/>
+    <p:sldId id="257" r:id="rId3"/>
+    <p:sldId id="258" r:id="rId4"/>
+    <p:sldId id="259" r:id="rId5"/>
+    <p:sldId id="260" r:id="rId6"/>
+    <p:sldId id="261" r:id="rId7"/>
+    <p:sldId id="262" r:id="rId8"/>
+    <p:sldId id="263" r:id="rId9"/>
+    <p:sldId id="264" r:id="rId10"/>
+    <p:sldId id="265" r:id="rId11"/>
+    <p:sldId id="266" r:id="rId12"/>
+    <p:sldId id="267" r:id="rId13"/>
+    <p:sldId id="268" r:id="rId14"/>
+    <p:sldId id="269" r:id="rId15"/>
+    <p:sldId id="270" r:id="rId16"/>
+    <p:sldId id="271" r:id="rId17"/>
+    <p:sldId id="272" r:id="rId18"/>
+    <p:sldId id="273" r:id="rId19"/>
+    <p:sldId id="274" r:id="rId20"/>
+    <p:sldId id="275" r:id="rId21"/>
   </p:sldIdLst>
-  <p:sldSz cx="9144000" cy="5143500" type="screen4x3"/>
+  <p:sldSz cx="9144000" cy="5143500" type="screen16x9"/>
   <p:notesSz cx="6858000" cy="9144000"/>
   <p:defaultTextStyle>
     <a:defPPr>
@@ -123,6 +123,22 @@
       </a:defRPr>
     </a:lvl9pPr>
   </p:defaultTextStyle>
+  <p:extLst>
+    <p:ext uri="{EFAFB233-063F-42B5-8137-9DF3F51BA10A}">
+      <p15:sldGuideLst xmlns:p15="http://schemas.microsoft.com/office/powerpoint/2012/main">
+        <p15:guide id="1" orient="horz" pos="2160">
+          <p15:clr>
+            <a:srgbClr val="A4A3A4"/>
+          </p15:clr>
+        </p15:guide>
+        <p15:guide id="2" pos="2880">
+          <p15:clr>
+            <a:srgbClr val="A4A3A4"/>
+          </p15:clr>
+        </p15:guide>
+      </p15:sldGuideLst>
+    </p:ext>
+  </p:extLst>
 </p:presentation>
 </file>
 
@@ -164,10 +180,9 @@
           <a:lstStyle/>
           <a:p>
             <a:r>
-              <a:rPr lang="en-US" smtClean="0"/>
+              <a:rPr lang="en-US"/>
               <a:t>Click to edit Master title style</a:t>
             </a:r>
-            <a:endParaRPr lang="en-US"/>
           </a:p>
         </p:txBody>
       </p:sp>
@@ -283,10 +298,9 @@
           </a:lstStyle>
           <a:p>
             <a:r>
-              <a:rPr lang="en-US" smtClean="0"/>
+              <a:rPr lang="en-US"/>
               <a:t>Click to edit Master subtitle style</a:t>
             </a:r>
-            <a:endParaRPr lang="en-US"/>
           </a:p>
         </p:txBody>
       </p:sp>
@@ -307,7 +321,7 @@
           <a:p>
             <a:fld id="{5BCAD085-E8A6-8845-BD4E-CB4CCA059FC4}" type="datetimeFigureOut">
               <a:rPr lang="en-US" smtClean="0"/>
-              <a:t>1/27/13</a:t>
+              <a:t>8/26/26</a:t>
             </a:fld>
             <a:endParaRPr lang="en-US"/>
           </a:p>
@@ -401,10 +415,9 @@
           <a:lstStyle/>
           <a:p>
             <a:r>
-              <a:rPr lang="en-US" smtClean="0"/>
+              <a:rPr lang="en-US"/>
               <a:t>Click to edit Master title style</a:t>
             </a:r>
-            <a:endParaRPr lang="en-US"/>
           </a:p>
         </p:txBody>
       </p:sp>
@@ -425,38 +438,37 @@
           <a:p>
             <a:pPr lvl="0"/>
             <a:r>
-              <a:rPr lang="en-US" smtClean="0"/>
+              <a:rPr lang="en-US"/>
               <a:t>Click to edit Master text styles</a:t>
             </a:r>
           </a:p>
           <a:p>
             <a:pPr lvl="1"/>
             <a:r>
-              <a:rPr lang="en-US" smtClean="0"/>
+              <a:rPr lang="en-US"/>
               <a:t>Second level</a:t>
             </a:r>
           </a:p>
           <a:p>
             <a:pPr lvl="2"/>
             <a:r>
-              <a:rPr lang="en-US" smtClean="0"/>
+              <a:rPr lang="en-US"/>
               <a:t>Third level</a:t>
             </a:r>
           </a:p>
           <a:p>
             <a:pPr lvl="3"/>
             <a:r>
-              <a:rPr lang="en-US" smtClean="0"/>
+              <a:rPr lang="en-US"/>
               <a:t>Fourth level</a:t>
             </a:r>
           </a:p>
           <a:p>
             <a:pPr lvl="4"/>
             <a:r>
-              <a:rPr lang="en-US" smtClean="0"/>
+              <a:rPr lang="en-US"/>
               <a:t>Fifth level</a:t>
             </a:r>
-            <a:endParaRPr lang="en-US"/>
           </a:p>
         </p:txBody>
       </p:sp>
@@ -477,7 +489,7 @@
           <a:p>
             <a:fld id="{5BCAD085-E8A6-8845-BD4E-CB4CCA059FC4}" type="datetimeFigureOut">
               <a:rPr lang="en-US" smtClean="0"/>
-              <a:t>1/27/13</a:t>
+              <a:t>8/26/26</a:t>
             </a:fld>
             <a:endParaRPr lang="en-US"/>
           </a:p>
@@ -576,10 +588,9 @@
           <a:lstStyle/>
           <a:p>
             <a:r>
-              <a:rPr lang="en-US" smtClean="0"/>
+              <a:rPr lang="en-US"/>
               <a:t>Click to edit Master title style</a:t>
             </a:r>
-            <a:endParaRPr lang="en-US"/>
           </a:p>
         </p:txBody>
       </p:sp>
@@ -605,38 +616,37 @@
           <a:p>
             <a:pPr lvl="0"/>
             <a:r>
-              <a:rPr lang="en-US" smtClean="0"/>
+              <a:rPr lang="en-US"/>
               <a:t>Click to edit Master text styles</a:t>
             </a:r>
           </a:p>
           <a:p>
             <a:pPr lvl="1"/>
             <a:r>
-              <a:rPr lang="en-US" smtClean="0"/>
+              <a:rPr lang="en-US"/>
               <a:t>Second level</a:t>
             </a:r>
           </a:p>
           <a:p>
             <a:pPr lvl="2"/>
             <a:r>
-              <a:rPr lang="en-US" smtClean="0"/>
+              <a:rPr lang="en-US"/>
               <a:t>Third level</a:t>
             </a:r>
           </a:p>
           <a:p>
             <a:pPr lvl="3"/>
             <a:r>
-              <a:rPr lang="en-US" smtClean="0"/>
+              <a:rPr lang="en-US"/>
               <a:t>Fourth level</a:t>
             </a:r>
           </a:p>
           <a:p>
             <a:pPr lvl="4"/>
             <a:r>
-              <a:rPr lang="en-US" smtClean="0"/>
+              <a:rPr lang="en-US"/>
               <a:t>Fifth level</a:t>
             </a:r>
-            <a:endParaRPr lang="en-US"/>
           </a:p>
         </p:txBody>
       </p:sp>
@@ -657,7 +667,7 @@
           <a:p>
             <a:fld id="{5BCAD085-E8A6-8845-BD4E-CB4CCA059FC4}" type="datetimeFigureOut">
               <a:rPr lang="en-US" smtClean="0"/>
-              <a:t>1/27/13</a:t>
+              <a:t>8/26/26</a:t>
             </a:fld>
             <a:endParaRPr lang="en-US"/>
           </a:p>
@@ -751,10 +761,9 @@
           <a:lstStyle/>
           <a:p>
             <a:r>
-              <a:rPr lang="en-US" smtClean="0"/>
+              <a:rPr lang="en-US"/>
               <a:t>Click to edit Master title style</a:t>
             </a:r>
-            <a:endParaRPr lang="en-US"/>
           </a:p>
         </p:txBody>
       </p:sp>
@@ -775,38 +784,37 @@
           <a:p>
             <a:pPr lvl="0"/>
             <a:r>
-              <a:rPr lang="en-US" smtClean="0"/>
+              <a:rPr lang="en-US"/>
               <a:t>Click to edit Master text styles</a:t>
             </a:r>
           </a:p>
           <a:p>
             <a:pPr lvl="1"/>
             <a:r>
-              <a:rPr lang="en-US" smtClean="0"/>
+              <a:rPr lang="en-US"/>
               <a:t>Second level</a:t>
             </a:r>
           </a:p>
           <a:p>
             <a:pPr lvl="2"/>
             <a:r>
-              <a:rPr lang="en-US" smtClean="0"/>
+              <a:rPr lang="en-US"/>
               <a:t>Third level</a:t>
             </a:r>
           </a:p>
           <a:p>
             <a:pPr lvl="3"/>
             <a:r>
-              <a:rPr lang="en-US" smtClean="0"/>
+              <a:rPr lang="en-US"/>
               <a:t>Fourth level</a:t>
             </a:r>
           </a:p>
           <a:p>
             <a:pPr lvl="4"/>
             <a:r>
-              <a:rPr lang="en-US" smtClean="0"/>
+              <a:rPr lang="en-US"/>
               <a:t>Fifth level</a:t>
             </a:r>
-            <a:endParaRPr lang="en-US"/>
           </a:p>
         </p:txBody>
       </p:sp>
@@ -827,7 +835,7 @@
           <a:p>
             <a:fld id="{5BCAD085-E8A6-8845-BD4E-CB4CCA059FC4}" type="datetimeFigureOut">
               <a:rPr lang="en-US" smtClean="0"/>
-              <a:t>1/27/13</a:t>
+              <a:t>8/26/26</a:t>
             </a:fld>
             <a:endParaRPr lang="en-US"/>
           </a:p>
@@ -930,10 +938,9 @@
           </a:lstStyle>
           <a:p>
             <a:r>
-              <a:rPr lang="en-US" smtClean="0"/>
+              <a:rPr lang="en-US"/>
               <a:t>Click to edit Master title style</a:t>
             </a:r>
-            <a:endParaRPr lang="en-US"/>
           </a:p>
         </p:txBody>
       </p:sp>
@@ -1050,7 +1057,7 @@
           <a:p>
             <a:pPr lvl="0"/>
             <a:r>
-              <a:rPr lang="en-US" smtClean="0"/>
+              <a:rPr lang="en-US"/>
               <a:t>Click to edit Master text styles</a:t>
             </a:r>
           </a:p>
@@ -1073,7 +1080,7 @@
           <a:p>
             <a:fld id="{5BCAD085-E8A6-8845-BD4E-CB4CCA059FC4}" type="datetimeFigureOut">
               <a:rPr lang="en-US" smtClean="0"/>
-              <a:t>1/27/13</a:t>
+              <a:t>8/26/26</a:t>
             </a:fld>
             <a:endParaRPr lang="en-US"/>
           </a:p>
@@ -1167,10 +1174,9 @@
           <a:lstStyle/>
           <a:p>
             <a:r>
-              <a:rPr lang="en-US" smtClean="0"/>
+              <a:rPr lang="en-US"/>
               <a:t>Click to edit Master title style</a:t>
             </a:r>
-            <a:endParaRPr lang="en-US"/>
           </a:p>
         </p:txBody>
       </p:sp>
@@ -1224,38 +1230,37 @@
           <a:p>
             <a:pPr lvl="0"/>
             <a:r>
-              <a:rPr lang="en-US" smtClean="0"/>
+              <a:rPr lang="en-US"/>
               <a:t>Click to edit Master text styles</a:t>
             </a:r>
           </a:p>
           <a:p>
             <a:pPr lvl="1"/>
             <a:r>
-              <a:rPr lang="en-US" smtClean="0"/>
+              <a:rPr lang="en-US"/>
               <a:t>Second level</a:t>
             </a:r>
           </a:p>
           <a:p>
             <a:pPr lvl="2"/>
             <a:r>
-              <a:rPr lang="en-US" smtClean="0"/>
+              <a:rPr lang="en-US"/>
               <a:t>Third level</a:t>
             </a:r>
           </a:p>
           <a:p>
             <a:pPr lvl="3"/>
             <a:r>
-              <a:rPr lang="en-US" smtClean="0"/>
+              <a:rPr lang="en-US"/>
               <a:t>Fourth level</a:t>
             </a:r>
           </a:p>
           <a:p>
             <a:pPr lvl="4"/>
             <a:r>
-              <a:rPr lang="en-US" smtClean="0"/>
+              <a:rPr lang="en-US"/>
               <a:t>Fifth level</a:t>
             </a:r>
-            <a:endParaRPr lang="en-US"/>
           </a:p>
         </p:txBody>
       </p:sp>
@@ -1309,38 +1314,37 @@
           <a:p>
             <a:pPr lvl="0"/>
             <a:r>
-              <a:rPr lang="en-US" smtClean="0"/>
+              <a:rPr lang="en-US"/>
               <a:t>Click to edit Master text styles</a:t>
             </a:r>
           </a:p>
           <a:p>
             <a:pPr lvl="1"/>
             <a:r>
-              <a:rPr lang="en-US" smtClean="0"/>
+              <a:rPr lang="en-US"/>
               <a:t>Second level</a:t>
             </a:r>
           </a:p>
           <a:p>
             <a:pPr lvl="2"/>
             <a:r>
-              <a:rPr lang="en-US" smtClean="0"/>
+              <a:rPr lang="en-US"/>
               <a:t>Third level</a:t>
             </a:r>
           </a:p>
           <a:p>
             <a:pPr lvl="3"/>
             <a:r>
-              <a:rPr lang="en-US" smtClean="0"/>
+              <a:rPr lang="en-US"/>
               <a:t>Fourth level</a:t>
             </a:r>
           </a:p>
           <a:p>
             <a:pPr lvl="4"/>
             <a:r>
-              <a:rPr lang="en-US" smtClean="0"/>
+              <a:rPr lang="en-US"/>
               <a:t>Fifth level</a:t>
             </a:r>
-            <a:endParaRPr lang="en-US"/>
           </a:p>
         </p:txBody>
       </p:sp>
@@ -1361,7 +1365,7 @@
           <a:p>
             <a:fld id="{5BCAD085-E8A6-8845-BD4E-CB4CCA059FC4}" type="datetimeFigureOut">
               <a:rPr lang="en-US" smtClean="0"/>
-              <a:t>1/27/13</a:t>
+              <a:t>8/26/26</a:t>
             </a:fld>
             <a:endParaRPr lang="en-US"/>
           </a:p>
@@ -1459,10 +1463,9 @@
           </a:lstStyle>
           <a:p>
             <a:r>
-              <a:rPr lang="en-US" smtClean="0"/>
+              <a:rPr lang="en-US"/>
               <a:t>Click to edit Master title style</a:t>
             </a:r>
-            <a:endParaRPr lang="en-US"/>
           </a:p>
         </p:txBody>
       </p:sp>
@@ -1525,7 +1528,7 @@
           <a:p>
             <a:pPr lvl="0"/>
             <a:r>
-              <a:rPr lang="en-US" smtClean="0"/>
+              <a:rPr lang="en-US"/>
               <a:t>Click to edit Master text styles</a:t>
             </a:r>
           </a:p>
@@ -1581,38 +1584,37 @@
           <a:p>
             <a:pPr lvl="0"/>
             <a:r>
-              <a:rPr lang="en-US" smtClean="0"/>
+              <a:rPr lang="en-US"/>
               <a:t>Click to edit Master text styles</a:t>
             </a:r>
           </a:p>
           <a:p>
             <a:pPr lvl="1"/>
             <a:r>
-              <a:rPr lang="en-US" smtClean="0"/>
+              <a:rPr lang="en-US"/>
               <a:t>Second level</a:t>
             </a:r>
           </a:p>
           <a:p>
             <a:pPr lvl="2"/>
             <a:r>
-              <a:rPr lang="en-US" smtClean="0"/>
+              <a:rPr lang="en-US"/>
               <a:t>Third level</a:t>
             </a:r>
           </a:p>
           <a:p>
             <a:pPr lvl="3"/>
             <a:r>
-              <a:rPr lang="en-US" smtClean="0"/>
+              <a:rPr lang="en-US"/>
               <a:t>Fourth level</a:t>
             </a:r>
           </a:p>
           <a:p>
             <a:pPr lvl="4"/>
             <a:r>
-              <a:rPr lang="en-US" smtClean="0"/>
+              <a:rPr lang="en-US"/>
               <a:t>Fifth level</a:t>
             </a:r>
-            <a:endParaRPr lang="en-US"/>
           </a:p>
         </p:txBody>
       </p:sp>
@@ -1675,7 +1677,7 @@
           <a:p>
             <a:pPr lvl="0"/>
             <a:r>
-              <a:rPr lang="en-US" smtClean="0"/>
+              <a:rPr lang="en-US"/>
               <a:t>Click to edit Master text styles</a:t>
             </a:r>
           </a:p>
@@ -1731,38 +1733,37 @@
           <a:p>
             <a:pPr lvl="0"/>
             <a:r>
-              <a:rPr lang="en-US" smtClean="0"/>
+              <a:rPr lang="en-US"/>
               <a:t>Click to edit Master text styles</a:t>
             </a:r>
           </a:p>
           <a:p>
             <a:pPr lvl="1"/>
             <a:r>
-              <a:rPr lang="en-US" smtClean="0"/>
+              <a:rPr lang="en-US"/>
               <a:t>Second level</a:t>
             </a:r>
           </a:p>
           <a:p>
             <a:pPr lvl="2"/>
             <a:r>
-              <a:rPr lang="en-US" smtClean="0"/>
+              <a:rPr lang="en-US"/>
               <a:t>Third level</a:t>
             </a:r>
           </a:p>
           <a:p>
             <a:pPr lvl="3"/>
             <a:r>
-              <a:rPr lang="en-US" smtClean="0"/>
+              <a:rPr lang="en-US"/>
               <a:t>Fourth level</a:t>
             </a:r>
           </a:p>
           <a:p>
             <a:pPr lvl="4"/>
             <a:r>
-              <a:rPr lang="en-US" smtClean="0"/>
+              <a:rPr lang="en-US"/>
               <a:t>Fifth level</a:t>
             </a:r>
-            <a:endParaRPr lang="en-US"/>
           </a:p>
         </p:txBody>
       </p:sp>
@@ -1783,7 +1784,7 @@
           <a:p>
             <a:fld id="{5BCAD085-E8A6-8845-BD4E-CB4CCA059FC4}" type="datetimeFigureOut">
               <a:rPr lang="en-US" smtClean="0"/>
-              <a:t>1/27/13</a:t>
+              <a:t>8/26/26</a:t>
             </a:fld>
             <a:endParaRPr lang="en-US"/>
           </a:p>
@@ -1877,10 +1878,9 @@
           <a:lstStyle/>
           <a:p>
             <a:r>
-              <a:rPr lang="en-US" smtClean="0"/>
+              <a:rPr lang="en-US"/>
               <a:t>Click to edit Master title style</a:t>
             </a:r>
-            <a:endParaRPr lang="en-US"/>
           </a:p>
         </p:txBody>
       </p:sp>
@@ -1901,7 +1901,7 @@
           <a:p>
             <a:fld id="{5BCAD085-E8A6-8845-BD4E-CB4CCA059FC4}" type="datetimeFigureOut">
               <a:rPr lang="en-US" smtClean="0"/>
-              <a:t>1/27/13</a:t>
+              <a:t>8/26/26</a:t>
             </a:fld>
             <a:endParaRPr lang="en-US"/>
           </a:p>
@@ -1996,7 +1996,7 @@
           <a:p>
             <a:fld id="{5BCAD085-E8A6-8845-BD4E-CB4CCA059FC4}" type="datetimeFigureOut">
               <a:rPr lang="en-US" smtClean="0"/>
-              <a:t>1/27/13</a:t>
+              <a:t>8/26/26</a:t>
             </a:fld>
             <a:endParaRPr lang="en-US"/>
           </a:p>
@@ -2099,10 +2099,9 @@
           </a:lstStyle>
           <a:p>
             <a:r>
-              <a:rPr lang="en-US" smtClean="0"/>
+              <a:rPr lang="en-US"/>
               <a:t>Click to edit Master title style</a:t>
             </a:r>
-            <a:endParaRPr lang="en-US"/>
           </a:p>
         </p:txBody>
       </p:sp>
@@ -2156,38 +2155,37 @@
           <a:p>
             <a:pPr lvl="0"/>
             <a:r>
-              <a:rPr lang="en-US" smtClean="0"/>
+              <a:rPr lang="en-US"/>
               <a:t>Click to edit Master text styles</a:t>
             </a:r>
           </a:p>
           <a:p>
             <a:pPr lvl="1"/>
             <a:r>
-              <a:rPr lang="en-US" smtClean="0"/>
+              <a:rPr lang="en-US"/>
               <a:t>Second level</a:t>
             </a:r>
           </a:p>
           <a:p>
             <a:pPr lvl="2"/>
             <a:r>
-              <a:rPr lang="en-US" smtClean="0"/>
+              <a:rPr lang="en-US"/>
               <a:t>Third level</a:t>
             </a:r>
           </a:p>
           <a:p>
             <a:pPr lvl="3"/>
             <a:r>
-              <a:rPr lang="en-US" smtClean="0"/>
+              <a:rPr lang="en-US"/>
               <a:t>Fourth level</a:t>
             </a:r>
           </a:p>
           <a:p>
             <a:pPr lvl="4"/>
             <a:r>
-              <a:rPr lang="en-US" smtClean="0"/>
+              <a:rPr lang="en-US"/>
               <a:t>Fifth level</a:t>
             </a:r>
-            <a:endParaRPr lang="en-US"/>
           </a:p>
         </p:txBody>
       </p:sp>
@@ -2250,7 +2248,7 @@
           <a:p>
             <a:pPr lvl="0"/>
             <a:r>
-              <a:rPr lang="en-US" smtClean="0"/>
+              <a:rPr lang="en-US"/>
               <a:t>Click to edit Master text styles</a:t>
             </a:r>
           </a:p>
@@ -2273,7 +2271,7 @@
           <a:p>
             <a:fld id="{5BCAD085-E8A6-8845-BD4E-CB4CCA059FC4}" type="datetimeFigureOut">
               <a:rPr lang="en-US" smtClean="0"/>
-              <a:t>1/27/13</a:t>
+              <a:t>8/26/26</a:t>
             </a:fld>
             <a:endParaRPr lang="en-US"/>
           </a:p>
@@ -2376,10 +2374,9 @@
           </a:lstStyle>
           <a:p>
             <a:r>
-              <a:rPr lang="en-US" smtClean="0"/>
+              <a:rPr lang="en-US"/>
               <a:t>Click to edit Master title style</a:t>
             </a:r>
-            <a:endParaRPr lang="en-US"/>
           </a:p>
         </p:txBody>
       </p:sp>
@@ -2503,7 +2500,7 @@
           <a:p>
             <a:pPr lvl="0"/>
             <a:r>
-              <a:rPr lang="en-US" smtClean="0"/>
+              <a:rPr lang="en-US"/>
               <a:t>Click to edit Master text styles</a:t>
             </a:r>
           </a:p>
@@ -2526,7 +2523,7 @@
           <a:p>
             <a:fld id="{5BCAD085-E8A6-8845-BD4E-CB4CCA059FC4}" type="datetimeFigureOut">
               <a:rPr lang="en-US" smtClean="0"/>
-              <a:t>1/27/13</a:t>
+              <a:t>8/26/26</a:t>
             </a:fld>
             <a:endParaRPr lang="en-US"/>
           </a:p>
@@ -2635,10 +2632,9 @@
           <a:lstStyle/>
           <a:p>
             <a:r>
-              <a:rPr lang="en-US" smtClean="0"/>
+              <a:rPr lang="en-US"/>
               <a:t>Click to edit Master title style</a:t>
             </a:r>
-            <a:endParaRPr lang="en-US"/>
           </a:p>
         </p:txBody>
       </p:sp>
@@ -2669,38 +2665,37 @@
           <a:p>
             <a:pPr lvl="0"/>
             <a:r>
-              <a:rPr lang="en-US" smtClean="0"/>
+              <a:rPr lang="en-US"/>
               <a:t>Click to edit Master text styles</a:t>
             </a:r>
           </a:p>
           <a:p>
             <a:pPr lvl="1"/>
             <a:r>
-              <a:rPr lang="en-US" smtClean="0"/>
+              <a:rPr lang="en-US"/>
               <a:t>Second level</a:t>
             </a:r>
           </a:p>
           <a:p>
             <a:pPr lvl="2"/>
             <a:r>
-              <a:rPr lang="en-US" smtClean="0"/>
+              <a:rPr lang="en-US"/>
               <a:t>Third level</a:t>
             </a:r>
           </a:p>
           <a:p>
             <a:pPr lvl="3"/>
             <a:r>
-              <a:rPr lang="en-US" smtClean="0"/>
+              <a:rPr lang="en-US"/>
               <a:t>Fourth level</a:t>
             </a:r>
           </a:p>
           <a:p>
             <a:pPr lvl="4"/>
             <a:r>
-              <a:rPr lang="en-US" smtClean="0"/>
+              <a:rPr lang="en-US"/>
               <a:t>Fifth level</a:t>
             </a:r>
-            <a:endParaRPr lang="en-US"/>
           </a:p>
         </p:txBody>
       </p:sp>
@@ -2739,7 +2734,7 @@
           <a:p>
             <a:fld id="{5BCAD085-E8A6-8845-BD4E-CB4CCA059FC4}" type="datetimeFigureOut">
               <a:rPr lang="en-US" smtClean="0"/>
-              <a:t>1/27/13</a:t>
+              <a:t>8/26/26</a:t>
             </a:fld>
             <a:endParaRPr lang="en-US"/>
           </a:p>
@@ -3098,7 +3093,7 @@
 </file>
 
 <file path=ppt/slides/slide1.xml><?xml version="1.0" encoding="utf-8"?>
-<p:sld xmlns:a="http://schemas.openxmlformats.org/drawingml/2006/main" xmlns:p="http://schemas.openxmlformats.org/presentationml/2006/main" xmlns:r="http://schemas.openxmlformats.org/officeDocument/2006/relationships">
+<p:sld xmlns:a="http://schemas.openxmlformats.org/drawingml/2006/main" xmlns:r="http://schemas.openxmlformats.org/officeDocument/2006/relationships" xmlns:p="http://schemas.openxmlformats.org/presentationml/2006/main">
   <p:cSld>
     <p:spTree>
       <p:nvGrpSpPr>
@@ -3106,7 +3101,14 @@
         <p:cNvGrpSpPr/>
         <p:nvPr/>
       </p:nvGrpSpPr>
-      <p:grpSpPr/>
+      <p:grpSpPr>
+        <a:xfrm>
+          <a:off x="0" y="0"/>
+          <a:ext cx="0" cy="0"/>
+          <a:chOff x="0" y="0"/>
+          <a:chExt cx="0" cy="0"/>
+        </a:xfrm>
+      </p:grpSpPr>
       <p:sp>
         <p:nvSpPr>
           <p:cNvPr id="2" name="TextBox 1"/>
@@ -3182,6 +3184,7 @@
           <a:lstStyle/>
           <a:p>
             <a:pPr algn="ctr"/>
+            <a:endParaRPr/>
           </a:p>
         </p:txBody>
       </p:sp>
@@ -3223,7 +3226,7 @@
           </a:fontRef>
         </p:style>
         <p:txBody>
-          <a:bodyPr rtlCol="0" anchor="ctr" wrap="square"/>
+          <a:bodyPr wrap="square" rtlCol="0" anchor="ctr"/>
           <a:lstStyle/>
           <a:p>
             <a:pPr algn="ctr"/>
@@ -3295,6 +3298,7 @@
           <a:lstStyle/>
           <a:p>
             <a:pPr algn="ctr"/>
+            <a:endParaRPr/>
           </a:p>
         </p:txBody>
       </p:sp>
@@ -3332,7 +3336,7 @@
         </p:nvGraphicFramePr>
         <p:xfrm>
           <a:off x="274320" y="1691640"/>
-          <a:ext cx="8275320" cy="2788920"/>
+          <a:ext cx="8275320" cy="3413760"/>
         </p:xfrm>
         <a:graphic>
           <a:graphicData uri="http://schemas.openxmlformats.org/drawingml/2006/table">
@@ -3341,18 +3345,60 @@
                 <a:tableStyleId>{5C22544A-7EE6-4342-B048-85BDC9FD1C3A}</a:tableStyleId>
               </a:tblPr>
               <a:tblGrid>
-                <a:gridCol w="1325880"/>
-                <a:gridCol w="685800"/>
-                <a:gridCol w="1417320"/>
-                <a:gridCol w="960120"/>
-                <a:gridCol w="1234440"/>
-                <a:gridCol w="1234440"/>
-                <a:gridCol w="1417320"/>
+                <a:gridCol w="1325880">
+                  <a:extLst>
+                    <a:ext uri="{9D8B030D-6E8A-4147-A177-3AD203B41FA5}">
+                      <a16:colId xmlns:a16="http://schemas.microsoft.com/office/drawing/2014/main" val="20000"/>
+                    </a:ext>
+                  </a:extLst>
+                </a:gridCol>
+                <a:gridCol w="685800">
+                  <a:extLst>
+                    <a:ext uri="{9D8B030D-6E8A-4147-A177-3AD203B41FA5}">
+                      <a16:colId xmlns:a16="http://schemas.microsoft.com/office/drawing/2014/main" val="20001"/>
+                    </a:ext>
+                  </a:extLst>
+                </a:gridCol>
+                <a:gridCol w="1417320">
+                  <a:extLst>
+                    <a:ext uri="{9D8B030D-6E8A-4147-A177-3AD203B41FA5}">
+                      <a16:colId xmlns:a16="http://schemas.microsoft.com/office/drawing/2014/main" val="20002"/>
+                    </a:ext>
+                  </a:extLst>
+                </a:gridCol>
+                <a:gridCol w="960120">
+                  <a:extLst>
+                    <a:ext uri="{9D8B030D-6E8A-4147-A177-3AD203B41FA5}">
+                      <a16:colId xmlns:a16="http://schemas.microsoft.com/office/drawing/2014/main" val="20003"/>
+                    </a:ext>
+                  </a:extLst>
+                </a:gridCol>
+                <a:gridCol w="1234440">
+                  <a:extLst>
+                    <a:ext uri="{9D8B030D-6E8A-4147-A177-3AD203B41FA5}">
+                      <a16:colId xmlns:a16="http://schemas.microsoft.com/office/drawing/2014/main" val="20004"/>
+                    </a:ext>
+                  </a:extLst>
+                </a:gridCol>
+                <a:gridCol w="1234440">
+                  <a:extLst>
+                    <a:ext uri="{9D8B030D-6E8A-4147-A177-3AD203B41FA5}">
+                      <a16:colId xmlns:a16="http://schemas.microsoft.com/office/drawing/2014/main" val="20005"/>
+                    </a:ext>
+                  </a:extLst>
+                </a:gridCol>
+                <a:gridCol w="1417320">
+                  <a:extLst>
+                    <a:ext uri="{9D8B030D-6E8A-4147-A177-3AD203B41FA5}">
+                      <a16:colId xmlns:a16="http://schemas.microsoft.com/office/drawing/2014/main" val="20006"/>
+                    </a:ext>
+                  </a:extLst>
+                </a:gridCol>
               </a:tblGrid>
               <a:tr h="199208">
                 <a:tc>
                   <a:txBody>
-                    <a:bodyPr wrap="square"/>
+                    <a:bodyPr/>
                     <a:lstStyle/>
                     <a:p>
                       <a:pPr algn="ctr"/>
@@ -3376,7 +3422,7 @@
                 </a:tc>
                 <a:tc>
                   <a:txBody>
-                    <a:bodyPr wrap="square"/>
+                    <a:bodyPr/>
                     <a:lstStyle/>
                     <a:p>
                       <a:pPr algn="ctr"/>
@@ -3400,7 +3446,7 @@
                 </a:tc>
                 <a:tc>
                   <a:txBody>
-                    <a:bodyPr wrap="square"/>
+                    <a:bodyPr/>
                     <a:lstStyle/>
                     <a:p>
                       <a:pPr algn="ctr"/>
@@ -3424,7 +3470,7 @@
                 </a:tc>
                 <a:tc>
                   <a:txBody>
-                    <a:bodyPr wrap="square"/>
+                    <a:bodyPr/>
                     <a:lstStyle/>
                     <a:p>
                       <a:pPr algn="ctr"/>
@@ -3448,7 +3494,7 @@
                 </a:tc>
                 <a:tc>
                   <a:txBody>
-                    <a:bodyPr wrap="square"/>
+                    <a:bodyPr/>
                     <a:lstStyle/>
                     <a:p>
                       <a:pPr algn="ctr"/>
@@ -3472,7 +3518,7 @@
                 </a:tc>
                 <a:tc>
                   <a:txBody>
-                    <a:bodyPr wrap="square"/>
+                    <a:bodyPr/>
                     <a:lstStyle/>
                     <a:p>
                       <a:pPr algn="ctr"/>
@@ -3496,7 +3542,7 @@
                 </a:tc>
                 <a:tc>
                   <a:txBody>
-                    <a:bodyPr wrap="square"/>
+                    <a:bodyPr/>
                     <a:lstStyle/>
                     <a:p>
                       <a:pPr algn="ctr"/>
@@ -3518,11 +3564,16 @@
                     </a:solidFill>
                   </a:tcPr>
                 </a:tc>
+                <a:extLst>
+                  <a:ext uri="{0D108BD9-81ED-4DB2-BD59-A6C34878D82A}">
+                    <a16:rowId xmlns:a16="http://schemas.microsoft.com/office/drawing/2014/main" val="10000"/>
+                  </a:ext>
+                </a:extLst>
               </a:tr>
               <a:tr h="199208">
                 <a:tc>
                   <a:txBody>
-                    <a:bodyPr wrap="square"/>
+                    <a:bodyPr/>
                     <a:lstStyle/>
                     <a:p>
                       <a:pPr algn="l"/>
@@ -3546,7 +3597,7 @@
                 </a:tc>
                 <a:tc>
                   <a:txBody>
-                    <a:bodyPr wrap="square"/>
+                    <a:bodyPr/>
                     <a:lstStyle/>
                     <a:p>
                       <a:pPr algn="ctr"/>
@@ -3570,7 +3621,7 @@
                 </a:tc>
                 <a:tc>
                   <a:txBody>
-                    <a:bodyPr wrap="square"/>
+                    <a:bodyPr/>
                     <a:lstStyle/>
                     <a:p>
                       <a:pPr algn="ctr"/>
@@ -3594,7 +3645,7 @@
                 </a:tc>
                 <a:tc>
                   <a:txBody>
-                    <a:bodyPr wrap="square"/>
+                    <a:bodyPr/>
                     <a:lstStyle/>
                     <a:p>
                       <a:pPr algn="ctr"/>
@@ -3618,7 +3669,7 @@
                 </a:tc>
                 <a:tc>
                   <a:txBody>
-                    <a:bodyPr wrap="square"/>
+                    <a:bodyPr/>
                     <a:lstStyle/>
                     <a:p>
                       <a:pPr algn="ctr"/>
@@ -3642,7 +3693,7 @@
                 </a:tc>
                 <a:tc>
                   <a:txBody>
-                    <a:bodyPr wrap="square"/>
+                    <a:bodyPr/>
                     <a:lstStyle/>
                     <a:p>
                       <a:pPr algn="ctr"/>
@@ -3666,7 +3717,7 @@
                 </a:tc>
                 <a:tc>
                   <a:txBody>
-                    <a:bodyPr wrap="square"/>
+                    <a:bodyPr/>
                     <a:lstStyle/>
                     <a:p>
                       <a:pPr algn="ctr"/>
@@ -3688,11 +3739,16 @@
                     </a:solidFill>
                   </a:tcPr>
                 </a:tc>
+                <a:extLst>
+                  <a:ext uri="{0D108BD9-81ED-4DB2-BD59-A6C34878D82A}">
+                    <a16:rowId xmlns:a16="http://schemas.microsoft.com/office/drawing/2014/main" val="10001"/>
+                  </a:ext>
+                </a:extLst>
               </a:tr>
               <a:tr h="199208">
                 <a:tc>
                   <a:txBody>
-                    <a:bodyPr wrap="square"/>
+                    <a:bodyPr/>
                     <a:lstStyle/>
                     <a:p>
                       <a:pPr algn="l"/>
@@ -3716,7 +3772,7 @@
                 </a:tc>
                 <a:tc>
                   <a:txBody>
-                    <a:bodyPr wrap="square"/>
+                    <a:bodyPr/>
                     <a:lstStyle/>
                     <a:p>
                       <a:pPr algn="ctr"/>
@@ -3740,7 +3796,7 @@
                 </a:tc>
                 <a:tc>
                   <a:txBody>
-                    <a:bodyPr wrap="square"/>
+                    <a:bodyPr/>
                     <a:lstStyle/>
                     <a:p>
                       <a:pPr algn="ctr"/>
@@ -3764,7 +3820,7 @@
                 </a:tc>
                 <a:tc>
                   <a:txBody>
-                    <a:bodyPr wrap="square"/>
+                    <a:bodyPr/>
                     <a:lstStyle/>
                     <a:p>
                       <a:pPr algn="ctr"/>
@@ -3788,7 +3844,7 @@
                 </a:tc>
                 <a:tc>
                   <a:txBody>
-                    <a:bodyPr wrap="square"/>
+                    <a:bodyPr/>
                     <a:lstStyle/>
                     <a:p>
                       <a:pPr algn="ctr"/>
@@ -3812,7 +3868,7 @@
                 </a:tc>
                 <a:tc>
                   <a:txBody>
-                    <a:bodyPr wrap="square"/>
+                    <a:bodyPr/>
                     <a:lstStyle/>
                     <a:p>
                       <a:pPr algn="ctr"/>
@@ -3836,7 +3892,7 @@
                 </a:tc>
                 <a:tc>
                   <a:txBody>
-                    <a:bodyPr wrap="square"/>
+                    <a:bodyPr/>
                     <a:lstStyle/>
                     <a:p>
                       <a:pPr algn="ctr"/>
@@ -3858,11 +3914,16 @@
                     </a:solidFill>
                   </a:tcPr>
                 </a:tc>
+                <a:extLst>
+                  <a:ext uri="{0D108BD9-81ED-4DB2-BD59-A6C34878D82A}">
+                    <a16:rowId xmlns:a16="http://schemas.microsoft.com/office/drawing/2014/main" val="10002"/>
+                  </a:ext>
+                </a:extLst>
               </a:tr>
               <a:tr h="199208">
                 <a:tc>
                   <a:txBody>
-                    <a:bodyPr wrap="square"/>
+                    <a:bodyPr/>
                     <a:lstStyle/>
                     <a:p>
                       <a:pPr algn="l"/>
@@ -3886,7 +3947,7 @@
                 </a:tc>
                 <a:tc>
                   <a:txBody>
-                    <a:bodyPr wrap="square"/>
+                    <a:bodyPr/>
                     <a:lstStyle/>
                     <a:p>
                       <a:pPr algn="ctr"/>
@@ -3910,7 +3971,7 @@
                 </a:tc>
                 <a:tc>
                   <a:txBody>
-                    <a:bodyPr wrap="square"/>
+                    <a:bodyPr/>
                     <a:lstStyle/>
                     <a:p>
                       <a:pPr algn="ctr"/>
@@ -3934,7 +3995,7 @@
                 </a:tc>
                 <a:tc>
                   <a:txBody>
-                    <a:bodyPr wrap="square"/>
+                    <a:bodyPr/>
                     <a:lstStyle/>
                     <a:p>
                       <a:pPr algn="ctr"/>
@@ -3958,7 +4019,7 @@
                 </a:tc>
                 <a:tc>
                   <a:txBody>
-                    <a:bodyPr wrap="square"/>
+                    <a:bodyPr/>
                     <a:lstStyle/>
                     <a:p>
                       <a:pPr algn="ctr"/>
@@ -3982,7 +4043,7 @@
                 </a:tc>
                 <a:tc>
                   <a:txBody>
-                    <a:bodyPr wrap="square"/>
+                    <a:bodyPr/>
                     <a:lstStyle/>
                     <a:p>
                       <a:pPr algn="ctr"/>
@@ -4006,7 +4067,7 @@
                 </a:tc>
                 <a:tc>
                   <a:txBody>
-                    <a:bodyPr wrap="square"/>
+                    <a:bodyPr/>
                     <a:lstStyle/>
                     <a:p>
                       <a:pPr algn="ctr"/>
@@ -4028,11 +4089,16 @@
                     </a:solidFill>
                   </a:tcPr>
                 </a:tc>
+                <a:extLst>
+                  <a:ext uri="{0D108BD9-81ED-4DB2-BD59-A6C34878D82A}">
+                    <a16:rowId xmlns:a16="http://schemas.microsoft.com/office/drawing/2014/main" val="10003"/>
+                  </a:ext>
+                </a:extLst>
               </a:tr>
               <a:tr h="199208">
                 <a:tc>
                   <a:txBody>
-                    <a:bodyPr wrap="square"/>
+                    <a:bodyPr/>
                     <a:lstStyle/>
                     <a:p>
                       <a:pPr algn="l"/>
@@ -4056,7 +4122,7 @@
                 </a:tc>
                 <a:tc>
                   <a:txBody>
-                    <a:bodyPr wrap="square"/>
+                    <a:bodyPr/>
                     <a:lstStyle/>
                     <a:p>
                       <a:pPr algn="ctr"/>
@@ -4080,7 +4146,7 @@
                 </a:tc>
                 <a:tc>
                   <a:txBody>
-                    <a:bodyPr wrap="square"/>
+                    <a:bodyPr/>
                     <a:lstStyle/>
                     <a:p>
                       <a:pPr algn="ctr"/>
@@ -4104,7 +4170,7 @@
                 </a:tc>
                 <a:tc>
                   <a:txBody>
-                    <a:bodyPr wrap="square"/>
+                    <a:bodyPr/>
                     <a:lstStyle/>
                     <a:p>
                       <a:pPr algn="ctr"/>
@@ -4128,7 +4194,7 @@
                 </a:tc>
                 <a:tc>
                   <a:txBody>
-                    <a:bodyPr wrap="square"/>
+                    <a:bodyPr/>
                     <a:lstStyle/>
                     <a:p>
                       <a:pPr algn="ctr"/>
@@ -4152,7 +4218,7 @@
                 </a:tc>
                 <a:tc>
                   <a:txBody>
-                    <a:bodyPr wrap="square"/>
+                    <a:bodyPr/>
                     <a:lstStyle/>
                     <a:p>
                       <a:pPr algn="ctr"/>
@@ -4176,7 +4242,7 @@
                 </a:tc>
                 <a:tc>
                   <a:txBody>
-                    <a:bodyPr wrap="square"/>
+                    <a:bodyPr/>
                     <a:lstStyle/>
                     <a:p>
                       <a:pPr algn="ctr"/>
@@ -4198,11 +4264,16 @@
                     </a:solidFill>
                   </a:tcPr>
                 </a:tc>
+                <a:extLst>
+                  <a:ext uri="{0D108BD9-81ED-4DB2-BD59-A6C34878D82A}">
+                    <a16:rowId xmlns:a16="http://schemas.microsoft.com/office/drawing/2014/main" val="10004"/>
+                  </a:ext>
+                </a:extLst>
               </a:tr>
               <a:tr h="199208">
                 <a:tc>
                   <a:txBody>
-                    <a:bodyPr wrap="square"/>
+                    <a:bodyPr/>
                     <a:lstStyle/>
                     <a:p>
                       <a:pPr algn="l"/>
@@ -4226,7 +4297,7 @@
                 </a:tc>
                 <a:tc>
                   <a:txBody>
-                    <a:bodyPr wrap="square"/>
+                    <a:bodyPr/>
                     <a:lstStyle/>
                     <a:p>
                       <a:pPr algn="ctr"/>
@@ -4250,7 +4321,7 @@
                 </a:tc>
                 <a:tc>
                   <a:txBody>
-                    <a:bodyPr wrap="square"/>
+                    <a:bodyPr/>
                     <a:lstStyle/>
                     <a:p>
                       <a:pPr algn="ctr"/>
@@ -4274,7 +4345,7 @@
                 </a:tc>
                 <a:tc>
                   <a:txBody>
-                    <a:bodyPr wrap="square"/>
+                    <a:bodyPr/>
                     <a:lstStyle/>
                     <a:p>
                       <a:pPr algn="ctr"/>
@@ -4298,7 +4369,7 @@
                 </a:tc>
                 <a:tc>
                   <a:txBody>
-                    <a:bodyPr wrap="square"/>
+                    <a:bodyPr/>
                     <a:lstStyle/>
                     <a:p>
                       <a:pPr algn="ctr"/>
@@ -4322,7 +4393,7 @@
                 </a:tc>
                 <a:tc>
                   <a:txBody>
-                    <a:bodyPr wrap="square"/>
+                    <a:bodyPr/>
                     <a:lstStyle/>
                     <a:p>
                       <a:pPr algn="ctr"/>
@@ -4346,7 +4417,7 @@
                 </a:tc>
                 <a:tc>
                   <a:txBody>
-                    <a:bodyPr wrap="square"/>
+                    <a:bodyPr/>
                     <a:lstStyle/>
                     <a:p>
                       <a:pPr algn="ctr"/>
@@ -4368,11 +4439,16 @@
                     </a:solidFill>
                   </a:tcPr>
                 </a:tc>
+                <a:extLst>
+                  <a:ext uri="{0D108BD9-81ED-4DB2-BD59-A6C34878D82A}">
+                    <a16:rowId xmlns:a16="http://schemas.microsoft.com/office/drawing/2014/main" val="10005"/>
+                  </a:ext>
+                </a:extLst>
               </a:tr>
               <a:tr h="199208">
                 <a:tc>
                   <a:txBody>
-                    <a:bodyPr wrap="square"/>
+                    <a:bodyPr/>
                     <a:lstStyle/>
                     <a:p>
                       <a:pPr algn="l"/>
@@ -4396,7 +4472,7 @@
                 </a:tc>
                 <a:tc>
                   <a:txBody>
-                    <a:bodyPr wrap="square"/>
+                    <a:bodyPr/>
                     <a:lstStyle/>
                     <a:p>
                       <a:pPr algn="ctr"/>
@@ -4420,7 +4496,7 @@
                 </a:tc>
                 <a:tc>
                   <a:txBody>
-                    <a:bodyPr wrap="square"/>
+                    <a:bodyPr/>
                     <a:lstStyle/>
                     <a:p>
                       <a:pPr algn="ctr"/>
@@ -4444,7 +4520,7 @@
                 </a:tc>
                 <a:tc>
                   <a:txBody>
-                    <a:bodyPr wrap="square"/>
+                    <a:bodyPr/>
                     <a:lstStyle/>
                     <a:p>
                       <a:pPr algn="ctr"/>
@@ -4468,7 +4544,7 @@
                 </a:tc>
                 <a:tc>
                   <a:txBody>
-                    <a:bodyPr wrap="square"/>
+                    <a:bodyPr/>
                     <a:lstStyle/>
                     <a:p>
                       <a:pPr algn="ctr"/>
@@ -4492,7 +4568,7 @@
                 </a:tc>
                 <a:tc>
                   <a:txBody>
-                    <a:bodyPr wrap="square"/>
+                    <a:bodyPr/>
                     <a:lstStyle/>
                     <a:p>
                       <a:pPr algn="ctr"/>
@@ -4516,7 +4592,7 @@
                 </a:tc>
                 <a:tc>
                   <a:txBody>
-                    <a:bodyPr wrap="square"/>
+                    <a:bodyPr/>
                     <a:lstStyle/>
                     <a:p>
                       <a:pPr algn="ctr"/>
@@ -4538,11 +4614,16 @@
                     </a:solidFill>
                   </a:tcPr>
                 </a:tc>
+                <a:extLst>
+                  <a:ext uri="{0D108BD9-81ED-4DB2-BD59-A6C34878D82A}">
+                    <a16:rowId xmlns:a16="http://schemas.microsoft.com/office/drawing/2014/main" val="10006"/>
+                  </a:ext>
+                </a:extLst>
               </a:tr>
               <a:tr h="199208">
                 <a:tc>
                   <a:txBody>
-                    <a:bodyPr wrap="square"/>
+                    <a:bodyPr/>
                     <a:lstStyle/>
                     <a:p>
                       <a:pPr algn="l"/>
@@ -4566,7 +4647,7 @@
                 </a:tc>
                 <a:tc>
                   <a:txBody>
-                    <a:bodyPr wrap="square"/>
+                    <a:bodyPr/>
                     <a:lstStyle/>
                     <a:p>
                       <a:pPr algn="ctr"/>
@@ -4590,7 +4671,7 @@
                 </a:tc>
                 <a:tc>
                   <a:txBody>
-                    <a:bodyPr wrap="square"/>
+                    <a:bodyPr/>
                     <a:lstStyle/>
                     <a:p>
                       <a:pPr algn="ctr"/>
@@ -4614,7 +4695,7 @@
                 </a:tc>
                 <a:tc>
                   <a:txBody>
-                    <a:bodyPr wrap="square"/>
+                    <a:bodyPr/>
                     <a:lstStyle/>
                     <a:p>
                       <a:pPr algn="ctr"/>
@@ -4638,7 +4719,7 @@
                 </a:tc>
                 <a:tc>
                   <a:txBody>
-                    <a:bodyPr wrap="square"/>
+                    <a:bodyPr/>
                     <a:lstStyle/>
                     <a:p>
                       <a:pPr algn="ctr"/>
@@ -4662,7 +4743,7 @@
                 </a:tc>
                 <a:tc>
                   <a:txBody>
-                    <a:bodyPr wrap="square"/>
+                    <a:bodyPr/>
                     <a:lstStyle/>
                     <a:p>
                       <a:pPr algn="ctr"/>
@@ -4686,7 +4767,7 @@
                 </a:tc>
                 <a:tc>
                   <a:txBody>
-                    <a:bodyPr wrap="square"/>
+                    <a:bodyPr/>
                     <a:lstStyle/>
                     <a:p>
                       <a:pPr algn="ctr"/>
@@ -4708,11 +4789,16 @@
                     </a:solidFill>
                   </a:tcPr>
                 </a:tc>
+                <a:extLst>
+                  <a:ext uri="{0D108BD9-81ED-4DB2-BD59-A6C34878D82A}">
+                    <a16:rowId xmlns:a16="http://schemas.microsoft.com/office/drawing/2014/main" val="10007"/>
+                  </a:ext>
+                </a:extLst>
               </a:tr>
               <a:tr h="199208">
                 <a:tc>
                   <a:txBody>
-                    <a:bodyPr wrap="square"/>
+                    <a:bodyPr/>
                     <a:lstStyle/>
                     <a:p>
                       <a:pPr algn="l"/>
@@ -4736,7 +4822,7 @@
                 </a:tc>
                 <a:tc>
                   <a:txBody>
-                    <a:bodyPr wrap="square"/>
+                    <a:bodyPr/>
                     <a:lstStyle/>
                     <a:p>
                       <a:pPr algn="ctr"/>
@@ -4760,7 +4846,7 @@
                 </a:tc>
                 <a:tc>
                   <a:txBody>
-                    <a:bodyPr wrap="square"/>
+                    <a:bodyPr/>
                     <a:lstStyle/>
                     <a:p>
                       <a:pPr algn="ctr"/>
@@ -4784,7 +4870,7 @@
                 </a:tc>
                 <a:tc>
                   <a:txBody>
-                    <a:bodyPr wrap="square"/>
+                    <a:bodyPr/>
                     <a:lstStyle/>
                     <a:p>
                       <a:pPr algn="ctr"/>
@@ -4808,7 +4894,7 @@
                 </a:tc>
                 <a:tc>
                   <a:txBody>
-                    <a:bodyPr wrap="square"/>
+                    <a:bodyPr/>
                     <a:lstStyle/>
                     <a:p>
                       <a:pPr algn="ctr"/>
@@ -4832,7 +4918,7 @@
                 </a:tc>
                 <a:tc>
                   <a:txBody>
-                    <a:bodyPr wrap="square"/>
+                    <a:bodyPr/>
                     <a:lstStyle/>
                     <a:p>
                       <a:pPr algn="ctr"/>
@@ -4856,7 +4942,7 @@
                 </a:tc>
                 <a:tc>
                   <a:txBody>
-                    <a:bodyPr wrap="square"/>
+                    <a:bodyPr/>
                     <a:lstStyle/>
                     <a:p>
                       <a:pPr algn="ctr"/>
@@ -4878,11 +4964,16 @@
                     </a:solidFill>
                   </a:tcPr>
                 </a:tc>
+                <a:extLst>
+                  <a:ext uri="{0D108BD9-81ED-4DB2-BD59-A6C34878D82A}">
+                    <a16:rowId xmlns:a16="http://schemas.microsoft.com/office/drawing/2014/main" val="10008"/>
+                  </a:ext>
+                </a:extLst>
               </a:tr>
               <a:tr h="199208">
                 <a:tc>
                   <a:txBody>
-                    <a:bodyPr wrap="square"/>
+                    <a:bodyPr/>
                     <a:lstStyle/>
                     <a:p>
                       <a:pPr algn="l"/>
@@ -4906,7 +4997,7 @@
                 </a:tc>
                 <a:tc>
                   <a:txBody>
-                    <a:bodyPr wrap="square"/>
+                    <a:bodyPr/>
                     <a:lstStyle/>
                     <a:p>
                       <a:pPr algn="ctr"/>
@@ -4930,7 +5021,7 @@
                 </a:tc>
                 <a:tc>
                   <a:txBody>
-                    <a:bodyPr wrap="square"/>
+                    <a:bodyPr/>
                     <a:lstStyle/>
                     <a:p>
                       <a:pPr algn="ctr"/>
@@ -4954,7 +5045,7 @@
                 </a:tc>
                 <a:tc>
                   <a:txBody>
-                    <a:bodyPr wrap="square"/>
+                    <a:bodyPr/>
                     <a:lstStyle/>
                     <a:p>
                       <a:pPr algn="ctr"/>
@@ -4978,7 +5069,7 @@
                 </a:tc>
                 <a:tc>
                   <a:txBody>
-                    <a:bodyPr wrap="square"/>
+                    <a:bodyPr/>
                     <a:lstStyle/>
                     <a:p>
                       <a:pPr algn="ctr"/>
@@ -5002,7 +5093,7 @@
                 </a:tc>
                 <a:tc>
                   <a:txBody>
-                    <a:bodyPr wrap="square"/>
+                    <a:bodyPr/>
                     <a:lstStyle/>
                     <a:p>
                       <a:pPr algn="ctr"/>
@@ -5026,7 +5117,7 @@
                 </a:tc>
                 <a:tc>
                   <a:txBody>
-                    <a:bodyPr wrap="square"/>
+                    <a:bodyPr/>
                     <a:lstStyle/>
                     <a:p>
                       <a:pPr algn="ctr"/>
@@ -5048,11 +5139,16 @@
                     </a:solidFill>
                   </a:tcPr>
                 </a:tc>
+                <a:extLst>
+                  <a:ext uri="{0D108BD9-81ED-4DB2-BD59-A6C34878D82A}">
+                    <a16:rowId xmlns:a16="http://schemas.microsoft.com/office/drawing/2014/main" val="10009"/>
+                  </a:ext>
+                </a:extLst>
               </a:tr>
               <a:tr h="199208">
                 <a:tc>
                   <a:txBody>
-                    <a:bodyPr wrap="square"/>
+                    <a:bodyPr/>
                     <a:lstStyle/>
                     <a:p>
                       <a:pPr algn="l"/>
@@ -5076,7 +5172,7 @@
                 </a:tc>
                 <a:tc>
                   <a:txBody>
-                    <a:bodyPr wrap="square"/>
+                    <a:bodyPr/>
                     <a:lstStyle/>
                     <a:p>
                       <a:pPr algn="ctr"/>
@@ -5100,7 +5196,7 @@
                 </a:tc>
                 <a:tc>
                   <a:txBody>
-                    <a:bodyPr wrap="square"/>
+                    <a:bodyPr/>
                     <a:lstStyle/>
                     <a:p>
                       <a:pPr algn="ctr"/>
@@ -5124,7 +5220,7 @@
                 </a:tc>
                 <a:tc>
                   <a:txBody>
-                    <a:bodyPr wrap="square"/>
+                    <a:bodyPr/>
                     <a:lstStyle/>
                     <a:p>
                       <a:pPr algn="ctr"/>
@@ -5148,7 +5244,7 @@
                 </a:tc>
                 <a:tc>
                   <a:txBody>
-                    <a:bodyPr wrap="square"/>
+                    <a:bodyPr/>
                     <a:lstStyle/>
                     <a:p>
                       <a:pPr algn="ctr"/>
@@ -5172,7 +5268,7 @@
                 </a:tc>
                 <a:tc>
                   <a:txBody>
-                    <a:bodyPr wrap="square"/>
+                    <a:bodyPr/>
                     <a:lstStyle/>
                     <a:p>
                       <a:pPr algn="ctr"/>
@@ -5196,7 +5292,7 @@
                 </a:tc>
                 <a:tc>
                   <a:txBody>
-                    <a:bodyPr wrap="square"/>
+                    <a:bodyPr/>
                     <a:lstStyle/>
                     <a:p>
                       <a:pPr algn="ctr"/>
@@ -5218,11 +5314,16 @@
                     </a:solidFill>
                   </a:tcPr>
                 </a:tc>
+                <a:extLst>
+                  <a:ext uri="{0D108BD9-81ED-4DB2-BD59-A6C34878D82A}">
+                    <a16:rowId xmlns:a16="http://schemas.microsoft.com/office/drawing/2014/main" val="10010"/>
+                  </a:ext>
+                </a:extLst>
               </a:tr>
               <a:tr h="199208">
                 <a:tc>
                   <a:txBody>
-                    <a:bodyPr wrap="square"/>
+                    <a:bodyPr/>
                     <a:lstStyle/>
                     <a:p>
                       <a:pPr algn="l"/>
@@ -5246,7 +5347,7 @@
                 </a:tc>
                 <a:tc>
                   <a:txBody>
-                    <a:bodyPr wrap="square"/>
+                    <a:bodyPr/>
                     <a:lstStyle/>
                     <a:p>
                       <a:pPr algn="ctr"/>
@@ -5270,7 +5371,7 @@
                 </a:tc>
                 <a:tc>
                   <a:txBody>
-                    <a:bodyPr wrap="square"/>
+                    <a:bodyPr/>
                     <a:lstStyle/>
                     <a:p>
                       <a:pPr algn="ctr"/>
@@ -5294,7 +5395,7 @@
                 </a:tc>
                 <a:tc>
                   <a:txBody>
-                    <a:bodyPr wrap="square"/>
+                    <a:bodyPr/>
                     <a:lstStyle/>
                     <a:p>
                       <a:pPr algn="ctr"/>
@@ -5318,7 +5419,7 @@
                 </a:tc>
                 <a:tc>
                   <a:txBody>
-                    <a:bodyPr wrap="square"/>
+                    <a:bodyPr/>
                     <a:lstStyle/>
                     <a:p>
                       <a:pPr algn="ctr"/>
@@ -5342,7 +5443,7 @@
                 </a:tc>
                 <a:tc>
                   <a:txBody>
-                    <a:bodyPr wrap="square"/>
+                    <a:bodyPr/>
                     <a:lstStyle/>
                     <a:p>
                       <a:pPr algn="ctr"/>
@@ -5366,7 +5467,7 @@
                 </a:tc>
                 <a:tc>
                   <a:txBody>
-                    <a:bodyPr wrap="square"/>
+                    <a:bodyPr/>
                     <a:lstStyle/>
                     <a:p>
                       <a:pPr algn="ctr"/>
@@ -5388,11 +5489,16 @@
                     </a:solidFill>
                   </a:tcPr>
                 </a:tc>
+                <a:extLst>
+                  <a:ext uri="{0D108BD9-81ED-4DB2-BD59-A6C34878D82A}">
+                    <a16:rowId xmlns:a16="http://schemas.microsoft.com/office/drawing/2014/main" val="10011"/>
+                  </a:ext>
+                </a:extLst>
               </a:tr>
               <a:tr h="199208">
                 <a:tc>
                   <a:txBody>
-                    <a:bodyPr wrap="square"/>
+                    <a:bodyPr/>
                     <a:lstStyle/>
                     <a:p>
                       <a:pPr algn="l"/>
@@ -5416,7 +5522,7 @@
                 </a:tc>
                 <a:tc>
                   <a:txBody>
-                    <a:bodyPr wrap="square"/>
+                    <a:bodyPr/>
                     <a:lstStyle/>
                     <a:p>
                       <a:pPr algn="ctr"/>
@@ -5440,7 +5546,7 @@
                 </a:tc>
                 <a:tc>
                   <a:txBody>
-                    <a:bodyPr wrap="square"/>
+                    <a:bodyPr/>
                     <a:lstStyle/>
                     <a:p>
                       <a:pPr algn="ctr"/>
@@ -5464,7 +5570,7 @@
                 </a:tc>
                 <a:tc>
                   <a:txBody>
-                    <a:bodyPr wrap="square"/>
+                    <a:bodyPr/>
                     <a:lstStyle/>
                     <a:p>
                       <a:pPr algn="ctr"/>
@@ -5488,7 +5594,7 @@
                 </a:tc>
                 <a:tc>
                   <a:txBody>
-                    <a:bodyPr wrap="square"/>
+                    <a:bodyPr/>
                     <a:lstStyle/>
                     <a:p>
                       <a:pPr algn="ctr"/>
@@ -5512,7 +5618,7 @@
                 </a:tc>
                 <a:tc>
                   <a:txBody>
-                    <a:bodyPr wrap="square"/>
+                    <a:bodyPr/>
                     <a:lstStyle/>
                     <a:p>
                       <a:pPr algn="ctr"/>
@@ -5536,7 +5642,7 @@
                 </a:tc>
                 <a:tc>
                   <a:txBody>
-                    <a:bodyPr wrap="square"/>
+                    <a:bodyPr/>
                     <a:lstStyle/>
                     <a:p>
                       <a:pPr algn="ctr"/>
@@ -5558,11 +5664,16 @@
                     </a:solidFill>
                   </a:tcPr>
                 </a:tc>
+                <a:extLst>
+                  <a:ext uri="{0D108BD9-81ED-4DB2-BD59-A6C34878D82A}">
+                    <a16:rowId xmlns:a16="http://schemas.microsoft.com/office/drawing/2014/main" val="10012"/>
+                  </a:ext>
+                </a:extLst>
               </a:tr>
               <a:tr h="199216">
                 <a:tc>
                   <a:txBody>
-                    <a:bodyPr wrap="square"/>
+                    <a:bodyPr/>
                     <a:lstStyle/>
                     <a:p>
                       <a:pPr algn="l"/>
@@ -5586,7 +5697,7 @@
                 </a:tc>
                 <a:tc>
                   <a:txBody>
-                    <a:bodyPr wrap="square"/>
+                    <a:bodyPr/>
                     <a:lstStyle/>
                     <a:p>
                       <a:pPr algn="ctr"/>
@@ -5610,7 +5721,7 @@
                 </a:tc>
                 <a:tc>
                   <a:txBody>
-                    <a:bodyPr wrap="square"/>
+                    <a:bodyPr/>
                     <a:lstStyle/>
                     <a:p>
                       <a:pPr algn="ctr"/>
@@ -5634,7 +5745,7 @@
                 </a:tc>
                 <a:tc>
                   <a:txBody>
-                    <a:bodyPr wrap="square"/>
+                    <a:bodyPr/>
                     <a:lstStyle/>
                     <a:p>
                       <a:pPr algn="ctr"/>
@@ -5658,7 +5769,7 @@
                 </a:tc>
                 <a:tc>
                   <a:txBody>
-                    <a:bodyPr wrap="square"/>
+                    <a:bodyPr/>
                     <a:lstStyle/>
                     <a:p>
                       <a:pPr algn="ctr"/>
@@ -5682,7 +5793,7 @@
                 </a:tc>
                 <a:tc>
                   <a:txBody>
-                    <a:bodyPr wrap="square"/>
+                    <a:bodyPr/>
                     <a:lstStyle/>
                     <a:p>
                       <a:pPr algn="ctr"/>
@@ -5706,7 +5817,7 @@
                 </a:tc>
                 <a:tc>
                   <a:txBody>
-                    <a:bodyPr wrap="square"/>
+                    <a:bodyPr/>
                     <a:lstStyle/>
                     <a:p>
                       <a:pPr algn="ctr"/>
@@ -5728,6 +5839,11 @@
                     </a:solidFill>
                   </a:tcPr>
                 </a:tc>
+                <a:extLst>
+                  <a:ext uri="{0D108BD9-81ED-4DB2-BD59-A6C34878D82A}">
+                    <a16:rowId xmlns:a16="http://schemas.microsoft.com/office/drawing/2014/main" val="10013"/>
+                  </a:ext>
+                </a:extLst>
               </a:tr>
             </a:tbl>
           </a:graphicData>
@@ -5813,7 +5929,7 @@
 </file>
 
 <file path=ppt/slides/slide10.xml><?xml version="1.0" encoding="utf-8"?>
-<p:sld xmlns:a="http://schemas.openxmlformats.org/drawingml/2006/main" xmlns:p="http://schemas.openxmlformats.org/presentationml/2006/main" xmlns:r="http://schemas.openxmlformats.org/officeDocument/2006/relationships">
+<p:sld xmlns:a="http://schemas.openxmlformats.org/drawingml/2006/main" xmlns:r="http://schemas.openxmlformats.org/officeDocument/2006/relationships" xmlns:p="http://schemas.openxmlformats.org/presentationml/2006/main">
   <p:cSld>
     <p:spTree>
       <p:nvGrpSpPr>
@@ -5821,7 +5937,14 @@
         <p:cNvGrpSpPr/>
         <p:nvPr/>
       </p:nvGrpSpPr>
-      <p:grpSpPr/>
+      <p:grpSpPr>
+        <a:xfrm>
+          <a:off x="0" y="0"/>
+          <a:ext cx="0" cy="0"/>
+          <a:chOff x="0" y="0"/>
+          <a:chExt cx="0" cy="0"/>
+        </a:xfrm>
+      </p:grpSpPr>
       <p:sp>
         <p:nvSpPr>
           <p:cNvPr id="2" name="TextBox 1"/>
@@ -5897,6 +6020,7 @@
           <a:lstStyle/>
           <a:p>
             <a:pPr algn="ctr"/>
+            <a:endParaRPr/>
           </a:p>
         </p:txBody>
       </p:sp>
@@ -5977,6 +6101,7 @@
           <a:lstStyle/>
           <a:p>
             <a:pPr algn="ctr"/>
+            <a:endParaRPr/>
           </a:p>
         </p:txBody>
       </p:sp>
@@ -6081,6 +6206,7 @@
           <a:lstStyle/>
           <a:p>
             <a:pPr algn="ctr"/>
+            <a:endParaRPr/>
           </a:p>
         </p:txBody>
       </p:sp>
@@ -6210,7 +6336,7 @@
 </file>
 
 <file path=ppt/slides/slide11.xml><?xml version="1.0" encoding="utf-8"?>
-<p:sld xmlns:a="http://schemas.openxmlformats.org/drawingml/2006/main" xmlns:p="http://schemas.openxmlformats.org/presentationml/2006/main" xmlns:r="http://schemas.openxmlformats.org/officeDocument/2006/relationships">
+<p:sld xmlns:a="http://schemas.openxmlformats.org/drawingml/2006/main" xmlns:r="http://schemas.openxmlformats.org/officeDocument/2006/relationships" xmlns:p="http://schemas.openxmlformats.org/presentationml/2006/main">
   <p:cSld>
     <p:spTree>
       <p:nvGrpSpPr>
@@ -6218,7 +6344,14 @@
         <p:cNvGrpSpPr/>
         <p:nvPr/>
       </p:nvGrpSpPr>
-      <p:grpSpPr/>
+      <p:grpSpPr>
+        <a:xfrm>
+          <a:off x="0" y="0"/>
+          <a:ext cx="0" cy="0"/>
+          <a:chOff x="0" y="0"/>
+          <a:chExt cx="0" cy="0"/>
+        </a:xfrm>
+      </p:grpSpPr>
       <p:sp>
         <p:nvSpPr>
           <p:cNvPr id="2" name="TextBox 1"/>
@@ -6294,6 +6427,7 @@
           <a:lstStyle/>
           <a:p>
             <a:pPr algn="ctr"/>
+            <a:endParaRPr/>
           </a:p>
         </p:txBody>
       </p:sp>
@@ -6409,6 +6543,7 @@
           <a:lstStyle/>
           <a:p>
             <a:pPr algn="ctr"/>
+            <a:endParaRPr/>
           </a:p>
         </p:txBody>
       </p:sp>
@@ -6513,6 +6648,7 @@
           <a:lstStyle/>
           <a:p>
             <a:pPr algn="ctr"/>
+            <a:endParaRPr/>
           </a:p>
         </p:txBody>
       </p:sp>
@@ -6617,6 +6753,7 @@
           <a:lstStyle/>
           <a:p>
             <a:pPr algn="ctr"/>
+            <a:endParaRPr/>
           </a:p>
         </p:txBody>
       </p:sp>
@@ -6689,7 +6826,7 @@
 </file>
 
 <file path=ppt/slides/slide12.xml><?xml version="1.0" encoding="utf-8"?>
-<p:sld xmlns:a="http://schemas.openxmlformats.org/drawingml/2006/main" xmlns:p="http://schemas.openxmlformats.org/presentationml/2006/main" xmlns:r="http://schemas.openxmlformats.org/officeDocument/2006/relationships">
+<p:sld xmlns:a="http://schemas.openxmlformats.org/drawingml/2006/main" xmlns:r="http://schemas.openxmlformats.org/officeDocument/2006/relationships" xmlns:p="http://schemas.openxmlformats.org/presentationml/2006/main">
   <p:cSld>
     <p:spTree>
       <p:nvGrpSpPr>
@@ -6697,7 +6834,14 @@
         <p:cNvGrpSpPr/>
         <p:nvPr/>
       </p:nvGrpSpPr>
-      <p:grpSpPr/>
+      <p:grpSpPr>
+        <a:xfrm>
+          <a:off x="0" y="0"/>
+          <a:ext cx="0" cy="0"/>
+          <a:chOff x="0" y="0"/>
+          <a:chExt cx="0" cy="0"/>
+        </a:xfrm>
+      </p:grpSpPr>
       <p:sp>
         <p:nvSpPr>
           <p:cNvPr id="2" name="TextBox 1"/>
@@ -6773,6 +6917,7 @@
           <a:lstStyle/>
           <a:p>
             <a:pPr algn="ctr"/>
+            <a:endParaRPr/>
           </a:p>
         </p:txBody>
       </p:sp>
@@ -6814,7 +6959,7 @@
           </a:fontRef>
         </p:style>
         <p:txBody>
-          <a:bodyPr rtlCol="0" anchor="ctr" wrap="square"/>
+          <a:bodyPr wrap="square" rtlCol="0" anchor="ctr"/>
           <a:lstStyle/>
           <a:p>
             <a:pPr algn="ctr"/>
@@ -6885,6 +7030,7 @@
           <a:lstStyle/>
           <a:p>
             <a:pPr algn="ctr"/>
+            <a:endParaRPr/>
           </a:p>
         </p:txBody>
       </p:sp>
@@ -6926,7 +7072,7 @@
           </a:fontRef>
         </p:style>
         <p:txBody>
-          <a:bodyPr rtlCol="0" anchor="ctr" wrap="square"/>
+          <a:bodyPr wrap="square" rtlCol="0" anchor="ctr"/>
           <a:lstStyle/>
           <a:p>
             <a:pPr algn="ctr"/>
@@ -6997,6 +7143,7 @@
           <a:lstStyle/>
           <a:p>
             <a:pPr algn="ctr"/>
+            <a:endParaRPr/>
           </a:p>
         </p:txBody>
       </p:sp>
@@ -7038,7 +7185,7 @@
           </a:fontRef>
         </p:style>
         <p:txBody>
-          <a:bodyPr rtlCol="0" anchor="ctr" wrap="square"/>
+          <a:bodyPr wrap="square" rtlCol="0" anchor="ctr"/>
           <a:lstStyle/>
           <a:p>
             <a:pPr algn="ctr"/>
@@ -7109,6 +7256,7 @@
           <a:lstStyle/>
           <a:p>
             <a:pPr algn="ctr"/>
+            <a:endParaRPr/>
           </a:p>
         </p:txBody>
       </p:sp>
@@ -7150,7 +7298,7 @@
           </a:fontRef>
         </p:style>
         <p:txBody>
-          <a:bodyPr rtlCol="0" anchor="ctr" wrap="square"/>
+          <a:bodyPr wrap="square" rtlCol="0" anchor="ctr"/>
           <a:lstStyle/>
           <a:p>
             <a:pPr algn="ctr"/>
@@ -7220,6 +7368,7 @@
           <a:lstStyle/>
           <a:p>
             <a:pPr algn="ctr"/>
+            <a:endParaRPr/>
           </a:p>
         </p:txBody>
       </p:sp>
@@ -7261,7 +7410,7 @@
           </a:fontRef>
         </p:style>
         <p:txBody>
-          <a:bodyPr rtlCol="0" anchor="ctr" wrap="square"/>
+          <a:bodyPr wrap="square" rtlCol="0" anchor="ctr"/>
           <a:lstStyle/>
           <a:p>
             <a:pPr algn="ctr"/>
@@ -7368,6 +7517,7 @@
           <a:lstStyle/>
           <a:p>
             <a:pPr algn="ctr"/>
+            <a:endParaRPr/>
           </a:p>
         </p:txBody>
       </p:sp>
@@ -7514,7 +7664,7 @@
 </file>
 
 <file path=ppt/slides/slide13.xml><?xml version="1.0" encoding="utf-8"?>
-<p:sld xmlns:a="http://schemas.openxmlformats.org/drawingml/2006/main" xmlns:p="http://schemas.openxmlformats.org/presentationml/2006/main" xmlns:r="http://schemas.openxmlformats.org/officeDocument/2006/relationships">
+<p:sld xmlns:a="http://schemas.openxmlformats.org/drawingml/2006/main" xmlns:r="http://schemas.openxmlformats.org/officeDocument/2006/relationships" xmlns:p="http://schemas.openxmlformats.org/presentationml/2006/main">
   <p:cSld>
     <p:spTree>
       <p:nvGrpSpPr>
@@ -7522,7 +7672,14 @@
         <p:cNvGrpSpPr/>
         <p:nvPr/>
       </p:nvGrpSpPr>
-      <p:grpSpPr/>
+      <p:grpSpPr>
+        <a:xfrm>
+          <a:off x="0" y="0"/>
+          <a:ext cx="0" cy="0"/>
+          <a:chOff x="0" y="0"/>
+          <a:chExt cx="0" cy="0"/>
+        </a:xfrm>
+      </p:grpSpPr>
       <p:sp>
         <p:nvSpPr>
           <p:cNvPr id="2" name="TextBox 1"/>
@@ -7598,6 +7755,7 @@
           <a:lstStyle/>
           <a:p>
             <a:pPr algn="ctr"/>
+            <a:endParaRPr/>
           </a:p>
         </p:txBody>
       </p:sp>
@@ -7698,12 +7856,12 @@
           </a:fontRef>
         </p:style>
         <p:txBody>
-          <a:bodyPr rtlCol="0" anchor="ctr" wrap="square"/>
+          <a:bodyPr wrap="square" rtlCol="0" anchor="ctr"/>
           <a:lstStyle/>
           <a:p>
             <a:pPr algn="ctr"/>
             <a:r>
-              <a:rPr sz="1000" b="1">
+              <a:rPr sz="1000" b="1" dirty="0" err="1">
                 <a:solidFill>
                   <a:srgbClr val="222222"/>
                 </a:solidFill>
@@ -7712,89 +7870,321 @@
               </a:rPr>
               <a:t>誤差棒の意味</a:t>
             </a:r>
+            <a:endParaRPr sz="1000" b="1" dirty="0">
+              <a:solidFill>
+                <a:srgbClr val="222222"/>
+              </a:solidFill>
+              <a:latin typeface="游ゴシック"/>
+              <a:ea typeface="游ゴシック"/>
+            </a:endParaRPr>
           </a:p>
           <a:p>
             <a:r>
-              <a:rPr sz="1000" b="0">
+              <a:rPr sz="1000" b="0" dirty="0" err="1">
                 <a:solidFill>
                   <a:srgbClr val="222222"/>
                 </a:solidFill>
                 <a:latin typeface="游ゴシック"/>
                 <a:ea typeface="游ゴシック"/>
               </a:rPr>
-              <a:t>縦（緑のイメージ）: 統計誤差 δφ</a:t>
+              <a:t>縦</a:t>
             </a:r>
-          </a:p>
-          <a:p>
             <a:r>
-              <a:rPr sz="1000" b="0">
+              <a:rPr sz="1000" b="0" dirty="0">
                 <a:solidFill>
                   <a:srgbClr val="222222"/>
                 </a:solidFill>
                 <a:latin typeface="游ゴシック"/>
                 <a:ea typeface="游ゴシック"/>
               </a:rPr>
-              <a:t>　→ カウントのゆらぎ</a:t>
+              <a:t>: </a:t>
             </a:r>
-          </a:p>
-          <a:p>
             <a:r>
-              <a:rPr sz="1000" b="0">
+              <a:rPr sz="1000" b="0" dirty="0" err="1">
                 <a:solidFill>
                   <a:srgbClr val="222222"/>
                 </a:solidFill>
                 <a:latin typeface="游ゴシック"/>
                 <a:ea typeface="游ゴシック"/>
               </a:rPr>
-              <a:t>横（赤のイメージ）: 系統誤差 δt_eq</a:t>
+              <a:t>統計誤差</a:t>
             </a:r>
-          </a:p>
-          <a:p>
             <a:r>
-              <a:rPr sz="1000" b="0">
+              <a:rPr sz="1000" b="0" dirty="0">
                 <a:solidFill>
                   <a:srgbClr val="222222"/>
                 </a:solidFill>
                 <a:latin typeface="游ゴシック"/>
                 <a:ea typeface="游ゴシック"/>
               </a:rPr>
-              <a:t>　→ 厚さ・密度の不確かさ</a:t>
+              <a:t> </a:t>
             </a:r>
-          </a:p>
-          <a:p>
             <a:r>
-              <a:rPr sz="1000" b="0">
+              <a:rPr sz="1000" b="0" dirty="0" err="1">
                 <a:solidFill>
                   <a:srgbClr val="222222"/>
                 </a:solidFill>
                 <a:latin typeface="游ゴシック"/>
                 <a:ea typeface="游ゴシック"/>
               </a:rPr>
-              <a:t/>
+              <a:t>δφ</a:t>
             </a:r>
+            <a:endParaRPr sz="1000" b="0" dirty="0">
+              <a:solidFill>
+                <a:srgbClr val="222222"/>
+              </a:solidFill>
+              <a:latin typeface="游ゴシック"/>
+              <a:ea typeface="游ゴシック"/>
+            </a:endParaRPr>
           </a:p>
           <a:p>
             <a:r>
-              <a:rPr sz="1000" b="0">
+              <a:rPr sz="1000" b="0" dirty="0">
                 <a:solidFill>
                   <a:srgbClr val="222222"/>
                 </a:solidFill>
                 <a:latin typeface="游ゴシック"/>
                 <a:ea typeface="游ゴシック"/>
               </a:rPr>
-              <a:t>両者は独立に評価し、</a:t>
+              <a:t>　→ </a:t>
             </a:r>
-          </a:p>
-          <a:p>
             <a:r>
-              <a:rPr sz="1000" b="0">
+              <a:rPr sz="1000" b="0" dirty="0" err="1">
                 <a:solidFill>
                   <a:srgbClr val="222222"/>
                 </a:solidFill>
                 <a:latin typeface="游ゴシック"/>
                 <a:ea typeface="游ゴシック"/>
               </a:rPr>
-              <a:t>errorbar の xerr / yerr に載せる。</a:t>
+              <a:t>カウントのゆらぎ</a:t>
+            </a:r>
+            <a:endParaRPr sz="1000" b="0" dirty="0">
+              <a:solidFill>
+                <a:srgbClr val="222222"/>
+              </a:solidFill>
+              <a:latin typeface="游ゴシック"/>
+              <a:ea typeface="游ゴシック"/>
+            </a:endParaRPr>
+          </a:p>
+          <a:p>
+            <a:r>
+              <a:rPr sz="1000" b="0" dirty="0" err="1">
+                <a:solidFill>
+                  <a:srgbClr val="222222"/>
+                </a:solidFill>
+                <a:latin typeface="游ゴシック"/>
+                <a:ea typeface="游ゴシック"/>
+              </a:rPr>
+              <a:t>横</a:t>
+            </a:r>
+            <a:r>
+              <a:rPr sz="1000" b="0" dirty="0">
+                <a:solidFill>
+                  <a:srgbClr val="222222"/>
+                </a:solidFill>
+                <a:latin typeface="游ゴシック"/>
+                <a:ea typeface="游ゴシック"/>
+              </a:rPr>
+              <a:t>: </a:t>
+            </a:r>
+            <a:r>
+              <a:rPr sz="1000" b="0" dirty="0" err="1">
+                <a:solidFill>
+                  <a:srgbClr val="222222"/>
+                </a:solidFill>
+                <a:latin typeface="游ゴシック"/>
+                <a:ea typeface="游ゴシック"/>
+              </a:rPr>
+              <a:t>系統誤差</a:t>
+            </a:r>
+            <a:r>
+              <a:rPr sz="1000" b="0" dirty="0">
+                <a:solidFill>
+                  <a:srgbClr val="222222"/>
+                </a:solidFill>
+                <a:latin typeface="游ゴシック"/>
+                <a:ea typeface="游ゴシック"/>
+              </a:rPr>
+              <a:t> </a:t>
+            </a:r>
+            <a:r>
+              <a:rPr sz="1000" b="0" dirty="0" err="1">
+                <a:solidFill>
+                  <a:srgbClr val="222222"/>
+                </a:solidFill>
+                <a:latin typeface="游ゴシック"/>
+                <a:ea typeface="游ゴシック"/>
+              </a:rPr>
+              <a:t>δt_eq</a:t>
+            </a:r>
+            <a:endParaRPr sz="1000" b="0" dirty="0">
+              <a:solidFill>
+                <a:srgbClr val="222222"/>
+              </a:solidFill>
+              <a:latin typeface="游ゴシック"/>
+              <a:ea typeface="游ゴシック"/>
+            </a:endParaRPr>
+          </a:p>
+          <a:p>
+            <a:r>
+              <a:rPr sz="1000" b="0" dirty="0">
+                <a:solidFill>
+                  <a:srgbClr val="222222"/>
+                </a:solidFill>
+                <a:latin typeface="游ゴシック"/>
+                <a:ea typeface="游ゴシック"/>
+              </a:rPr>
+              <a:t>　→ </a:t>
+            </a:r>
+            <a:r>
+              <a:rPr sz="1000" b="0" dirty="0" err="1">
+                <a:solidFill>
+                  <a:srgbClr val="222222"/>
+                </a:solidFill>
+                <a:latin typeface="游ゴシック"/>
+                <a:ea typeface="游ゴシック"/>
+              </a:rPr>
+              <a:t>厚さ・密度の不確かさ</a:t>
+            </a:r>
+            <a:endParaRPr sz="1000" b="0" dirty="0">
+              <a:solidFill>
+                <a:srgbClr val="222222"/>
+              </a:solidFill>
+              <a:latin typeface="游ゴシック"/>
+              <a:ea typeface="游ゴシック"/>
+            </a:endParaRPr>
+          </a:p>
+          <a:p>
+            <a:endParaRPr sz="1000" b="0" dirty="0">
+              <a:solidFill>
+                <a:srgbClr val="222222"/>
+              </a:solidFill>
+              <a:latin typeface="游ゴシック"/>
+              <a:ea typeface="游ゴシック"/>
+            </a:endParaRPr>
+          </a:p>
+          <a:p>
+            <a:r>
+              <a:rPr sz="1000" b="0" dirty="0" err="1">
+                <a:solidFill>
+                  <a:srgbClr val="222222"/>
+                </a:solidFill>
+                <a:latin typeface="游ゴシック"/>
+                <a:ea typeface="游ゴシック"/>
+              </a:rPr>
+              <a:t>両者は独立に評価し</a:t>
+            </a:r>
+            <a:r>
+              <a:rPr sz="1000" b="0" dirty="0">
+                <a:solidFill>
+                  <a:srgbClr val="222222"/>
+                </a:solidFill>
+                <a:latin typeface="游ゴシック"/>
+                <a:ea typeface="游ゴシック"/>
+              </a:rPr>
+              <a:t>、</a:t>
+            </a:r>
+          </a:p>
+          <a:p>
+            <a:r>
+              <a:rPr sz="1000" b="0" dirty="0" err="1">
+                <a:solidFill>
+                  <a:srgbClr val="222222"/>
+                </a:solidFill>
+                <a:latin typeface="游ゴシック"/>
+                <a:ea typeface="游ゴシック"/>
+              </a:rPr>
+              <a:t>errorbar</a:t>
+            </a:r>
+            <a:r>
+              <a:rPr sz="1000" b="0" dirty="0">
+                <a:solidFill>
+                  <a:srgbClr val="222222"/>
+                </a:solidFill>
+                <a:latin typeface="游ゴシック"/>
+                <a:ea typeface="游ゴシック"/>
+              </a:rPr>
+              <a:t> </a:t>
+            </a:r>
+            <a:r>
+              <a:rPr sz="1000" b="0" dirty="0" err="1">
+                <a:solidFill>
+                  <a:srgbClr val="222222"/>
+                </a:solidFill>
+                <a:latin typeface="游ゴシック"/>
+                <a:ea typeface="游ゴシック"/>
+              </a:rPr>
+              <a:t>の</a:t>
+            </a:r>
+            <a:r>
+              <a:rPr sz="1000" b="0" dirty="0">
+                <a:solidFill>
+                  <a:srgbClr val="222222"/>
+                </a:solidFill>
+                <a:latin typeface="游ゴシック"/>
+                <a:ea typeface="游ゴシック"/>
+              </a:rPr>
+              <a:t> </a:t>
+            </a:r>
+            <a:r>
+              <a:rPr sz="1000" b="0" dirty="0" err="1">
+                <a:solidFill>
+                  <a:srgbClr val="222222"/>
+                </a:solidFill>
+                <a:latin typeface="游ゴシック"/>
+                <a:ea typeface="游ゴシック"/>
+              </a:rPr>
+              <a:t>xerr</a:t>
+            </a:r>
+            <a:r>
+              <a:rPr sz="1000" b="0" dirty="0">
+                <a:solidFill>
+                  <a:srgbClr val="222222"/>
+                </a:solidFill>
+                <a:latin typeface="游ゴシック"/>
+                <a:ea typeface="游ゴシック"/>
+              </a:rPr>
+              <a:t> / </a:t>
+            </a:r>
+            <a:r>
+              <a:rPr sz="1000" b="0" dirty="0" err="1">
+                <a:solidFill>
+                  <a:srgbClr val="222222"/>
+                </a:solidFill>
+                <a:latin typeface="游ゴシック"/>
+                <a:ea typeface="游ゴシック"/>
+              </a:rPr>
+              <a:t>yerr</a:t>
+            </a:r>
+            <a:r>
+              <a:rPr sz="1000" b="0" dirty="0">
+                <a:solidFill>
+                  <a:srgbClr val="222222"/>
+                </a:solidFill>
+                <a:latin typeface="游ゴシック"/>
+                <a:ea typeface="游ゴシック"/>
+              </a:rPr>
+              <a:t> </a:t>
+            </a:r>
+            <a:r>
+              <a:rPr sz="1000" b="0" dirty="0" err="1">
+                <a:solidFill>
+                  <a:srgbClr val="222222"/>
+                </a:solidFill>
+                <a:latin typeface="游ゴシック"/>
+                <a:ea typeface="游ゴシック"/>
+              </a:rPr>
+              <a:t>に載せる</a:t>
+            </a:r>
+            <a:r>
+              <a:rPr sz="1000" b="0" dirty="0">
+                <a:solidFill>
+                  <a:srgbClr val="222222"/>
+                </a:solidFill>
+                <a:latin typeface="游ゴシック"/>
+                <a:ea typeface="游ゴシック"/>
+              </a:rPr>
+              <a:t>。</a:t>
             </a:r>
           </a:p>
         </p:txBody>
@@ -7818,15 +8208,39 @@
                 <a:tableStyleId>{5C22544A-7EE6-4342-B048-85BDC9FD1C3A}</a:tableStyleId>
               </a:tblPr>
               <a:tblGrid>
-                <a:gridCol w="777240"/>
-                <a:gridCol w="914400"/>
-                <a:gridCol w="640080"/>
-                <a:gridCol w="914400"/>
+                <a:gridCol w="777240">
+                  <a:extLst>
+                    <a:ext uri="{9D8B030D-6E8A-4147-A177-3AD203B41FA5}">
+                      <a16:colId xmlns:a16="http://schemas.microsoft.com/office/drawing/2014/main" val="20000"/>
+                    </a:ext>
+                  </a:extLst>
+                </a:gridCol>
+                <a:gridCol w="914400">
+                  <a:extLst>
+                    <a:ext uri="{9D8B030D-6E8A-4147-A177-3AD203B41FA5}">
+                      <a16:colId xmlns:a16="http://schemas.microsoft.com/office/drawing/2014/main" val="20001"/>
+                    </a:ext>
+                  </a:extLst>
+                </a:gridCol>
+                <a:gridCol w="640080">
+                  <a:extLst>
+                    <a:ext uri="{9D8B030D-6E8A-4147-A177-3AD203B41FA5}">
+                      <a16:colId xmlns:a16="http://schemas.microsoft.com/office/drawing/2014/main" val="20002"/>
+                    </a:ext>
+                  </a:extLst>
+                </a:gridCol>
+                <a:gridCol w="914400">
+                  <a:extLst>
+                    <a:ext uri="{9D8B030D-6E8A-4147-A177-3AD203B41FA5}">
+                      <a16:colId xmlns:a16="http://schemas.microsoft.com/office/drawing/2014/main" val="20003"/>
+                    </a:ext>
+                  </a:extLst>
+                </a:gridCol>
               </a:tblGrid>
               <a:tr h="381000">
                 <a:tc>
                   <a:txBody>
-                    <a:bodyPr wrap="square"/>
+                    <a:bodyPr/>
                     <a:lstStyle/>
                     <a:p>
                       <a:pPr algn="ctr"/>
@@ -7850,7 +8264,7 @@
                 </a:tc>
                 <a:tc>
                   <a:txBody>
-                    <a:bodyPr wrap="square"/>
+                    <a:bodyPr/>
                     <a:lstStyle/>
                     <a:p>
                       <a:pPr algn="ctr"/>
@@ -7874,7 +8288,7 @@
                 </a:tc>
                 <a:tc>
                   <a:txBody>
-                    <a:bodyPr wrap="square"/>
+                    <a:bodyPr/>
                     <a:lstStyle/>
                     <a:p>
                       <a:pPr algn="ctr"/>
@@ -7898,7 +8312,7 @@
                 </a:tc>
                 <a:tc>
                   <a:txBody>
-                    <a:bodyPr wrap="square"/>
+                    <a:bodyPr/>
                     <a:lstStyle/>
                     <a:p>
                       <a:pPr algn="ctr"/>
@@ -7920,11 +8334,16 @@
                     </a:solidFill>
                   </a:tcPr>
                 </a:tc>
+                <a:extLst>
+                  <a:ext uri="{0D108BD9-81ED-4DB2-BD59-A6C34878D82A}">
+                    <a16:rowId xmlns:a16="http://schemas.microsoft.com/office/drawing/2014/main" val="10000"/>
+                  </a:ext>
+                </a:extLst>
               </a:tr>
               <a:tr h="381000">
                 <a:tc>
                   <a:txBody>
-                    <a:bodyPr wrap="square"/>
+                    <a:bodyPr/>
                     <a:lstStyle/>
                     <a:p>
                       <a:pPr algn="l"/>
@@ -7948,7 +8367,7 @@
                 </a:tc>
                 <a:tc>
                   <a:txBody>
-                    <a:bodyPr wrap="square"/>
+                    <a:bodyPr/>
                     <a:lstStyle/>
                     <a:p>
                       <a:pPr algn="ctr"/>
@@ -7972,7 +8391,7 @@
                 </a:tc>
                 <a:tc>
                   <a:txBody>
-                    <a:bodyPr wrap="square"/>
+                    <a:bodyPr/>
                     <a:lstStyle/>
                     <a:p>
                       <a:pPr algn="ctr"/>
@@ -7996,7 +8415,7 @@
                 </a:tc>
                 <a:tc>
                   <a:txBody>
-                    <a:bodyPr wrap="square"/>
+                    <a:bodyPr/>
                     <a:lstStyle/>
                     <a:p>
                       <a:pPr algn="ctr"/>
@@ -8018,11 +8437,16 @@
                     </a:solidFill>
                   </a:tcPr>
                 </a:tc>
+                <a:extLst>
+                  <a:ext uri="{0D108BD9-81ED-4DB2-BD59-A6C34878D82A}">
+                    <a16:rowId xmlns:a16="http://schemas.microsoft.com/office/drawing/2014/main" val="10001"/>
+                  </a:ext>
+                </a:extLst>
               </a:tr>
               <a:tr h="381000">
                 <a:tc>
                   <a:txBody>
-                    <a:bodyPr wrap="square"/>
+                    <a:bodyPr/>
                     <a:lstStyle/>
                     <a:p>
                       <a:pPr algn="l"/>
@@ -8046,7 +8470,7 @@
                 </a:tc>
                 <a:tc>
                   <a:txBody>
-                    <a:bodyPr wrap="square"/>
+                    <a:bodyPr/>
                     <a:lstStyle/>
                     <a:p>
                       <a:pPr algn="ctr"/>
@@ -8070,7 +8494,7 @@
                 </a:tc>
                 <a:tc>
                   <a:txBody>
-                    <a:bodyPr wrap="square"/>
+                    <a:bodyPr/>
                     <a:lstStyle/>
                     <a:p>
                       <a:pPr algn="ctr"/>
@@ -8094,7 +8518,7 @@
                 </a:tc>
                 <a:tc>
                   <a:txBody>
-                    <a:bodyPr wrap="square"/>
+                    <a:bodyPr/>
                     <a:lstStyle/>
                     <a:p>
                       <a:pPr algn="ctr"/>
@@ -8116,6 +8540,11 @@
                     </a:solidFill>
                   </a:tcPr>
                 </a:tc>
+                <a:extLst>
+                  <a:ext uri="{0D108BD9-81ED-4DB2-BD59-A6C34878D82A}">
+                    <a16:rowId xmlns:a16="http://schemas.microsoft.com/office/drawing/2014/main" val="10002"/>
+                  </a:ext>
+                </a:extLst>
               </a:tr>
             </a:tbl>
           </a:graphicData>
@@ -8166,7 +8595,7 @@
 </file>
 
 <file path=ppt/slides/slide14.xml><?xml version="1.0" encoding="utf-8"?>
-<p:sld xmlns:a="http://schemas.openxmlformats.org/drawingml/2006/main" xmlns:p="http://schemas.openxmlformats.org/presentationml/2006/main" xmlns:r="http://schemas.openxmlformats.org/officeDocument/2006/relationships">
+<p:sld xmlns:a="http://schemas.openxmlformats.org/drawingml/2006/main" xmlns:r="http://schemas.openxmlformats.org/officeDocument/2006/relationships" xmlns:p="http://schemas.openxmlformats.org/presentationml/2006/main">
   <p:cSld>
     <p:spTree>
       <p:nvGrpSpPr>
@@ -8174,7 +8603,14 @@
         <p:cNvGrpSpPr/>
         <p:nvPr/>
       </p:nvGrpSpPr>
-      <p:grpSpPr/>
+      <p:grpSpPr>
+        <a:xfrm>
+          <a:off x="0" y="0"/>
+          <a:ext cx="0" cy="0"/>
+          <a:chOff x="0" y="0"/>
+          <a:chExt cx="0" cy="0"/>
+        </a:xfrm>
+      </p:grpSpPr>
       <p:sp>
         <p:nvSpPr>
           <p:cNvPr id="2" name="TextBox 1"/>
@@ -8250,6 +8686,7 @@
           <a:lstStyle/>
           <a:p>
             <a:pPr algn="ctr"/>
+            <a:endParaRPr/>
           </a:p>
         </p:txBody>
       </p:sp>
@@ -8365,6 +8802,7 @@
           <a:lstStyle/>
           <a:p>
             <a:pPr algn="ctr"/>
+            <a:endParaRPr/>
           </a:p>
         </p:txBody>
       </p:sp>
@@ -8469,6 +8907,7 @@
           <a:lstStyle/>
           <a:p>
             <a:pPr algn="ctr"/>
+            <a:endParaRPr/>
           </a:p>
         </p:txBody>
       </p:sp>
@@ -8515,13 +8954,25 @@
                 <a:tableStyleId>{5C22544A-7EE6-4342-B048-85BDC9FD1C3A}</a:tableStyleId>
               </a:tblPr>
               <a:tblGrid>
-                <a:gridCol w="2194560"/>
-                <a:gridCol w="6217920"/>
+                <a:gridCol w="2194560">
+                  <a:extLst>
+                    <a:ext uri="{9D8B030D-6E8A-4147-A177-3AD203B41FA5}">
+                      <a16:colId xmlns:a16="http://schemas.microsoft.com/office/drawing/2014/main" val="20000"/>
+                    </a:ext>
+                  </a:extLst>
+                </a:gridCol>
+                <a:gridCol w="6217920">
+                  <a:extLst>
+                    <a:ext uri="{9D8B030D-6E8A-4147-A177-3AD203B41FA5}">
+                      <a16:colId xmlns:a16="http://schemas.microsoft.com/office/drawing/2014/main" val="20001"/>
+                    </a:ext>
+                  </a:extLst>
+                </a:gridCol>
               </a:tblGrid>
               <a:tr h="285750">
                 <a:tc>
                   <a:txBody>
-                    <a:bodyPr wrap="square"/>
+                    <a:bodyPr/>
                     <a:lstStyle/>
                     <a:p>
                       <a:pPr algn="ctr"/>
@@ -8545,7 +8996,7 @@
                 </a:tc>
                 <a:tc>
                   <a:txBody>
-                    <a:bodyPr wrap="square"/>
+                    <a:bodyPr/>
                     <a:lstStyle/>
                     <a:p>
                       <a:pPr algn="ctr"/>
@@ -8567,11 +9018,16 @@
                     </a:solidFill>
                   </a:tcPr>
                 </a:tc>
+                <a:extLst>
+                  <a:ext uri="{0D108BD9-81ED-4DB2-BD59-A6C34878D82A}">
+                    <a16:rowId xmlns:a16="http://schemas.microsoft.com/office/drawing/2014/main" val="10000"/>
+                  </a:ext>
+                </a:extLst>
               </a:tr>
               <a:tr h="285750">
                 <a:tc>
                   <a:txBody>
-                    <a:bodyPr wrap="square"/>
+                    <a:bodyPr/>
                     <a:lstStyle/>
                     <a:p>
                       <a:pPr algn="l"/>
@@ -8595,7 +9051,7 @@
                 </a:tc>
                 <a:tc>
                   <a:txBody>
-                    <a:bodyPr wrap="square"/>
+                    <a:bodyPr/>
                     <a:lstStyle/>
                     <a:p>
                       <a:pPr algn="l"/>
@@ -8617,11 +9073,16 @@
                     </a:solidFill>
                   </a:tcPr>
                 </a:tc>
+                <a:extLst>
+                  <a:ext uri="{0D108BD9-81ED-4DB2-BD59-A6C34878D82A}">
+                    <a16:rowId xmlns:a16="http://schemas.microsoft.com/office/drawing/2014/main" val="10001"/>
+                  </a:ext>
+                </a:extLst>
               </a:tr>
               <a:tr h="285750">
                 <a:tc>
                   <a:txBody>
-                    <a:bodyPr wrap="square"/>
+                    <a:bodyPr/>
                     <a:lstStyle/>
                     <a:p>
                       <a:pPr algn="l"/>
@@ -8645,7 +9106,7 @@
                 </a:tc>
                 <a:tc>
                   <a:txBody>
-                    <a:bodyPr wrap="square"/>
+                    <a:bodyPr/>
                     <a:lstStyle/>
                     <a:p>
                       <a:pPr algn="l"/>
@@ -8667,11 +9128,16 @@
                     </a:solidFill>
                   </a:tcPr>
                 </a:tc>
+                <a:extLst>
+                  <a:ext uri="{0D108BD9-81ED-4DB2-BD59-A6C34878D82A}">
+                    <a16:rowId xmlns:a16="http://schemas.microsoft.com/office/drawing/2014/main" val="10002"/>
+                  </a:ext>
+                </a:extLst>
               </a:tr>
               <a:tr h="285750">
                 <a:tc>
                   <a:txBody>
-                    <a:bodyPr wrap="square"/>
+                    <a:bodyPr/>
                     <a:lstStyle/>
                     <a:p>
                       <a:pPr algn="l"/>
@@ -8695,7 +9161,7 @@
                 </a:tc>
                 <a:tc>
                   <a:txBody>
-                    <a:bodyPr wrap="square"/>
+                    <a:bodyPr/>
                     <a:lstStyle/>
                     <a:p>
                       <a:pPr algn="l"/>
@@ -8717,6 +9183,11 @@
                     </a:solidFill>
                   </a:tcPr>
                 </a:tc>
+                <a:extLst>
+                  <a:ext uri="{0D108BD9-81ED-4DB2-BD59-A6C34878D82A}">
+                    <a16:rowId xmlns:a16="http://schemas.microsoft.com/office/drawing/2014/main" val="10003"/>
+                  </a:ext>
+                </a:extLst>
               </a:tr>
             </a:tbl>
           </a:graphicData>
@@ -8767,7 +9238,7 @@
 </file>
 
 <file path=ppt/slides/slide15.xml><?xml version="1.0" encoding="utf-8"?>
-<p:sld xmlns:a="http://schemas.openxmlformats.org/drawingml/2006/main" xmlns:p="http://schemas.openxmlformats.org/presentationml/2006/main" xmlns:r="http://schemas.openxmlformats.org/officeDocument/2006/relationships">
+<p:sld xmlns:a="http://schemas.openxmlformats.org/drawingml/2006/main" xmlns:r="http://schemas.openxmlformats.org/officeDocument/2006/relationships" xmlns:p="http://schemas.openxmlformats.org/presentationml/2006/main">
   <p:cSld>
     <p:spTree>
       <p:nvGrpSpPr>
@@ -8775,7 +9246,14 @@
         <p:cNvGrpSpPr/>
         <p:nvPr/>
       </p:nvGrpSpPr>
-      <p:grpSpPr/>
+      <p:grpSpPr>
+        <a:xfrm>
+          <a:off x="0" y="0"/>
+          <a:ext cx="0" cy="0"/>
+          <a:chOff x="0" y="0"/>
+          <a:chExt cx="0" cy="0"/>
+        </a:xfrm>
+      </p:grpSpPr>
       <p:sp>
         <p:nvSpPr>
           <p:cNvPr id="2" name="TextBox 1"/>
@@ -8851,6 +9329,7 @@
           <a:lstStyle/>
           <a:p>
             <a:pPr algn="ctr"/>
+            <a:endParaRPr/>
           </a:p>
         </p:txBody>
       </p:sp>
@@ -8931,6 +9410,7 @@
           <a:lstStyle/>
           <a:p>
             <a:pPr algn="ctr"/>
+            <a:endParaRPr/>
           </a:p>
         </p:txBody>
       </p:sp>
@@ -9012,15 +9492,39 @@
                 <a:tableStyleId>{5C22544A-7EE6-4342-B048-85BDC9FD1C3A}</a:tableStyleId>
               </a:tblPr>
               <a:tblGrid>
-                <a:gridCol w="1188720"/>
-                <a:gridCol w="1371600"/>
-                <a:gridCol w="1371600"/>
-                <a:gridCol w="1097280"/>
+                <a:gridCol w="1188720">
+                  <a:extLst>
+                    <a:ext uri="{9D8B030D-6E8A-4147-A177-3AD203B41FA5}">
+                      <a16:colId xmlns:a16="http://schemas.microsoft.com/office/drawing/2014/main" val="20000"/>
+                    </a:ext>
+                  </a:extLst>
+                </a:gridCol>
+                <a:gridCol w="1371600">
+                  <a:extLst>
+                    <a:ext uri="{9D8B030D-6E8A-4147-A177-3AD203B41FA5}">
+                      <a16:colId xmlns:a16="http://schemas.microsoft.com/office/drawing/2014/main" val="20001"/>
+                    </a:ext>
+                  </a:extLst>
+                </a:gridCol>
+                <a:gridCol w="1371600">
+                  <a:extLst>
+                    <a:ext uri="{9D8B030D-6E8A-4147-A177-3AD203B41FA5}">
+                      <a16:colId xmlns:a16="http://schemas.microsoft.com/office/drawing/2014/main" val="20002"/>
+                    </a:ext>
+                  </a:extLst>
+                </a:gridCol>
+                <a:gridCol w="1097280">
+                  <a:extLst>
+                    <a:ext uri="{9D8B030D-6E8A-4147-A177-3AD203B41FA5}">
+                      <a16:colId xmlns:a16="http://schemas.microsoft.com/office/drawing/2014/main" val="20003"/>
+                    </a:ext>
+                  </a:extLst>
+                </a:gridCol>
               </a:tblGrid>
               <a:tr h="268605">
                 <a:tc>
                   <a:txBody>
-                    <a:bodyPr wrap="square"/>
+                    <a:bodyPr/>
                     <a:lstStyle/>
                     <a:p>
                       <a:pPr algn="ctr"/>
@@ -9044,7 +9548,7 @@
                 </a:tc>
                 <a:tc>
                   <a:txBody>
-                    <a:bodyPr wrap="square"/>
+                    <a:bodyPr/>
                     <a:lstStyle/>
                     <a:p>
                       <a:pPr algn="ctr"/>
@@ -9068,7 +9572,7 @@
                 </a:tc>
                 <a:tc>
                   <a:txBody>
-                    <a:bodyPr wrap="square"/>
+                    <a:bodyPr/>
                     <a:lstStyle/>
                     <a:p>
                       <a:pPr algn="ctr"/>
@@ -9092,7 +9596,7 @@
                 </a:tc>
                 <a:tc>
                   <a:txBody>
-                    <a:bodyPr wrap="square"/>
+                    <a:bodyPr/>
                     <a:lstStyle/>
                     <a:p>
                       <a:pPr algn="ctr"/>
@@ -9114,11 +9618,16 @@
                     </a:solidFill>
                   </a:tcPr>
                 </a:tc>
+                <a:extLst>
+                  <a:ext uri="{0D108BD9-81ED-4DB2-BD59-A6C34878D82A}">
+                    <a16:rowId xmlns:a16="http://schemas.microsoft.com/office/drawing/2014/main" val="10000"/>
+                  </a:ext>
+                </a:extLst>
               </a:tr>
               <a:tr h="268605">
                 <a:tc>
                   <a:txBody>
-                    <a:bodyPr wrap="square"/>
+                    <a:bodyPr/>
                     <a:lstStyle/>
                     <a:p>
                       <a:pPr algn="l"/>
@@ -9142,7 +9651,7 @@
                 </a:tc>
                 <a:tc>
                   <a:txBody>
-                    <a:bodyPr wrap="square"/>
+                    <a:bodyPr/>
                     <a:lstStyle/>
                     <a:p>
                       <a:pPr algn="ctr"/>
@@ -9166,7 +9675,7 @@
                 </a:tc>
                 <a:tc>
                   <a:txBody>
-                    <a:bodyPr wrap="square"/>
+                    <a:bodyPr/>
                     <a:lstStyle/>
                     <a:p>
                       <a:pPr algn="ctr"/>
@@ -9190,7 +9699,7 @@
                 </a:tc>
                 <a:tc>
                   <a:txBody>
-                    <a:bodyPr wrap="square"/>
+                    <a:bodyPr/>
                     <a:lstStyle/>
                     <a:p>
                       <a:pPr algn="ctr"/>
@@ -9212,11 +9721,16 @@
                     </a:solidFill>
                   </a:tcPr>
                 </a:tc>
+                <a:extLst>
+                  <a:ext uri="{0D108BD9-81ED-4DB2-BD59-A6C34878D82A}">
+                    <a16:rowId xmlns:a16="http://schemas.microsoft.com/office/drawing/2014/main" val="10001"/>
+                  </a:ext>
+                </a:extLst>
               </a:tr>
               <a:tr h="268605">
                 <a:tc>
                   <a:txBody>
-                    <a:bodyPr wrap="square"/>
+                    <a:bodyPr/>
                     <a:lstStyle/>
                     <a:p>
                       <a:pPr algn="l"/>
@@ -9240,7 +9754,7 @@
                 </a:tc>
                 <a:tc>
                   <a:txBody>
-                    <a:bodyPr wrap="square"/>
+                    <a:bodyPr/>
                     <a:lstStyle/>
                     <a:p>
                       <a:pPr algn="ctr"/>
@@ -9264,7 +9778,7 @@
                 </a:tc>
                 <a:tc>
                   <a:txBody>
-                    <a:bodyPr wrap="square"/>
+                    <a:bodyPr/>
                     <a:lstStyle/>
                     <a:p>
                       <a:pPr algn="ctr"/>
@@ -9288,7 +9802,7 @@
                 </a:tc>
                 <a:tc>
                   <a:txBody>
-                    <a:bodyPr wrap="square"/>
+                    <a:bodyPr/>
                     <a:lstStyle/>
                     <a:p>
                       <a:pPr algn="ctr"/>
@@ -9310,11 +9824,16 @@
                     </a:solidFill>
                   </a:tcPr>
                 </a:tc>
+                <a:extLst>
+                  <a:ext uri="{0D108BD9-81ED-4DB2-BD59-A6C34878D82A}">
+                    <a16:rowId xmlns:a16="http://schemas.microsoft.com/office/drawing/2014/main" val="10002"/>
+                  </a:ext>
+                </a:extLst>
               </a:tr>
               <a:tr h="268605">
                 <a:tc>
                   <a:txBody>
-                    <a:bodyPr wrap="square"/>
+                    <a:bodyPr/>
                     <a:lstStyle/>
                     <a:p>
                       <a:pPr algn="l"/>
@@ -9338,7 +9857,7 @@
                 </a:tc>
                 <a:tc>
                   <a:txBody>
-                    <a:bodyPr wrap="square"/>
+                    <a:bodyPr/>
                     <a:lstStyle/>
                     <a:p>
                       <a:pPr algn="ctr"/>
@@ -9362,7 +9881,7 @@
                 </a:tc>
                 <a:tc>
                   <a:txBody>
-                    <a:bodyPr wrap="square"/>
+                    <a:bodyPr/>
                     <a:lstStyle/>
                     <a:p>
                       <a:pPr algn="ctr"/>
@@ -9386,7 +9905,7 @@
                 </a:tc>
                 <a:tc>
                   <a:txBody>
-                    <a:bodyPr wrap="square"/>
+                    <a:bodyPr/>
                     <a:lstStyle/>
                     <a:p>
                       <a:pPr algn="ctr"/>
@@ -9408,11 +9927,16 @@
                     </a:solidFill>
                   </a:tcPr>
                 </a:tc>
+                <a:extLst>
+                  <a:ext uri="{0D108BD9-81ED-4DB2-BD59-A6C34878D82A}">
+                    <a16:rowId xmlns:a16="http://schemas.microsoft.com/office/drawing/2014/main" val="10003"/>
+                  </a:ext>
+                </a:extLst>
               </a:tr>
               <a:tr h="268605">
                 <a:tc>
                   <a:txBody>
-                    <a:bodyPr wrap="square"/>
+                    <a:bodyPr/>
                     <a:lstStyle/>
                     <a:p>
                       <a:pPr algn="l"/>
@@ -9436,7 +9960,7 @@
                 </a:tc>
                 <a:tc>
                   <a:txBody>
-                    <a:bodyPr wrap="square"/>
+                    <a:bodyPr/>
                     <a:lstStyle/>
                     <a:p>
                       <a:pPr algn="ctr"/>
@@ -9460,7 +9984,7 @@
                 </a:tc>
                 <a:tc>
                   <a:txBody>
-                    <a:bodyPr wrap="square"/>
+                    <a:bodyPr/>
                     <a:lstStyle/>
                     <a:p>
                       <a:pPr algn="ctr"/>
@@ -9484,7 +10008,7 @@
                 </a:tc>
                 <a:tc>
                   <a:txBody>
-                    <a:bodyPr wrap="square"/>
+                    <a:bodyPr/>
                     <a:lstStyle/>
                     <a:p>
                       <a:pPr algn="ctr"/>
@@ -9506,11 +10030,16 @@
                     </a:solidFill>
                   </a:tcPr>
                 </a:tc>
+                <a:extLst>
+                  <a:ext uri="{0D108BD9-81ED-4DB2-BD59-A6C34878D82A}">
+                    <a16:rowId xmlns:a16="http://schemas.microsoft.com/office/drawing/2014/main" val="10004"/>
+                  </a:ext>
+                </a:extLst>
               </a:tr>
               <a:tr h="268605">
                 <a:tc>
                   <a:txBody>
-                    <a:bodyPr wrap="square"/>
+                    <a:bodyPr/>
                     <a:lstStyle/>
                     <a:p>
                       <a:pPr algn="l"/>
@@ -9534,7 +10063,7 @@
                 </a:tc>
                 <a:tc>
                   <a:txBody>
-                    <a:bodyPr wrap="square"/>
+                    <a:bodyPr/>
                     <a:lstStyle/>
                     <a:p>
                       <a:pPr algn="ctr"/>
@@ -9558,7 +10087,7 @@
                 </a:tc>
                 <a:tc>
                   <a:txBody>
-                    <a:bodyPr wrap="square"/>
+                    <a:bodyPr/>
                     <a:lstStyle/>
                     <a:p>
                       <a:pPr algn="ctr"/>
@@ -9582,7 +10111,7 @@
                 </a:tc>
                 <a:tc>
                   <a:txBody>
-                    <a:bodyPr wrap="square"/>
+                    <a:bodyPr/>
                     <a:lstStyle/>
                     <a:p>
                       <a:pPr algn="ctr"/>
@@ -9604,11 +10133,16 @@
                     </a:solidFill>
                   </a:tcPr>
                 </a:tc>
+                <a:extLst>
+                  <a:ext uri="{0D108BD9-81ED-4DB2-BD59-A6C34878D82A}">
+                    <a16:rowId xmlns:a16="http://schemas.microsoft.com/office/drawing/2014/main" val="10005"/>
+                  </a:ext>
+                </a:extLst>
               </a:tr>
               <a:tr h="268605">
                 <a:tc>
                   <a:txBody>
-                    <a:bodyPr wrap="square"/>
+                    <a:bodyPr/>
                     <a:lstStyle/>
                     <a:p>
                       <a:pPr algn="l"/>
@@ -9632,7 +10166,7 @@
                 </a:tc>
                 <a:tc>
                   <a:txBody>
-                    <a:bodyPr wrap="square"/>
+                    <a:bodyPr/>
                     <a:lstStyle/>
                     <a:p>
                       <a:pPr algn="ctr"/>
@@ -9656,7 +10190,7 @@
                 </a:tc>
                 <a:tc>
                   <a:txBody>
-                    <a:bodyPr wrap="square"/>
+                    <a:bodyPr/>
                     <a:lstStyle/>
                     <a:p>
                       <a:pPr algn="ctr"/>
@@ -9680,7 +10214,7 @@
                 </a:tc>
                 <a:tc>
                   <a:txBody>
-                    <a:bodyPr wrap="square"/>
+                    <a:bodyPr/>
                     <a:lstStyle/>
                     <a:p>
                       <a:pPr algn="ctr"/>
@@ -9702,11 +10236,16 @@
                     </a:solidFill>
                   </a:tcPr>
                 </a:tc>
+                <a:extLst>
+                  <a:ext uri="{0D108BD9-81ED-4DB2-BD59-A6C34878D82A}">
+                    <a16:rowId xmlns:a16="http://schemas.microsoft.com/office/drawing/2014/main" val="10006"/>
+                  </a:ext>
+                </a:extLst>
               </a:tr>
               <a:tr h="268605">
                 <a:tc>
                   <a:txBody>
-                    <a:bodyPr wrap="square"/>
+                    <a:bodyPr/>
                     <a:lstStyle/>
                     <a:p>
                       <a:pPr algn="l"/>
@@ -9730,7 +10269,7 @@
                 </a:tc>
                 <a:tc>
                   <a:txBody>
-                    <a:bodyPr wrap="square"/>
+                    <a:bodyPr/>
                     <a:lstStyle/>
                     <a:p>
                       <a:pPr algn="ctr"/>
@@ -9754,7 +10293,7 @@
                 </a:tc>
                 <a:tc>
                   <a:txBody>
-                    <a:bodyPr wrap="square"/>
+                    <a:bodyPr/>
                     <a:lstStyle/>
                     <a:p>
                       <a:pPr algn="ctr"/>
@@ -9778,7 +10317,7 @@
                 </a:tc>
                 <a:tc>
                   <a:txBody>
-                    <a:bodyPr wrap="square"/>
+                    <a:bodyPr/>
                     <a:lstStyle/>
                     <a:p>
                       <a:pPr algn="ctr"/>
@@ -9800,6 +10339,11 @@
                     </a:solidFill>
                   </a:tcPr>
                 </a:tc>
+                <a:extLst>
+                  <a:ext uri="{0D108BD9-81ED-4DB2-BD59-A6C34878D82A}">
+                    <a16:rowId xmlns:a16="http://schemas.microsoft.com/office/drawing/2014/main" val="10007"/>
+                  </a:ext>
+                </a:extLst>
               </a:tr>
             </a:tbl>
           </a:graphicData>
@@ -9843,7 +10387,7 @@
           </a:fontRef>
         </p:style>
         <p:txBody>
-          <a:bodyPr rtlCol="0" anchor="ctr" wrap="square"/>
+          <a:bodyPr wrap="square" rtlCol="0" anchor="ctr"/>
           <a:lstStyle/>
           <a:p>
             <a:pPr algn="ctr"/>
@@ -9895,16 +10439,13 @@
             </a:r>
           </a:p>
           <a:p>
-            <a:r>
-              <a:rPr sz="1000" b="0">
-                <a:solidFill>
-                  <a:srgbClr val="222222"/>
-                </a:solidFill>
-                <a:latin typeface="游ゴシック"/>
-                <a:ea typeface="游ゴシック"/>
-              </a:rPr>
-              <a:t/>
-            </a:r>
+            <a:endParaRPr sz="1000" b="0">
+              <a:solidFill>
+                <a:srgbClr val="222222"/>
+              </a:solidFill>
+              <a:latin typeface="游ゴシック"/>
+              <a:ea typeface="游ゴシック"/>
+            </a:endParaRPr>
           </a:p>
           <a:p>
             <a:r>
@@ -9989,7 +10530,7 @@
 </file>
 
 <file path=ppt/slides/slide16.xml><?xml version="1.0" encoding="utf-8"?>
-<p:sld xmlns:a="http://schemas.openxmlformats.org/drawingml/2006/main" xmlns:p="http://schemas.openxmlformats.org/presentationml/2006/main" xmlns:r="http://schemas.openxmlformats.org/officeDocument/2006/relationships">
+<p:sld xmlns:a="http://schemas.openxmlformats.org/drawingml/2006/main" xmlns:r="http://schemas.openxmlformats.org/officeDocument/2006/relationships" xmlns:p="http://schemas.openxmlformats.org/presentationml/2006/main">
   <p:cSld>
     <p:spTree>
       <p:nvGrpSpPr>
@@ -9997,7 +10538,14 @@
         <p:cNvGrpSpPr/>
         <p:nvPr/>
       </p:nvGrpSpPr>
-      <p:grpSpPr/>
+      <p:grpSpPr>
+        <a:xfrm>
+          <a:off x="0" y="0"/>
+          <a:ext cx="0" cy="0"/>
+          <a:chOff x="0" y="0"/>
+          <a:chExt cx="0" cy="0"/>
+        </a:xfrm>
+      </p:grpSpPr>
       <p:sp>
         <p:nvSpPr>
           <p:cNvPr id="2" name="TextBox 1"/>
@@ -10073,6 +10621,7 @@
           <a:lstStyle/>
           <a:p>
             <a:pPr algn="ctr"/>
+            <a:endParaRPr/>
           </a:p>
         </p:txBody>
       </p:sp>
@@ -10188,6 +10737,7 @@
           <a:lstStyle/>
           <a:p>
             <a:pPr algn="ctr"/>
+            <a:endParaRPr/>
           </a:p>
         </p:txBody>
       </p:sp>
@@ -10292,6 +10842,7 @@
           <a:lstStyle/>
           <a:p>
             <a:pPr algn="ctr"/>
+            <a:endParaRPr/>
           </a:p>
         </p:txBody>
       </p:sp>
@@ -10396,6 +10947,7 @@
           <a:lstStyle/>
           <a:p>
             <a:pPr algn="ctr"/>
+            <a:endParaRPr/>
           </a:p>
         </p:txBody>
       </p:sp>
@@ -10468,7 +11020,7 @@
 </file>
 
 <file path=ppt/slides/slide17.xml><?xml version="1.0" encoding="utf-8"?>
-<p:sld xmlns:a="http://schemas.openxmlformats.org/drawingml/2006/main" xmlns:p="http://schemas.openxmlformats.org/presentationml/2006/main" xmlns:r="http://schemas.openxmlformats.org/officeDocument/2006/relationships">
+<p:sld xmlns:a="http://schemas.openxmlformats.org/drawingml/2006/main" xmlns:r="http://schemas.openxmlformats.org/officeDocument/2006/relationships" xmlns:p="http://schemas.openxmlformats.org/presentationml/2006/main">
   <p:cSld>
     <p:spTree>
       <p:nvGrpSpPr>
@@ -10476,7 +11028,14 @@
         <p:cNvGrpSpPr/>
         <p:nvPr/>
       </p:nvGrpSpPr>
-      <p:grpSpPr/>
+      <p:grpSpPr>
+        <a:xfrm>
+          <a:off x="0" y="0"/>
+          <a:ext cx="0" cy="0"/>
+          <a:chOff x="0" y="0"/>
+          <a:chExt cx="0" cy="0"/>
+        </a:xfrm>
+      </p:grpSpPr>
       <p:sp>
         <p:nvSpPr>
           <p:cNvPr id="2" name="TextBox 1"/>
@@ -10552,6 +11111,7 @@
           <a:lstStyle/>
           <a:p>
             <a:pPr algn="ctr"/>
+            <a:endParaRPr/>
           </a:p>
         </p:txBody>
       </p:sp>
@@ -10574,14 +11134,32 @@
                 <a:tableStyleId>{5C22544A-7EE6-4342-B048-85BDC9FD1C3A}</a:tableStyleId>
               </a:tblPr>
               <a:tblGrid>
-                <a:gridCol w="1828800"/>
-                <a:gridCol w="3474720"/>
-                <a:gridCol w="3200400"/>
+                <a:gridCol w="1828800">
+                  <a:extLst>
+                    <a:ext uri="{9D8B030D-6E8A-4147-A177-3AD203B41FA5}">
+                      <a16:colId xmlns:a16="http://schemas.microsoft.com/office/drawing/2014/main" val="20000"/>
+                    </a:ext>
+                  </a:extLst>
+                </a:gridCol>
+                <a:gridCol w="3474720">
+                  <a:extLst>
+                    <a:ext uri="{9D8B030D-6E8A-4147-A177-3AD203B41FA5}">
+                      <a16:colId xmlns:a16="http://schemas.microsoft.com/office/drawing/2014/main" val="20001"/>
+                    </a:ext>
+                  </a:extLst>
+                </a:gridCol>
+                <a:gridCol w="3200400">
+                  <a:extLst>
+                    <a:ext uri="{9D8B030D-6E8A-4147-A177-3AD203B41FA5}">
+                      <a16:colId xmlns:a16="http://schemas.microsoft.com/office/drawing/2014/main" val="20002"/>
+                    </a:ext>
+                  </a:extLst>
+                </a:gridCol>
               </a:tblGrid>
               <a:tr h="308610">
                 <a:tc>
                   <a:txBody>
-                    <a:bodyPr wrap="square"/>
+                    <a:bodyPr/>
                     <a:lstStyle/>
                     <a:p>
                       <a:pPr algn="ctr"/>
@@ -10605,7 +11183,7 @@
                 </a:tc>
                 <a:tc>
                   <a:txBody>
-                    <a:bodyPr wrap="square"/>
+                    <a:bodyPr/>
                     <a:lstStyle/>
                     <a:p>
                       <a:pPr algn="ctr"/>
@@ -10629,7 +11207,7 @@
                 </a:tc>
                 <a:tc>
                   <a:txBody>
-                    <a:bodyPr wrap="square"/>
+                    <a:bodyPr/>
                     <a:lstStyle/>
                     <a:p>
                       <a:pPr algn="ctr"/>
@@ -10651,11 +11229,16 @@
                     </a:solidFill>
                   </a:tcPr>
                 </a:tc>
+                <a:extLst>
+                  <a:ext uri="{0D108BD9-81ED-4DB2-BD59-A6C34878D82A}">
+                    <a16:rowId xmlns:a16="http://schemas.microsoft.com/office/drawing/2014/main" val="10000"/>
+                  </a:ext>
+                </a:extLst>
               </a:tr>
               <a:tr h="308610">
                 <a:tc>
                   <a:txBody>
-                    <a:bodyPr wrap="square"/>
+                    <a:bodyPr/>
                     <a:lstStyle/>
                     <a:p>
                       <a:pPr algn="l"/>
@@ -10679,7 +11262,7 @@
                 </a:tc>
                 <a:tc>
                   <a:txBody>
-                    <a:bodyPr wrap="square"/>
+                    <a:bodyPr/>
                     <a:lstStyle/>
                     <a:p>
                       <a:pPr algn="ctr"/>
@@ -10703,7 +11286,7 @@
                 </a:tc>
                 <a:tc>
                   <a:txBody>
-                    <a:bodyPr wrap="square"/>
+                    <a:bodyPr/>
                     <a:lstStyle/>
                     <a:p>
                       <a:pPr algn="ctr"/>
@@ -10725,11 +11308,16 @@
                     </a:solidFill>
                   </a:tcPr>
                 </a:tc>
+                <a:extLst>
+                  <a:ext uri="{0D108BD9-81ED-4DB2-BD59-A6C34878D82A}">
+                    <a16:rowId xmlns:a16="http://schemas.microsoft.com/office/drawing/2014/main" val="10001"/>
+                  </a:ext>
+                </a:extLst>
               </a:tr>
               <a:tr h="308610">
                 <a:tc>
                   <a:txBody>
-                    <a:bodyPr wrap="square"/>
+                    <a:bodyPr/>
                     <a:lstStyle/>
                     <a:p>
                       <a:pPr algn="l"/>
@@ -10753,7 +11341,7 @@
                 </a:tc>
                 <a:tc>
                   <a:txBody>
-                    <a:bodyPr wrap="square"/>
+                    <a:bodyPr/>
                     <a:lstStyle/>
                     <a:p>
                       <a:pPr algn="ctr"/>
@@ -10777,7 +11365,7 @@
                 </a:tc>
                 <a:tc>
                   <a:txBody>
-                    <a:bodyPr wrap="square"/>
+                    <a:bodyPr/>
                     <a:lstStyle/>
                     <a:p>
                       <a:pPr algn="ctr"/>
@@ -10799,11 +11387,16 @@
                     </a:solidFill>
                   </a:tcPr>
                 </a:tc>
+                <a:extLst>
+                  <a:ext uri="{0D108BD9-81ED-4DB2-BD59-A6C34878D82A}">
+                    <a16:rowId xmlns:a16="http://schemas.microsoft.com/office/drawing/2014/main" val="10002"/>
+                  </a:ext>
+                </a:extLst>
               </a:tr>
               <a:tr h="308610">
                 <a:tc>
                   <a:txBody>
-                    <a:bodyPr wrap="square"/>
+                    <a:bodyPr/>
                     <a:lstStyle/>
                     <a:p>
                       <a:pPr algn="l"/>
@@ -10827,7 +11420,7 @@
                 </a:tc>
                 <a:tc>
                   <a:txBody>
-                    <a:bodyPr wrap="square"/>
+                    <a:bodyPr/>
                     <a:lstStyle/>
                     <a:p>
                       <a:pPr algn="ctr"/>
@@ -10851,7 +11444,7 @@
                 </a:tc>
                 <a:tc>
                   <a:txBody>
-                    <a:bodyPr wrap="square"/>
+                    <a:bodyPr/>
                     <a:lstStyle/>
                     <a:p>
                       <a:pPr algn="ctr"/>
@@ -10873,6 +11466,11 @@
                     </a:solidFill>
                   </a:tcPr>
                 </a:tc>
+                <a:extLst>
+                  <a:ext uri="{0D108BD9-81ED-4DB2-BD59-A6C34878D82A}">
+                    <a16:rowId xmlns:a16="http://schemas.microsoft.com/office/drawing/2014/main" val="10003"/>
+                  </a:ext>
+                </a:extLst>
               </a:tr>
             </a:tbl>
           </a:graphicData>
@@ -10932,16 +11530,46 @@
                 <a:tableStyleId>{5C22544A-7EE6-4342-B048-85BDC9FD1C3A}</a:tableStyleId>
               </a:tblPr>
               <a:tblGrid>
-                <a:gridCol w="1371600"/>
-                <a:gridCol w="1645920"/>
-                <a:gridCol w="1645920"/>
-                <a:gridCol w="1828800"/>
-                <a:gridCol w="2011680"/>
+                <a:gridCol w="1371600">
+                  <a:extLst>
+                    <a:ext uri="{9D8B030D-6E8A-4147-A177-3AD203B41FA5}">
+                      <a16:colId xmlns:a16="http://schemas.microsoft.com/office/drawing/2014/main" val="20000"/>
+                    </a:ext>
+                  </a:extLst>
+                </a:gridCol>
+                <a:gridCol w="1645920">
+                  <a:extLst>
+                    <a:ext uri="{9D8B030D-6E8A-4147-A177-3AD203B41FA5}">
+                      <a16:colId xmlns:a16="http://schemas.microsoft.com/office/drawing/2014/main" val="20001"/>
+                    </a:ext>
+                  </a:extLst>
+                </a:gridCol>
+                <a:gridCol w="1645920">
+                  <a:extLst>
+                    <a:ext uri="{9D8B030D-6E8A-4147-A177-3AD203B41FA5}">
+                      <a16:colId xmlns:a16="http://schemas.microsoft.com/office/drawing/2014/main" val="20002"/>
+                    </a:ext>
+                  </a:extLst>
+                </a:gridCol>
+                <a:gridCol w="1828800">
+                  <a:extLst>
+                    <a:ext uri="{9D8B030D-6E8A-4147-A177-3AD203B41FA5}">
+                      <a16:colId xmlns:a16="http://schemas.microsoft.com/office/drawing/2014/main" val="20003"/>
+                    </a:ext>
+                  </a:extLst>
+                </a:gridCol>
+                <a:gridCol w="2011680">
+                  <a:extLst>
+                    <a:ext uri="{9D8B030D-6E8A-4147-A177-3AD203B41FA5}">
+                      <a16:colId xmlns:a16="http://schemas.microsoft.com/office/drawing/2014/main" val="20004"/>
+                    </a:ext>
+                  </a:extLst>
+                </a:gridCol>
               </a:tblGrid>
               <a:tr h="268605">
                 <a:tc>
                   <a:txBody>
-                    <a:bodyPr wrap="square"/>
+                    <a:bodyPr/>
                     <a:lstStyle/>
                     <a:p>
                       <a:pPr algn="ctr"/>
@@ -10965,7 +11593,7 @@
                 </a:tc>
                 <a:tc>
                   <a:txBody>
-                    <a:bodyPr wrap="square"/>
+                    <a:bodyPr/>
                     <a:lstStyle/>
                     <a:p>
                       <a:pPr algn="ctr"/>
@@ -10989,7 +11617,7 @@
                 </a:tc>
                 <a:tc>
                   <a:txBody>
-                    <a:bodyPr wrap="square"/>
+                    <a:bodyPr/>
                     <a:lstStyle/>
                     <a:p>
                       <a:pPr algn="ctr"/>
@@ -11013,7 +11641,7 @@
                 </a:tc>
                 <a:tc>
                   <a:txBody>
-                    <a:bodyPr wrap="square"/>
+                    <a:bodyPr/>
                     <a:lstStyle/>
                     <a:p>
                       <a:pPr algn="ctr"/>
@@ -11037,7 +11665,7 @@
                 </a:tc>
                 <a:tc>
                   <a:txBody>
-                    <a:bodyPr wrap="square"/>
+                    <a:bodyPr/>
                     <a:lstStyle/>
                     <a:p>
                       <a:pPr algn="ctr"/>
@@ -11059,11 +11687,16 @@
                     </a:solidFill>
                   </a:tcPr>
                 </a:tc>
+                <a:extLst>
+                  <a:ext uri="{0D108BD9-81ED-4DB2-BD59-A6C34878D82A}">
+                    <a16:rowId xmlns:a16="http://schemas.microsoft.com/office/drawing/2014/main" val="10000"/>
+                  </a:ext>
+                </a:extLst>
               </a:tr>
               <a:tr h="268605">
                 <a:tc>
                   <a:txBody>
-                    <a:bodyPr wrap="square"/>
+                    <a:bodyPr/>
                     <a:lstStyle/>
                     <a:p>
                       <a:pPr algn="l"/>
@@ -11087,7 +11720,7 @@
                 </a:tc>
                 <a:tc>
                   <a:txBody>
-                    <a:bodyPr wrap="square"/>
+                    <a:bodyPr/>
                     <a:lstStyle/>
                     <a:p>
                       <a:pPr algn="ctr"/>
@@ -11111,7 +11744,7 @@
                 </a:tc>
                 <a:tc>
                   <a:txBody>
-                    <a:bodyPr wrap="square"/>
+                    <a:bodyPr/>
                     <a:lstStyle/>
                     <a:p>
                       <a:pPr algn="ctr"/>
@@ -11135,7 +11768,7 @@
                 </a:tc>
                 <a:tc>
                   <a:txBody>
-                    <a:bodyPr wrap="square"/>
+                    <a:bodyPr/>
                     <a:lstStyle/>
                     <a:p>
                       <a:pPr algn="ctr"/>
@@ -11159,7 +11792,7 @@
                 </a:tc>
                 <a:tc>
                   <a:txBody>
-                    <a:bodyPr wrap="square"/>
+                    <a:bodyPr/>
                     <a:lstStyle/>
                     <a:p>
                       <a:pPr algn="ctr"/>
@@ -11181,11 +11814,16 @@
                     </a:solidFill>
                   </a:tcPr>
                 </a:tc>
+                <a:extLst>
+                  <a:ext uri="{0D108BD9-81ED-4DB2-BD59-A6C34878D82A}">
+                    <a16:rowId xmlns:a16="http://schemas.microsoft.com/office/drawing/2014/main" val="10001"/>
+                  </a:ext>
+                </a:extLst>
               </a:tr>
               <a:tr h="268605">
                 <a:tc>
                   <a:txBody>
-                    <a:bodyPr wrap="square"/>
+                    <a:bodyPr/>
                     <a:lstStyle/>
                     <a:p>
                       <a:pPr algn="l"/>
@@ -11209,7 +11847,7 @@
                 </a:tc>
                 <a:tc>
                   <a:txBody>
-                    <a:bodyPr wrap="square"/>
+                    <a:bodyPr/>
                     <a:lstStyle/>
                     <a:p>
                       <a:pPr algn="ctr"/>
@@ -11233,7 +11871,7 @@
                 </a:tc>
                 <a:tc>
                   <a:txBody>
-                    <a:bodyPr wrap="square"/>
+                    <a:bodyPr/>
                     <a:lstStyle/>
                     <a:p>
                       <a:pPr algn="ctr"/>
@@ -11257,7 +11895,7 @@
                 </a:tc>
                 <a:tc>
                   <a:txBody>
-                    <a:bodyPr wrap="square"/>
+                    <a:bodyPr/>
                     <a:lstStyle/>
                     <a:p>
                       <a:pPr algn="ctr"/>
@@ -11281,7 +11919,7 @@
                 </a:tc>
                 <a:tc>
                   <a:txBody>
-                    <a:bodyPr wrap="square"/>
+                    <a:bodyPr/>
                     <a:lstStyle/>
                     <a:p>
                       <a:pPr algn="ctr"/>
@@ -11303,11 +11941,16 @@
                     </a:solidFill>
                   </a:tcPr>
                 </a:tc>
+                <a:extLst>
+                  <a:ext uri="{0D108BD9-81ED-4DB2-BD59-A6C34878D82A}">
+                    <a16:rowId xmlns:a16="http://schemas.microsoft.com/office/drawing/2014/main" val="10002"/>
+                  </a:ext>
+                </a:extLst>
               </a:tr>
               <a:tr h="268605">
                 <a:tc>
                   <a:txBody>
-                    <a:bodyPr wrap="square"/>
+                    <a:bodyPr/>
                     <a:lstStyle/>
                     <a:p>
                       <a:pPr algn="l"/>
@@ -11331,7 +11974,7 @@
                 </a:tc>
                 <a:tc>
                   <a:txBody>
-                    <a:bodyPr wrap="square"/>
+                    <a:bodyPr/>
                     <a:lstStyle/>
                     <a:p>
                       <a:pPr algn="ctr"/>
@@ -11355,7 +11998,7 @@
                 </a:tc>
                 <a:tc>
                   <a:txBody>
-                    <a:bodyPr wrap="square"/>
+                    <a:bodyPr/>
                     <a:lstStyle/>
                     <a:p>
                       <a:pPr algn="ctr"/>
@@ -11379,7 +12022,7 @@
                 </a:tc>
                 <a:tc>
                   <a:txBody>
-                    <a:bodyPr wrap="square"/>
+                    <a:bodyPr/>
                     <a:lstStyle/>
                     <a:p>
                       <a:pPr algn="ctr"/>
@@ -11403,7 +12046,7 @@
                 </a:tc>
                 <a:tc>
                   <a:txBody>
-                    <a:bodyPr wrap="square"/>
+                    <a:bodyPr/>
                     <a:lstStyle/>
                     <a:p>
                       <a:pPr algn="ctr"/>
@@ -11425,11 +12068,16 @@
                     </a:solidFill>
                   </a:tcPr>
                 </a:tc>
+                <a:extLst>
+                  <a:ext uri="{0D108BD9-81ED-4DB2-BD59-A6C34878D82A}">
+                    <a16:rowId xmlns:a16="http://schemas.microsoft.com/office/drawing/2014/main" val="10003"/>
+                  </a:ext>
+                </a:extLst>
               </a:tr>
               <a:tr h="268605">
                 <a:tc>
                   <a:txBody>
-                    <a:bodyPr wrap="square"/>
+                    <a:bodyPr/>
                     <a:lstStyle/>
                     <a:p>
                       <a:pPr algn="l"/>
@@ -11453,7 +12101,7 @@
                 </a:tc>
                 <a:tc>
                   <a:txBody>
-                    <a:bodyPr wrap="square"/>
+                    <a:bodyPr/>
                     <a:lstStyle/>
                     <a:p>
                       <a:pPr algn="ctr"/>
@@ -11477,7 +12125,7 @@
                 </a:tc>
                 <a:tc>
                   <a:txBody>
-                    <a:bodyPr wrap="square"/>
+                    <a:bodyPr/>
                     <a:lstStyle/>
                     <a:p>
                       <a:pPr algn="ctr"/>
@@ -11501,7 +12149,7 @@
                 </a:tc>
                 <a:tc>
                   <a:txBody>
-                    <a:bodyPr wrap="square"/>
+                    <a:bodyPr/>
                     <a:lstStyle/>
                     <a:p>
                       <a:pPr algn="ctr"/>
@@ -11525,7 +12173,7 @@
                 </a:tc>
                 <a:tc>
                   <a:txBody>
-                    <a:bodyPr wrap="square"/>
+                    <a:bodyPr/>
                     <a:lstStyle/>
                     <a:p>
                       <a:pPr algn="ctr"/>
@@ -11547,11 +12195,16 @@
                     </a:solidFill>
                   </a:tcPr>
                 </a:tc>
+                <a:extLst>
+                  <a:ext uri="{0D108BD9-81ED-4DB2-BD59-A6C34878D82A}">
+                    <a16:rowId xmlns:a16="http://schemas.microsoft.com/office/drawing/2014/main" val="10004"/>
+                  </a:ext>
+                </a:extLst>
               </a:tr>
               <a:tr h="268605">
                 <a:tc>
                   <a:txBody>
-                    <a:bodyPr wrap="square"/>
+                    <a:bodyPr/>
                     <a:lstStyle/>
                     <a:p>
                       <a:pPr algn="l"/>
@@ -11575,7 +12228,7 @@
                 </a:tc>
                 <a:tc>
                   <a:txBody>
-                    <a:bodyPr wrap="square"/>
+                    <a:bodyPr/>
                     <a:lstStyle/>
                     <a:p>
                       <a:pPr algn="ctr"/>
@@ -11599,7 +12252,7 @@
                 </a:tc>
                 <a:tc>
                   <a:txBody>
-                    <a:bodyPr wrap="square"/>
+                    <a:bodyPr/>
                     <a:lstStyle/>
                     <a:p>
                       <a:pPr algn="ctr"/>
@@ -11623,7 +12276,7 @@
                 </a:tc>
                 <a:tc>
                   <a:txBody>
-                    <a:bodyPr wrap="square"/>
+                    <a:bodyPr/>
                     <a:lstStyle/>
                     <a:p>
                       <a:pPr algn="ctr"/>
@@ -11647,7 +12300,7 @@
                 </a:tc>
                 <a:tc>
                   <a:txBody>
-                    <a:bodyPr wrap="square"/>
+                    <a:bodyPr/>
                     <a:lstStyle/>
                     <a:p>
                       <a:pPr algn="ctr"/>
@@ -11669,11 +12322,16 @@
                     </a:solidFill>
                   </a:tcPr>
                 </a:tc>
+                <a:extLst>
+                  <a:ext uri="{0D108BD9-81ED-4DB2-BD59-A6C34878D82A}">
+                    <a16:rowId xmlns:a16="http://schemas.microsoft.com/office/drawing/2014/main" val="10005"/>
+                  </a:ext>
+                </a:extLst>
               </a:tr>
               <a:tr h="268605">
                 <a:tc>
                   <a:txBody>
-                    <a:bodyPr wrap="square"/>
+                    <a:bodyPr/>
                     <a:lstStyle/>
                     <a:p>
                       <a:pPr algn="l"/>
@@ -11697,7 +12355,7 @@
                 </a:tc>
                 <a:tc>
                   <a:txBody>
-                    <a:bodyPr wrap="square"/>
+                    <a:bodyPr/>
                     <a:lstStyle/>
                     <a:p>
                       <a:pPr algn="ctr"/>
@@ -11721,7 +12379,7 @@
                 </a:tc>
                 <a:tc>
                   <a:txBody>
-                    <a:bodyPr wrap="square"/>
+                    <a:bodyPr/>
                     <a:lstStyle/>
                     <a:p>
                       <a:pPr algn="ctr"/>
@@ -11745,7 +12403,7 @@
                 </a:tc>
                 <a:tc>
                   <a:txBody>
-                    <a:bodyPr wrap="square"/>
+                    <a:bodyPr/>
                     <a:lstStyle/>
                     <a:p>
                       <a:pPr algn="ctr"/>
@@ -11769,7 +12427,7 @@
                 </a:tc>
                 <a:tc>
                   <a:txBody>
-                    <a:bodyPr wrap="square"/>
+                    <a:bodyPr/>
                     <a:lstStyle/>
                     <a:p>
                       <a:pPr algn="ctr"/>
@@ -11791,11 +12449,16 @@
                     </a:solidFill>
                   </a:tcPr>
                 </a:tc>
+                <a:extLst>
+                  <a:ext uri="{0D108BD9-81ED-4DB2-BD59-A6C34878D82A}">
+                    <a16:rowId xmlns:a16="http://schemas.microsoft.com/office/drawing/2014/main" val="10006"/>
+                  </a:ext>
+                </a:extLst>
               </a:tr>
               <a:tr h="268605">
                 <a:tc>
                   <a:txBody>
-                    <a:bodyPr wrap="square"/>
+                    <a:bodyPr/>
                     <a:lstStyle/>
                     <a:p>
                       <a:pPr algn="l"/>
@@ -11819,7 +12482,7 @@
                 </a:tc>
                 <a:tc>
                   <a:txBody>
-                    <a:bodyPr wrap="square"/>
+                    <a:bodyPr/>
                     <a:lstStyle/>
                     <a:p>
                       <a:pPr algn="ctr"/>
@@ -11843,7 +12506,7 @@
                 </a:tc>
                 <a:tc>
                   <a:txBody>
-                    <a:bodyPr wrap="square"/>
+                    <a:bodyPr/>
                     <a:lstStyle/>
                     <a:p>
                       <a:pPr algn="ctr"/>
@@ -11867,7 +12530,7 @@
                 </a:tc>
                 <a:tc>
                   <a:txBody>
-                    <a:bodyPr wrap="square"/>
+                    <a:bodyPr/>
                     <a:lstStyle/>
                     <a:p>
                       <a:pPr algn="ctr"/>
@@ -11891,7 +12554,7 @@
                 </a:tc>
                 <a:tc>
                   <a:txBody>
-                    <a:bodyPr wrap="square"/>
+                    <a:bodyPr/>
                     <a:lstStyle/>
                     <a:p>
                       <a:pPr algn="ctr"/>
@@ -11913,6 +12576,11 @@
                     </a:solidFill>
                   </a:tcPr>
                 </a:tc>
+                <a:extLst>
+                  <a:ext uri="{0D108BD9-81ED-4DB2-BD59-A6C34878D82A}">
+                    <a16:rowId xmlns:a16="http://schemas.microsoft.com/office/drawing/2014/main" val="10007"/>
+                  </a:ext>
+                </a:extLst>
               </a:tr>
             </a:tbl>
           </a:graphicData>
@@ -11963,7 +12631,7 @@
 </file>
 
 <file path=ppt/slides/slide18.xml><?xml version="1.0" encoding="utf-8"?>
-<p:sld xmlns:a="http://schemas.openxmlformats.org/drawingml/2006/main" xmlns:p="http://schemas.openxmlformats.org/presentationml/2006/main" xmlns:r="http://schemas.openxmlformats.org/officeDocument/2006/relationships">
+<p:sld xmlns:a="http://schemas.openxmlformats.org/drawingml/2006/main" xmlns:r="http://schemas.openxmlformats.org/officeDocument/2006/relationships" xmlns:p="http://schemas.openxmlformats.org/presentationml/2006/main">
   <p:cSld>
     <p:spTree>
       <p:nvGrpSpPr>
@@ -11971,7 +12639,14 @@
         <p:cNvGrpSpPr/>
         <p:nvPr/>
       </p:nvGrpSpPr>
-      <p:grpSpPr/>
+      <p:grpSpPr>
+        <a:xfrm>
+          <a:off x="0" y="0"/>
+          <a:ext cx="0" cy="0"/>
+          <a:chOff x="0" y="0"/>
+          <a:chExt cx="0" cy="0"/>
+        </a:xfrm>
+      </p:grpSpPr>
       <p:sp>
         <p:nvSpPr>
           <p:cNvPr id="2" name="TextBox 1"/>
@@ -12047,6 +12722,7 @@
           <a:lstStyle/>
           <a:p>
             <a:pPr algn="ctr"/>
+            <a:endParaRPr/>
           </a:p>
         </p:txBody>
       </p:sp>
@@ -12123,7 +12799,7 @@
           </a:fontRef>
         </p:style>
         <p:txBody>
-          <a:bodyPr rtlCol="0" anchor="ctr" wrap="square"/>
+          <a:bodyPr wrap="square" rtlCol="0" anchor="ctr"/>
           <a:lstStyle/>
           <a:p>
             <a:pPr algn="ctr"/>
@@ -12202,7 +12878,7 @@
           </a:fontRef>
         </p:style>
         <p:txBody>
-          <a:bodyPr rtlCol="0" anchor="ctr" wrap="square"/>
+          <a:bodyPr wrap="square" rtlCol="0" anchor="ctr"/>
           <a:lstStyle/>
           <a:p>
             <a:pPr algn="ctr"/>
@@ -12379,7 +13055,7 @@
         </p:nvGraphicFramePr>
         <p:xfrm>
           <a:off x="365760" y="3566160"/>
-          <a:ext cx="8412480" cy="1143000"/>
+          <a:ext cx="8412480" cy="1295400"/>
         </p:xfrm>
         <a:graphic>
           <a:graphicData uri="http://schemas.openxmlformats.org/drawingml/2006/table">
@@ -12388,14 +13064,32 @@
                 <a:tableStyleId>{5C22544A-7EE6-4342-B048-85BDC9FD1C3A}</a:tableStyleId>
               </a:tblPr>
               <a:tblGrid>
-                <a:gridCol w="2286000"/>
-                <a:gridCol w="2286000"/>
-                <a:gridCol w="3840480"/>
+                <a:gridCol w="2286000">
+                  <a:extLst>
+                    <a:ext uri="{9D8B030D-6E8A-4147-A177-3AD203B41FA5}">
+                      <a16:colId xmlns:a16="http://schemas.microsoft.com/office/drawing/2014/main" val="20000"/>
+                    </a:ext>
+                  </a:extLst>
+                </a:gridCol>
+                <a:gridCol w="2286000">
+                  <a:extLst>
+                    <a:ext uri="{9D8B030D-6E8A-4147-A177-3AD203B41FA5}">
+                      <a16:colId xmlns:a16="http://schemas.microsoft.com/office/drawing/2014/main" val="20001"/>
+                    </a:ext>
+                  </a:extLst>
+                </a:gridCol>
+                <a:gridCol w="3840480">
+                  <a:extLst>
+                    <a:ext uri="{9D8B030D-6E8A-4147-A177-3AD203B41FA5}">
+                      <a16:colId xmlns:a16="http://schemas.microsoft.com/office/drawing/2014/main" val="20002"/>
+                    </a:ext>
+                  </a:extLst>
+                </a:gridCol>
               </a:tblGrid>
               <a:tr h="228600">
                 <a:tc>
                   <a:txBody>
-                    <a:bodyPr wrap="square"/>
+                    <a:bodyPr/>
                     <a:lstStyle/>
                     <a:p>
                       <a:pPr algn="ctr"/>
@@ -12419,7 +13113,7 @@
                 </a:tc>
                 <a:tc>
                   <a:txBody>
-                    <a:bodyPr wrap="square"/>
+                    <a:bodyPr/>
                     <a:lstStyle/>
                     <a:p>
                       <a:pPr algn="ctr"/>
@@ -12443,7 +13137,7 @@
                 </a:tc>
                 <a:tc>
                   <a:txBody>
-                    <a:bodyPr wrap="square"/>
+                    <a:bodyPr/>
                     <a:lstStyle/>
                     <a:p>
                       <a:pPr algn="ctr"/>
@@ -12465,11 +13159,16 @@
                     </a:solidFill>
                   </a:tcPr>
                 </a:tc>
+                <a:extLst>
+                  <a:ext uri="{0D108BD9-81ED-4DB2-BD59-A6C34878D82A}">
+                    <a16:rowId xmlns:a16="http://schemas.microsoft.com/office/drawing/2014/main" val="10000"/>
+                  </a:ext>
+                </a:extLst>
               </a:tr>
               <a:tr h="228600">
                 <a:tc>
                   <a:txBody>
-                    <a:bodyPr wrap="square"/>
+                    <a:bodyPr/>
                     <a:lstStyle/>
                     <a:p>
                       <a:pPr algn="l"/>
@@ -12493,7 +13192,7 @@
                 </a:tc>
                 <a:tc>
                   <a:txBody>
-                    <a:bodyPr wrap="square"/>
+                    <a:bodyPr/>
                     <a:lstStyle/>
                     <a:p>
                       <a:pPr algn="ctr"/>
@@ -12517,7 +13216,7 @@
                 </a:tc>
                 <a:tc>
                   <a:txBody>
-                    <a:bodyPr wrap="square"/>
+                    <a:bodyPr/>
                     <a:lstStyle/>
                     <a:p>
                       <a:pPr algn="ctr"/>
@@ -12539,11 +13238,16 @@
                     </a:solidFill>
                   </a:tcPr>
                 </a:tc>
+                <a:extLst>
+                  <a:ext uri="{0D108BD9-81ED-4DB2-BD59-A6C34878D82A}">
+                    <a16:rowId xmlns:a16="http://schemas.microsoft.com/office/drawing/2014/main" val="10001"/>
+                  </a:ext>
+                </a:extLst>
               </a:tr>
               <a:tr h="228600">
                 <a:tc>
                   <a:txBody>
-                    <a:bodyPr wrap="square"/>
+                    <a:bodyPr/>
                     <a:lstStyle/>
                     <a:p>
                       <a:pPr algn="l"/>
@@ -12567,7 +13271,7 @@
                 </a:tc>
                 <a:tc>
                   <a:txBody>
-                    <a:bodyPr wrap="square"/>
+                    <a:bodyPr/>
                     <a:lstStyle/>
                     <a:p>
                       <a:pPr algn="ctr"/>
@@ -12591,7 +13295,7 @@
                 </a:tc>
                 <a:tc>
                   <a:txBody>
-                    <a:bodyPr wrap="square"/>
+                    <a:bodyPr/>
                     <a:lstStyle/>
                     <a:p>
                       <a:pPr algn="ctr"/>
@@ -12613,11 +13317,16 @@
                     </a:solidFill>
                   </a:tcPr>
                 </a:tc>
+                <a:extLst>
+                  <a:ext uri="{0D108BD9-81ED-4DB2-BD59-A6C34878D82A}">
+                    <a16:rowId xmlns:a16="http://schemas.microsoft.com/office/drawing/2014/main" val="10002"/>
+                  </a:ext>
+                </a:extLst>
               </a:tr>
               <a:tr h="228600">
                 <a:tc>
                   <a:txBody>
-                    <a:bodyPr wrap="square"/>
+                    <a:bodyPr/>
                     <a:lstStyle/>
                     <a:p>
                       <a:pPr algn="l"/>
@@ -12641,7 +13350,7 @@
                 </a:tc>
                 <a:tc>
                   <a:txBody>
-                    <a:bodyPr wrap="square"/>
+                    <a:bodyPr/>
                     <a:lstStyle/>
                     <a:p>
                       <a:pPr algn="ctr"/>
@@ -12665,7 +13374,7 @@
                 </a:tc>
                 <a:tc>
                   <a:txBody>
-                    <a:bodyPr wrap="square"/>
+                    <a:bodyPr/>
                     <a:lstStyle/>
                     <a:p>
                       <a:pPr algn="ctr"/>
@@ -12687,11 +13396,16 @@
                     </a:solidFill>
                   </a:tcPr>
                 </a:tc>
+                <a:extLst>
+                  <a:ext uri="{0D108BD9-81ED-4DB2-BD59-A6C34878D82A}">
+                    <a16:rowId xmlns:a16="http://schemas.microsoft.com/office/drawing/2014/main" val="10003"/>
+                  </a:ext>
+                </a:extLst>
               </a:tr>
               <a:tr h="228600">
                 <a:tc>
                   <a:txBody>
-                    <a:bodyPr wrap="square"/>
+                    <a:bodyPr/>
                     <a:lstStyle/>
                     <a:p>
                       <a:pPr algn="l"/>
@@ -12715,7 +13429,7 @@
                 </a:tc>
                 <a:tc>
                   <a:txBody>
-                    <a:bodyPr wrap="square"/>
+                    <a:bodyPr/>
                     <a:lstStyle/>
                     <a:p>
                       <a:pPr algn="ctr"/>
@@ -12739,7 +13453,7 @@
                 </a:tc>
                 <a:tc>
                   <a:txBody>
-                    <a:bodyPr wrap="square"/>
+                    <a:bodyPr/>
                     <a:lstStyle/>
                     <a:p>
                       <a:pPr algn="ctr"/>
@@ -12761,6 +13475,11 @@
                     </a:solidFill>
                   </a:tcPr>
                 </a:tc>
+                <a:extLst>
+                  <a:ext uri="{0D108BD9-81ED-4DB2-BD59-A6C34878D82A}">
+                    <a16:rowId xmlns:a16="http://schemas.microsoft.com/office/drawing/2014/main" val="10004"/>
+                  </a:ext>
+                </a:extLst>
               </a:tr>
             </a:tbl>
           </a:graphicData>
@@ -12811,7 +13530,7 @@
 </file>
 
 <file path=ppt/slides/slide19.xml><?xml version="1.0" encoding="utf-8"?>
-<p:sld xmlns:a="http://schemas.openxmlformats.org/drawingml/2006/main" xmlns:p="http://schemas.openxmlformats.org/presentationml/2006/main" xmlns:r="http://schemas.openxmlformats.org/officeDocument/2006/relationships">
+<p:sld xmlns:a="http://schemas.openxmlformats.org/drawingml/2006/main" xmlns:r="http://schemas.openxmlformats.org/officeDocument/2006/relationships" xmlns:p="http://schemas.openxmlformats.org/presentationml/2006/main">
   <p:cSld>
     <p:spTree>
       <p:nvGrpSpPr>
@@ -12819,7 +13538,14 @@
         <p:cNvGrpSpPr/>
         <p:nvPr/>
       </p:nvGrpSpPr>
-      <p:grpSpPr/>
+      <p:grpSpPr>
+        <a:xfrm>
+          <a:off x="0" y="0"/>
+          <a:ext cx="0" cy="0"/>
+          <a:chOff x="0" y="0"/>
+          <a:chExt cx="0" cy="0"/>
+        </a:xfrm>
+      </p:grpSpPr>
       <p:sp>
         <p:nvSpPr>
           <p:cNvPr id="2" name="TextBox 1"/>
@@ -12895,6 +13621,7 @@
           <a:lstStyle/>
           <a:p>
             <a:pPr algn="ctr"/>
+            <a:endParaRPr/>
           </a:p>
         </p:txBody>
       </p:sp>
@@ -13089,7 +13816,7 @@
           </a:fontRef>
         </p:style>
         <p:txBody>
-          <a:bodyPr rtlCol="0" anchor="ctr" wrap="square"/>
+          <a:bodyPr wrap="square" rtlCol="0" anchor="ctr"/>
           <a:lstStyle/>
           <a:p>
             <a:pPr algn="ctr"/>
@@ -13187,7 +13914,7 @@
 </file>
 
 <file path=ppt/slides/slide2.xml><?xml version="1.0" encoding="utf-8"?>
-<p:sld xmlns:a="http://schemas.openxmlformats.org/drawingml/2006/main" xmlns:p="http://schemas.openxmlformats.org/presentationml/2006/main" xmlns:r="http://schemas.openxmlformats.org/officeDocument/2006/relationships">
+<p:sld xmlns:a="http://schemas.openxmlformats.org/drawingml/2006/main" xmlns:r="http://schemas.openxmlformats.org/officeDocument/2006/relationships" xmlns:p="http://schemas.openxmlformats.org/presentationml/2006/main">
   <p:cSld>
     <p:spTree>
       <p:nvGrpSpPr>
@@ -13195,7 +13922,14 @@
         <p:cNvGrpSpPr/>
         <p:nvPr/>
       </p:nvGrpSpPr>
-      <p:grpSpPr/>
+      <p:grpSpPr>
+        <a:xfrm>
+          <a:off x="0" y="0"/>
+          <a:ext cx="0" cy="0"/>
+          <a:chOff x="0" y="0"/>
+          <a:chExt cx="0" cy="0"/>
+        </a:xfrm>
+      </p:grpSpPr>
       <p:sp>
         <p:nvSpPr>
           <p:cNvPr id="2" name="TextBox 1"/>
@@ -13271,6 +14005,7 @@
           <a:lstStyle/>
           <a:p>
             <a:pPr algn="ctr"/>
+            <a:endParaRPr/>
           </a:p>
         </p:txBody>
       </p:sp>
@@ -13312,7 +14047,7 @@
           </a:fontRef>
         </p:style>
         <p:txBody>
-          <a:bodyPr rtlCol="0" anchor="ctr" wrap="square"/>
+          <a:bodyPr wrap="square" rtlCol="0" anchor="ctr"/>
           <a:lstStyle/>
           <a:p>
             <a:pPr algn="ctr"/>
@@ -13384,6 +14119,7 @@
           <a:lstStyle/>
           <a:p>
             <a:pPr algn="ctr"/>
+            <a:endParaRPr/>
           </a:p>
         </p:txBody>
       </p:sp>
@@ -13430,18 +14166,60 @@
                 <a:tableStyleId>{5C22544A-7EE6-4342-B048-85BDC9FD1C3A}</a:tableStyleId>
               </a:tblPr>
               <a:tblGrid>
-                <a:gridCol w="1325880"/>
-                <a:gridCol w="685800"/>
-                <a:gridCol w="1417320"/>
-                <a:gridCol w="960120"/>
-                <a:gridCol w="1234440"/>
-                <a:gridCol w="1234440"/>
-                <a:gridCol w="1417320"/>
+                <a:gridCol w="1325880">
+                  <a:extLst>
+                    <a:ext uri="{9D8B030D-6E8A-4147-A177-3AD203B41FA5}">
+                      <a16:colId xmlns:a16="http://schemas.microsoft.com/office/drawing/2014/main" val="20000"/>
+                    </a:ext>
+                  </a:extLst>
+                </a:gridCol>
+                <a:gridCol w="685800">
+                  <a:extLst>
+                    <a:ext uri="{9D8B030D-6E8A-4147-A177-3AD203B41FA5}">
+                      <a16:colId xmlns:a16="http://schemas.microsoft.com/office/drawing/2014/main" val="20001"/>
+                    </a:ext>
+                  </a:extLst>
+                </a:gridCol>
+                <a:gridCol w="1417320">
+                  <a:extLst>
+                    <a:ext uri="{9D8B030D-6E8A-4147-A177-3AD203B41FA5}">
+                      <a16:colId xmlns:a16="http://schemas.microsoft.com/office/drawing/2014/main" val="20002"/>
+                    </a:ext>
+                  </a:extLst>
+                </a:gridCol>
+                <a:gridCol w="960120">
+                  <a:extLst>
+                    <a:ext uri="{9D8B030D-6E8A-4147-A177-3AD203B41FA5}">
+                      <a16:colId xmlns:a16="http://schemas.microsoft.com/office/drawing/2014/main" val="20003"/>
+                    </a:ext>
+                  </a:extLst>
+                </a:gridCol>
+                <a:gridCol w="1234440">
+                  <a:extLst>
+                    <a:ext uri="{9D8B030D-6E8A-4147-A177-3AD203B41FA5}">
+                      <a16:colId xmlns:a16="http://schemas.microsoft.com/office/drawing/2014/main" val="20004"/>
+                    </a:ext>
+                  </a:extLst>
+                </a:gridCol>
+                <a:gridCol w="1234440">
+                  <a:extLst>
+                    <a:ext uri="{9D8B030D-6E8A-4147-A177-3AD203B41FA5}">
+                      <a16:colId xmlns:a16="http://schemas.microsoft.com/office/drawing/2014/main" val="20005"/>
+                    </a:ext>
+                  </a:extLst>
+                </a:gridCol>
+                <a:gridCol w="1417320">
+                  <a:extLst>
+                    <a:ext uri="{9D8B030D-6E8A-4147-A177-3AD203B41FA5}">
+                      <a16:colId xmlns:a16="http://schemas.microsoft.com/office/drawing/2014/main" val="20006"/>
+                    </a:ext>
+                  </a:extLst>
+                </a:gridCol>
               </a:tblGrid>
               <a:tr h="309880">
                 <a:tc>
                   <a:txBody>
-                    <a:bodyPr wrap="square"/>
+                    <a:bodyPr/>
                     <a:lstStyle/>
                     <a:p>
                       <a:pPr algn="ctr"/>
@@ -13465,7 +14243,7 @@
                 </a:tc>
                 <a:tc>
                   <a:txBody>
-                    <a:bodyPr wrap="square"/>
+                    <a:bodyPr/>
                     <a:lstStyle/>
                     <a:p>
                       <a:pPr algn="ctr"/>
@@ -13489,7 +14267,7 @@
                 </a:tc>
                 <a:tc>
                   <a:txBody>
-                    <a:bodyPr wrap="square"/>
+                    <a:bodyPr/>
                     <a:lstStyle/>
                     <a:p>
                       <a:pPr algn="ctr"/>
@@ -13513,7 +14291,7 @@
                 </a:tc>
                 <a:tc>
                   <a:txBody>
-                    <a:bodyPr wrap="square"/>
+                    <a:bodyPr/>
                     <a:lstStyle/>
                     <a:p>
                       <a:pPr algn="ctr"/>
@@ -13537,7 +14315,7 @@
                 </a:tc>
                 <a:tc>
                   <a:txBody>
-                    <a:bodyPr wrap="square"/>
+                    <a:bodyPr/>
                     <a:lstStyle/>
                     <a:p>
                       <a:pPr algn="ctr"/>
@@ -13561,7 +14339,7 @@
                 </a:tc>
                 <a:tc>
                   <a:txBody>
-                    <a:bodyPr wrap="square"/>
+                    <a:bodyPr/>
                     <a:lstStyle/>
                     <a:p>
                       <a:pPr algn="ctr"/>
@@ -13585,7 +14363,7 @@
                 </a:tc>
                 <a:tc>
                   <a:txBody>
-                    <a:bodyPr wrap="square"/>
+                    <a:bodyPr/>
                     <a:lstStyle/>
                     <a:p>
                       <a:pPr algn="ctr"/>
@@ -13607,11 +14385,16 @@
                     </a:solidFill>
                   </a:tcPr>
                 </a:tc>
+                <a:extLst>
+                  <a:ext uri="{0D108BD9-81ED-4DB2-BD59-A6C34878D82A}">
+                    <a16:rowId xmlns:a16="http://schemas.microsoft.com/office/drawing/2014/main" val="10000"/>
+                  </a:ext>
+                </a:extLst>
               </a:tr>
               <a:tr h="309880">
                 <a:tc>
                   <a:txBody>
-                    <a:bodyPr wrap="square"/>
+                    <a:bodyPr/>
                     <a:lstStyle/>
                     <a:p>
                       <a:pPr algn="l"/>
@@ -13635,7 +14418,7 @@
                 </a:tc>
                 <a:tc>
                   <a:txBody>
-                    <a:bodyPr wrap="square"/>
+                    <a:bodyPr/>
                     <a:lstStyle/>
                     <a:p>
                       <a:pPr algn="ctr"/>
@@ -13659,7 +14442,7 @@
                 </a:tc>
                 <a:tc>
                   <a:txBody>
-                    <a:bodyPr wrap="square"/>
+                    <a:bodyPr/>
                     <a:lstStyle/>
                     <a:p>
                       <a:pPr algn="ctr"/>
@@ -13683,7 +14466,7 @@
                 </a:tc>
                 <a:tc>
                   <a:txBody>
-                    <a:bodyPr wrap="square"/>
+                    <a:bodyPr/>
                     <a:lstStyle/>
                     <a:p>
                       <a:pPr algn="ctr"/>
@@ -13707,7 +14490,7 @@
                 </a:tc>
                 <a:tc>
                   <a:txBody>
-                    <a:bodyPr wrap="square"/>
+                    <a:bodyPr/>
                     <a:lstStyle/>
                     <a:p>
                       <a:pPr algn="ctr"/>
@@ -13731,7 +14514,7 @@
                 </a:tc>
                 <a:tc>
                   <a:txBody>
-                    <a:bodyPr wrap="square"/>
+                    <a:bodyPr/>
                     <a:lstStyle/>
                     <a:p>
                       <a:pPr algn="ctr"/>
@@ -13755,7 +14538,7 @@
                 </a:tc>
                 <a:tc>
                   <a:txBody>
-                    <a:bodyPr wrap="square"/>
+                    <a:bodyPr/>
                     <a:lstStyle/>
                     <a:p>
                       <a:pPr algn="ctr"/>
@@ -13777,11 +14560,16 @@
                     </a:solidFill>
                   </a:tcPr>
                 </a:tc>
+                <a:extLst>
+                  <a:ext uri="{0D108BD9-81ED-4DB2-BD59-A6C34878D82A}">
+                    <a16:rowId xmlns:a16="http://schemas.microsoft.com/office/drawing/2014/main" val="10001"/>
+                  </a:ext>
+                </a:extLst>
               </a:tr>
               <a:tr h="309880">
                 <a:tc>
                   <a:txBody>
-                    <a:bodyPr wrap="square"/>
+                    <a:bodyPr/>
                     <a:lstStyle/>
                     <a:p>
                       <a:pPr algn="l"/>
@@ -13805,7 +14593,7 @@
                 </a:tc>
                 <a:tc>
                   <a:txBody>
-                    <a:bodyPr wrap="square"/>
+                    <a:bodyPr/>
                     <a:lstStyle/>
                     <a:p>
                       <a:pPr algn="ctr"/>
@@ -13829,7 +14617,7 @@
                 </a:tc>
                 <a:tc>
                   <a:txBody>
-                    <a:bodyPr wrap="square"/>
+                    <a:bodyPr/>
                     <a:lstStyle/>
                     <a:p>
                       <a:pPr algn="ctr"/>
@@ -13853,7 +14641,7 @@
                 </a:tc>
                 <a:tc>
                   <a:txBody>
-                    <a:bodyPr wrap="square"/>
+                    <a:bodyPr/>
                     <a:lstStyle/>
                     <a:p>
                       <a:pPr algn="ctr"/>
@@ -13877,7 +14665,7 @@
                 </a:tc>
                 <a:tc>
                   <a:txBody>
-                    <a:bodyPr wrap="square"/>
+                    <a:bodyPr/>
                     <a:lstStyle/>
                     <a:p>
                       <a:pPr algn="ctr"/>
@@ -13901,7 +14689,7 @@
                 </a:tc>
                 <a:tc>
                   <a:txBody>
-                    <a:bodyPr wrap="square"/>
+                    <a:bodyPr/>
                     <a:lstStyle/>
                     <a:p>
                       <a:pPr algn="ctr"/>
@@ -13925,7 +14713,7 @@
                 </a:tc>
                 <a:tc>
                   <a:txBody>
-                    <a:bodyPr wrap="square"/>
+                    <a:bodyPr/>
                     <a:lstStyle/>
                     <a:p>
                       <a:pPr algn="ctr"/>
@@ -13947,11 +14735,16 @@
                     </a:solidFill>
                   </a:tcPr>
                 </a:tc>
+                <a:extLst>
+                  <a:ext uri="{0D108BD9-81ED-4DB2-BD59-A6C34878D82A}">
+                    <a16:rowId xmlns:a16="http://schemas.microsoft.com/office/drawing/2014/main" val="10002"/>
+                  </a:ext>
+                </a:extLst>
               </a:tr>
               <a:tr h="309880">
                 <a:tc>
                   <a:txBody>
-                    <a:bodyPr wrap="square"/>
+                    <a:bodyPr/>
                     <a:lstStyle/>
                     <a:p>
                       <a:pPr algn="l"/>
@@ -13975,7 +14768,7 @@
                 </a:tc>
                 <a:tc>
                   <a:txBody>
-                    <a:bodyPr wrap="square"/>
+                    <a:bodyPr/>
                     <a:lstStyle/>
                     <a:p>
                       <a:pPr algn="ctr"/>
@@ -13999,7 +14792,7 @@
                 </a:tc>
                 <a:tc>
                   <a:txBody>
-                    <a:bodyPr wrap="square"/>
+                    <a:bodyPr/>
                     <a:lstStyle/>
                     <a:p>
                       <a:pPr algn="ctr"/>
@@ -14023,7 +14816,7 @@
                 </a:tc>
                 <a:tc>
                   <a:txBody>
-                    <a:bodyPr wrap="square"/>
+                    <a:bodyPr/>
                     <a:lstStyle/>
                     <a:p>
                       <a:pPr algn="ctr"/>
@@ -14047,7 +14840,7 @@
                 </a:tc>
                 <a:tc>
                   <a:txBody>
-                    <a:bodyPr wrap="square"/>
+                    <a:bodyPr/>
                     <a:lstStyle/>
                     <a:p>
                       <a:pPr algn="ctr"/>
@@ -14071,7 +14864,7 @@
                 </a:tc>
                 <a:tc>
                   <a:txBody>
-                    <a:bodyPr wrap="square"/>
+                    <a:bodyPr/>
                     <a:lstStyle/>
                     <a:p>
                       <a:pPr algn="ctr"/>
@@ -14095,7 +14888,7 @@
                 </a:tc>
                 <a:tc>
                   <a:txBody>
-                    <a:bodyPr wrap="square"/>
+                    <a:bodyPr/>
                     <a:lstStyle/>
                     <a:p>
                       <a:pPr algn="ctr"/>
@@ -14117,11 +14910,16 @@
                     </a:solidFill>
                   </a:tcPr>
                 </a:tc>
+                <a:extLst>
+                  <a:ext uri="{0D108BD9-81ED-4DB2-BD59-A6C34878D82A}">
+                    <a16:rowId xmlns:a16="http://schemas.microsoft.com/office/drawing/2014/main" val="10003"/>
+                  </a:ext>
+                </a:extLst>
               </a:tr>
               <a:tr h="309880">
                 <a:tc>
                   <a:txBody>
-                    <a:bodyPr wrap="square"/>
+                    <a:bodyPr/>
                     <a:lstStyle/>
                     <a:p>
                       <a:pPr algn="l"/>
@@ -14145,7 +14943,7 @@
                 </a:tc>
                 <a:tc>
                   <a:txBody>
-                    <a:bodyPr wrap="square"/>
+                    <a:bodyPr/>
                     <a:lstStyle/>
                     <a:p>
                       <a:pPr algn="ctr"/>
@@ -14169,7 +14967,7 @@
                 </a:tc>
                 <a:tc>
                   <a:txBody>
-                    <a:bodyPr wrap="square"/>
+                    <a:bodyPr/>
                     <a:lstStyle/>
                     <a:p>
                       <a:pPr algn="ctr"/>
@@ -14193,7 +14991,7 @@
                 </a:tc>
                 <a:tc>
                   <a:txBody>
-                    <a:bodyPr wrap="square"/>
+                    <a:bodyPr/>
                     <a:lstStyle/>
                     <a:p>
                       <a:pPr algn="ctr"/>
@@ -14217,7 +15015,7 @@
                 </a:tc>
                 <a:tc>
                   <a:txBody>
-                    <a:bodyPr wrap="square"/>
+                    <a:bodyPr/>
                     <a:lstStyle/>
                     <a:p>
                       <a:pPr algn="ctr"/>
@@ -14241,7 +15039,7 @@
                 </a:tc>
                 <a:tc>
                   <a:txBody>
-                    <a:bodyPr wrap="square"/>
+                    <a:bodyPr/>
                     <a:lstStyle/>
                     <a:p>
                       <a:pPr algn="ctr"/>
@@ -14265,7 +15063,7 @@
                 </a:tc>
                 <a:tc>
                   <a:txBody>
-                    <a:bodyPr wrap="square"/>
+                    <a:bodyPr/>
                     <a:lstStyle/>
                     <a:p>
                       <a:pPr algn="ctr"/>
@@ -14287,11 +15085,16 @@
                     </a:solidFill>
                   </a:tcPr>
                 </a:tc>
+                <a:extLst>
+                  <a:ext uri="{0D108BD9-81ED-4DB2-BD59-A6C34878D82A}">
+                    <a16:rowId xmlns:a16="http://schemas.microsoft.com/office/drawing/2014/main" val="10004"/>
+                  </a:ext>
+                </a:extLst>
               </a:tr>
               <a:tr h="309880">
                 <a:tc>
                   <a:txBody>
-                    <a:bodyPr wrap="square"/>
+                    <a:bodyPr/>
                     <a:lstStyle/>
                     <a:p>
                       <a:pPr algn="l"/>
@@ -14315,7 +15118,7 @@
                 </a:tc>
                 <a:tc>
                   <a:txBody>
-                    <a:bodyPr wrap="square"/>
+                    <a:bodyPr/>
                     <a:lstStyle/>
                     <a:p>
                       <a:pPr algn="ctr"/>
@@ -14339,7 +15142,7 @@
                 </a:tc>
                 <a:tc>
                   <a:txBody>
-                    <a:bodyPr wrap="square"/>
+                    <a:bodyPr/>
                     <a:lstStyle/>
                     <a:p>
                       <a:pPr algn="ctr"/>
@@ -14363,7 +15166,7 @@
                 </a:tc>
                 <a:tc>
                   <a:txBody>
-                    <a:bodyPr wrap="square"/>
+                    <a:bodyPr/>
                     <a:lstStyle/>
                     <a:p>
                       <a:pPr algn="ctr"/>
@@ -14387,7 +15190,7 @@
                 </a:tc>
                 <a:tc>
                   <a:txBody>
-                    <a:bodyPr wrap="square"/>
+                    <a:bodyPr/>
                     <a:lstStyle/>
                     <a:p>
                       <a:pPr algn="ctr"/>
@@ -14411,7 +15214,7 @@
                 </a:tc>
                 <a:tc>
                   <a:txBody>
-                    <a:bodyPr wrap="square"/>
+                    <a:bodyPr/>
                     <a:lstStyle/>
                     <a:p>
                       <a:pPr algn="ctr"/>
@@ -14435,7 +15238,7 @@
                 </a:tc>
                 <a:tc>
                   <a:txBody>
-                    <a:bodyPr wrap="square"/>
+                    <a:bodyPr/>
                     <a:lstStyle/>
                     <a:p>
                       <a:pPr algn="ctr"/>
@@ -14457,11 +15260,16 @@
                     </a:solidFill>
                   </a:tcPr>
                 </a:tc>
+                <a:extLst>
+                  <a:ext uri="{0D108BD9-81ED-4DB2-BD59-A6C34878D82A}">
+                    <a16:rowId xmlns:a16="http://schemas.microsoft.com/office/drawing/2014/main" val="10005"/>
+                  </a:ext>
+                </a:extLst>
               </a:tr>
               <a:tr h="309880">
                 <a:tc>
                   <a:txBody>
-                    <a:bodyPr wrap="square"/>
+                    <a:bodyPr/>
                     <a:lstStyle/>
                     <a:p>
                       <a:pPr algn="l"/>
@@ -14485,7 +15293,7 @@
                 </a:tc>
                 <a:tc>
                   <a:txBody>
-                    <a:bodyPr wrap="square"/>
+                    <a:bodyPr/>
                     <a:lstStyle/>
                     <a:p>
                       <a:pPr algn="ctr"/>
@@ -14509,7 +15317,7 @@
                 </a:tc>
                 <a:tc>
                   <a:txBody>
-                    <a:bodyPr wrap="square"/>
+                    <a:bodyPr/>
                     <a:lstStyle/>
                     <a:p>
                       <a:pPr algn="ctr"/>
@@ -14533,7 +15341,7 @@
                 </a:tc>
                 <a:tc>
                   <a:txBody>
-                    <a:bodyPr wrap="square"/>
+                    <a:bodyPr/>
                     <a:lstStyle/>
                     <a:p>
                       <a:pPr algn="ctr"/>
@@ -14557,7 +15365,7 @@
                 </a:tc>
                 <a:tc>
                   <a:txBody>
-                    <a:bodyPr wrap="square"/>
+                    <a:bodyPr/>
                     <a:lstStyle/>
                     <a:p>
                       <a:pPr algn="ctr"/>
@@ -14581,7 +15389,7 @@
                 </a:tc>
                 <a:tc>
                   <a:txBody>
-                    <a:bodyPr wrap="square"/>
+                    <a:bodyPr/>
                     <a:lstStyle/>
                     <a:p>
                       <a:pPr algn="ctr"/>
@@ -14605,7 +15413,7 @@
                 </a:tc>
                 <a:tc>
                   <a:txBody>
-                    <a:bodyPr wrap="square"/>
+                    <a:bodyPr/>
                     <a:lstStyle/>
                     <a:p>
                       <a:pPr algn="ctr"/>
@@ -14627,11 +15435,16 @@
                     </a:solidFill>
                   </a:tcPr>
                 </a:tc>
+                <a:extLst>
+                  <a:ext uri="{0D108BD9-81ED-4DB2-BD59-A6C34878D82A}">
+                    <a16:rowId xmlns:a16="http://schemas.microsoft.com/office/drawing/2014/main" val="10006"/>
+                  </a:ext>
+                </a:extLst>
               </a:tr>
               <a:tr h="309880">
                 <a:tc>
                   <a:txBody>
-                    <a:bodyPr wrap="square"/>
+                    <a:bodyPr/>
                     <a:lstStyle/>
                     <a:p>
                       <a:pPr algn="l"/>
@@ -14655,7 +15468,7 @@
                 </a:tc>
                 <a:tc>
                   <a:txBody>
-                    <a:bodyPr wrap="square"/>
+                    <a:bodyPr/>
                     <a:lstStyle/>
                     <a:p>
                       <a:pPr algn="ctr"/>
@@ -14679,7 +15492,7 @@
                 </a:tc>
                 <a:tc>
                   <a:txBody>
-                    <a:bodyPr wrap="square"/>
+                    <a:bodyPr/>
                     <a:lstStyle/>
                     <a:p>
                       <a:pPr algn="ctr"/>
@@ -14703,7 +15516,7 @@
                 </a:tc>
                 <a:tc>
                   <a:txBody>
-                    <a:bodyPr wrap="square"/>
+                    <a:bodyPr/>
                     <a:lstStyle/>
                     <a:p>
                       <a:pPr algn="ctr"/>
@@ -14727,7 +15540,7 @@
                 </a:tc>
                 <a:tc>
                   <a:txBody>
-                    <a:bodyPr wrap="square"/>
+                    <a:bodyPr/>
                     <a:lstStyle/>
                     <a:p>
                       <a:pPr algn="ctr"/>
@@ -14751,7 +15564,7 @@
                 </a:tc>
                 <a:tc>
                   <a:txBody>
-                    <a:bodyPr wrap="square"/>
+                    <a:bodyPr/>
                     <a:lstStyle/>
                     <a:p>
                       <a:pPr algn="ctr"/>
@@ -14775,7 +15588,7 @@
                 </a:tc>
                 <a:tc>
                   <a:txBody>
-                    <a:bodyPr wrap="square"/>
+                    <a:bodyPr/>
                     <a:lstStyle/>
                     <a:p>
                       <a:pPr algn="ctr"/>
@@ -14797,11 +15610,16 @@
                     </a:solidFill>
                   </a:tcPr>
                 </a:tc>
+                <a:extLst>
+                  <a:ext uri="{0D108BD9-81ED-4DB2-BD59-A6C34878D82A}">
+                    <a16:rowId xmlns:a16="http://schemas.microsoft.com/office/drawing/2014/main" val="10007"/>
+                  </a:ext>
+                </a:extLst>
               </a:tr>
               <a:tr h="309880">
                 <a:tc>
                   <a:txBody>
-                    <a:bodyPr wrap="square"/>
+                    <a:bodyPr/>
                     <a:lstStyle/>
                     <a:p>
                       <a:pPr algn="l"/>
@@ -14825,7 +15643,7 @@
                 </a:tc>
                 <a:tc>
                   <a:txBody>
-                    <a:bodyPr wrap="square"/>
+                    <a:bodyPr/>
                     <a:lstStyle/>
                     <a:p>
                       <a:pPr algn="ctr"/>
@@ -14849,7 +15667,7 @@
                 </a:tc>
                 <a:tc>
                   <a:txBody>
-                    <a:bodyPr wrap="square"/>
+                    <a:bodyPr/>
                     <a:lstStyle/>
                     <a:p>
                       <a:pPr algn="ctr"/>
@@ -14873,7 +15691,7 @@
                 </a:tc>
                 <a:tc>
                   <a:txBody>
-                    <a:bodyPr wrap="square"/>
+                    <a:bodyPr/>
                     <a:lstStyle/>
                     <a:p>
                       <a:pPr algn="ctr"/>
@@ -14897,7 +15715,7 @@
                 </a:tc>
                 <a:tc>
                   <a:txBody>
-                    <a:bodyPr wrap="square"/>
+                    <a:bodyPr/>
                     <a:lstStyle/>
                     <a:p>
                       <a:pPr algn="ctr"/>
@@ -14921,7 +15739,7 @@
                 </a:tc>
                 <a:tc>
                   <a:txBody>
-                    <a:bodyPr wrap="square"/>
+                    <a:bodyPr/>
                     <a:lstStyle/>
                     <a:p>
                       <a:pPr algn="ctr"/>
@@ -14945,7 +15763,7 @@
                 </a:tc>
                 <a:tc>
                   <a:txBody>
-                    <a:bodyPr wrap="square"/>
+                    <a:bodyPr/>
                     <a:lstStyle/>
                     <a:p>
                       <a:pPr algn="ctr"/>
@@ -14967,6 +15785,11 @@
                     </a:solidFill>
                   </a:tcPr>
                 </a:tc>
+                <a:extLst>
+                  <a:ext uri="{0D108BD9-81ED-4DB2-BD59-A6C34878D82A}">
+                    <a16:rowId xmlns:a16="http://schemas.microsoft.com/office/drawing/2014/main" val="10008"/>
+                  </a:ext>
+                </a:extLst>
               </a:tr>
             </a:tbl>
           </a:graphicData>
@@ -15052,7 +15875,7 @@
 </file>
 
 <file path=ppt/slides/slide20.xml><?xml version="1.0" encoding="utf-8"?>
-<p:sld xmlns:a="http://schemas.openxmlformats.org/drawingml/2006/main" xmlns:p="http://schemas.openxmlformats.org/presentationml/2006/main" xmlns:r="http://schemas.openxmlformats.org/officeDocument/2006/relationships">
+<p:sld xmlns:a="http://schemas.openxmlformats.org/drawingml/2006/main" xmlns:r="http://schemas.openxmlformats.org/officeDocument/2006/relationships" xmlns:p="http://schemas.openxmlformats.org/presentationml/2006/main">
   <p:cSld>
     <p:spTree>
       <p:nvGrpSpPr>
@@ -15060,7 +15883,14 @@
         <p:cNvGrpSpPr/>
         <p:nvPr/>
       </p:nvGrpSpPr>
-      <p:grpSpPr/>
+      <p:grpSpPr>
+        <a:xfrm>
+          <a:off x="0" y="0"/>
+          <a:ext cx="0" cy="0"/>
+          <a:chOff x="0" y="0"/>
+          <a:chExt cx="0" cy="0"/>
+        </a:xfrm>
+      </p:grpSpPr>
       <p:sp>
         <p:nvSpPr>
           <p:cNvPr id="2" name="TextBox 1"/>
@@ -15136,6 +15966,7 @@
           <a:lstStyle/>
           <a:p>
             <a:pPr algn="ctr"/>
+            <a:endParaRPr/>
           </a:p>
         </p:txBody>
       </p:sp>
@@ -15158,14 +15989,32 @@
                 <a:tableStyleId>{5C22544A-7EE6-4342-B048-85BDC9FD1C3A}</a:tableStyleId>
               </a:tblPr>
               <a:tblGrid>
-                <a:gridCol w="1463040"/>
-                <a:gridCol w="3520440"/>
-                <a:gridCol w="3520440"/>
+                <a:gridCol w="1463040">
+                  <a:extLst>
+                    <a:ext uri="{9D8B030D-6E8A-4147-A177-3AD203B41FA5}">
+                      <a16:colId xmlns:a16="http://schemas.microsoft.com/office/drawing/2014/main" val="20000"/>
+                    </a:ext>
+                  </a:extLst>
+                </a:gridCol>
+                <a:gridCol w="3520440">
+                  <a:extLst>
+                    <a:ext uri="{9D8B030D-6E8A-4147-A177-3AD203B41FA5}">
+                      <a16:colId xmlns:a16="http://schemas.microsoft.com/office/drawing/2014/main" val="20001"/>
+                    </a:ext>
+                  </a:extLst>
+                </a:gridCol>
+                <a:gridCol w="3520440">
+                  <a:extLst>
+                    <a:ext uri="{9D8B030D-6E8A-4147-A177-3AD203B41FA5}">
+                      <a16:colId xmlns:a16="http://schemas.microsoft.com/office/drawing/2014/main" val="20002"/>
+                    </a:ext>
+                  </a:extLst>
+                </a:gridCol>
               </a:tblGrid>
               <a:tr h="339634">
                 <a:tc>
                   <a:txBody>
-                    <a:bodyPr wrap="square"/>
+                    <a:bodyPr/>
                     <a:lstStyle/>
                     <a:p>
                       <a:pPr algn="ctr"/>
@@ -15189,7 +16038,7 @@
                 </a:tc>
                 <a:tc>
                   <a:txBody>
-                    <a:bodyPr wrap="square"/>
+                    <a:bodyPr/>
                     <a:lstStyle/>
                     <a:p>
                       <a:pPr algn="ctr"/>
@@ -15213,7 +16062,7 @@
                 </a:tc>
                 <a:tc>
                   <a:txBody>
-                    <a:bodyPr wrap="square"/>
+                    <a:bodyPr/>
                     <a:lstStyle/>
                     <a:p>
                       <a:pPr algn="ctr"/>
@@ -15235,11 +16084,16 @@
                     </a:solidFill>
                   </a:tcPr>
                 </a:tc>
+                <a:extLst>
+                  <a:ext uri="{0D108BD9-81ED-4DB2-BD59-A6C34878D82A}">
+                    <a16:rowId xmlns:a16="http://schemas.microsoft.com/office/drawing/2014/main" val="10000"/>
+                  </a:ext>
+                </a:extLst>
               </a:tr>
               <a:tr h="339634">
                 <a:tc>
                   <a:txBody>
-                    <a:bodyPr wrap="square"/>
+                    <a:bodyPr/>
                     <a:lstStyle/>
                     <a:p>
                       <a:pPr algn="l"/>
@@ -15263,7 +16117,7 @@
                 </a:tc>
                 <a:tc>
                   <a:txBody>
-                    <a:bodyPr wrap="square"/>
+                    <a:bodyPr/>
                     <a:lstStyle/>
                     <a:p>
                       <a:pPr algn="ctr"/>
@@ -15287,7 +16141,7 @@
                 </a:tc>
                 <a:tc>
                   <a:txBody>
-                    <a:bodyPr wrap="square"/>
+                    <a:bodyPr/>
                     <a:lstStyle/>
                     <a:p>
                       <a:pPr algn="ctr"/>
@@ -15309,11 +16163,16 @@
                     </a:solidFill>
                   </a:tcPr>
                 </a:tc>
+                <a:extLst>
+                  <a:ext uri="{0D108BD9-81ED-4DB2-BD59-A6C34878D82A}">
+                    <a16:rowId xmlns:a16="http://schemas.microsoft.com/office/drawing/2014/main" val="10001"/>
+                  </a:ext>
+                </a:extLst>
               </a:tr>
               <a:tr h="339634">
                 <a:tc>
                   <a:txBody>
-                    <a:bodyPr wrap="square"/>
+                    <a:bodyPr/>
                     <a:lstStyle/>
                     <a:p>
                       <a:pPr algn="l"/>
@@ -15337,7 +16196,7 @@
                 </a:tc>
                 <a:tc>
                   <a:txBody>
-                    <a:bodyPr wrap="square"/>
+                    <a:bodyPr/>
                     <a:lstStyle/>
                     <a:p>
                       <a:pPr algn="ctr"/>
@@ -15361,7 +16220,7 @@
                 </a:tc>
                 <a:tc>
                   <a:txBody>
-                    <a:bodyPr wrap="square"/>
+                    <a:bodyPr/>
                     <a:lstStyle/>
                     <a:p>
                       <a:pPr algn="ctr"/>
@@ -15383,11 +16242,16 @@
                     </a:solidFill>
                   </a:tcPr>
                 </a:tc>
+                <a:extLst>
+                  <a:ext uri="{0D108BD9-81ED-4DB2-BD59-A6C34878D82A}">
+                    <a16:rowId xmlns:a16="http://schemas.microsoft.com/office/drawing/2014/main" val="10002"/>
+                  </a:ext>
+                </a:extLst>
               </a:tr>
               <a:tr h="339634">
                 <a:tc>
                   <a:txBody>
-                    <a:bodyPr wrap="square"/>
+                    <a:bodyPr/>
                     <a:lstStyle/>
                     <a:p>
                       <a:pPr algn="l"/>
@@ -15411,7 +16275,7 @@
                 </a:tc>
                 <a:tc>
                   <a:txBody>
-                    <a:bodyPr wrap="square"/>
+                    <a:bodyPr/>
                     <a:lstStyle/>
                     <a:p>
                       <a:pPr algn="ctr"/>
@@ -15435,7 +16299,7 @@
                 </a:tc>
                 <a:tc>
                   <a:txBody>
-                    <a:bodyPr wrap="square"/>
+                    <a:bodyPr/>
                     <a:lstStyle/>
                     <a:p>
                       <a:pPr algn="ctr"/>
@@ -15457,11 +16321,16 @@
                     </a:solidFill>
                   </a:tcPr>
                 </a:tc>
+                <a:extLst>
+                  <a:ext uri="{0D108BD9-81ED-4DB2-BD59-A6C34878D82A}">
+                    <a16:rowId xmlns:a16="http://schemas.microsoft.com/office/drawing/2014/main" val="10003"/>
+                  </a:ext>
+                </a:extLst>
               </a:tr>
               <a:tr h="339634">
                 <a:tc>
                   <a:txBody>
-                    <a:bodyPr wrap="square"/>
+                    <a:bodyPr/>
                     <a:lstStyle/>
                     <a:p>
                       <a:pPr algn="l"/>
@@ -15485,7 +16354,7 @@
                 </a:tc>
                 <a:tc>
                   <a:txBody>
-                    <a:bodyPr wrap="square"/>
+                    <a:bodyPr/>
                     <a:lstStyle/>
                     <a:p>
                       <a:pPr algn="ctr"/>
@@ -15509,7 +16378,7 @@
                 </a:tc>
                 <a:tc>
                   <a:txBody>
-                    <a:bodyPr wrap="square"/>
+                    <a:bodyPr/>
                     <a:lstStyle/>
                     <a:p>
                       <a:pPr algn="ctr"/>
@@ -15531,11 +16400,16 @@
                     </a:solidFill>
                   </a:tcPr>
                 </a:tc>
+                <a:extLst>
+                  <a:ext uri="{0D108BD9-81ED-4DB2-BD59-A6C34878D82A}">
+                    <a16:rowId xmlns:a16="http://schemas.microsoft.com/office/drawing/2014/main" val="10004"/>
+                  </a:ext>
+                </a:extLst>
               </a:tr>
               <a:tr h="339634">
                 <a:tc>
                   <a:txBody>
-                    <a:bodyPr wrap="square"/>
+                    <a:bodyPr/>
                     <a:lstStyle/>
                     <a:p>
                       <a:pPr algn="l"/>
@@ -15559,7 +16433,7 @@
                 </a:tc>
                 <a:tc>
                   <a:txBody>
-                    <a:bodyPr wrap="square"/>
+                    <a:bodyPr/>
                     <a:lstStyle/>
                     <a:p>
                       <a:pPr algn="ctr"/>
@@ -15583,7 +16457,7 @@
                 </a:tc>
                 <a:tc>
                   <a:txBody>
-                    <a:bodyPr wrap="square"/>
+                    <a:bodyPr/>
                     <a:lstStyle/>
                     <a:p>
                       <a:pPr algn="ctr"/>
@@ -15605,11 +16479,16 @@
                     </a:solidFill>
                   </a:tcPr>
                 </a:tc>
+                <a:extLst>
+                  <a:ext uri="{0D108BD9-81ED-4DB2-BD59-A6C34878D82A}">
+                    <a16:rowId xmlns:a16="http://schemas.microsoft.com/office/drawing/2014/main" val="10005"/>
+                  </a:ext>
+                </a:extLst>
               </a:tr>
               <a:tr h="339636">
                 <a:tc>
                   <a:txBody>
-                    <a:bodyPr wrap="square"/>
+                    <a:bodyPr/>
                     <a:lstStyle/>
                     <a:p>
                       <a:pPr algn="l"/>
@@ -15633,7 +16512,7 @@
                 </a:tc>
                 <a:tc>
                   <a:txBody>
-                    <a:bodyPr wrap="square"/>
+                    <a:bodyPr/>
                     <a:lstStyle/>
                     <a:p>
                       <a:pPr algn="ctr"/>
@@ -15657,7 +16536,7 @@
                 </a:tc>
                 <a:tc>
                   <a:txBody>
-                    <a:bodyPr wrap="square"/>
+                    <a:bodyPr/>
                     <a:lstStyle/>
                     <a:p>
                       <a:pPr algn="ctr"/>
@@ -15679,6 +16558,11 @@
                     </a:solidFill>
                   </a:tcPr>
                 </a:tc>
+                <a:extLst>
+                  <a:ext uri="{0D108BD9-81ED-4DB2-BD59-A6C34878D82A}">
+                    <a16:rowId xmlns:a16="http://schemas.microsoft.com/office/drawing/2014/main" val="10006"/>
+                  </a:ext>
+                </a:extLst>
               </a:tr>
             </a:tbl>
           </a:graphicData>
@@ -15820,7 +16704,7 @@
 </file>
 
 <file path=ppt/slides/slide3.xml><?xml version="1.0" encoding="utf-8"?>
-<p:sld xmlns:a="http://schemas.openxmlformats.org/drawingml/2006/main" xmlns:p="http://schemas.openxmlformats.org/presentationml/2006/main" xmlns:r="http://schemas.openxmlformats.org/officeDocument/2006/relationships">
+<p:sld xmlns:a="http://schemas.openxmlformats.org/drawingml/2006/main" xmlns:r="http://schemas.openxmlformats.org/officeDocument/2006/relationships" xmlns:p="http://schemas.openxmlformats.org/presentationml/2006/main">
   <p:cSld>
     <p:spTree>
       <p:nvGrpSpPr>
@@ -15828,7 +16712,14 @@
         <p:cNvGrpSpPr/>
         <p:nvPr/>
       </p:nvGrpSpPr>
-      <p:grpSpPr/>
+      <p:grpSpPr>
+        <a:xfrm>
+          <a:off x="0" y="0"/>
+          <a:ext cx="0" cy="0"/>
+          <a:chOff x="0" y="0"/>
+          <a:chExt cx="0" cy="0"/>
+        </a:xfrm>
+      </p:grpSpPr>
       <p:sp>
         <p:nvSpPr>
           <p:cNvPr id="2" name="TextBox 1"/>
@@ -15904,6 +16795,7 @@
           <a:lstStyle/>
           <a:p>
             <a:pPr algn="ctr"/>
+            <a:endParaRPr/>
           </a:p>
         </p:txBody>
       </p:sp>
@@ -15926,16 +16818,46 @@
                 <a:tableStyleId>{5C22544A-7EE6-4342-B048-85BDC9FD1C3A}</a:tableStyleId>
               </a:tblPr>
               <a:tblGrid>
-                <a:gridCol w="1280160"/>
-                <a:gridCol w="822960"/>
-                <a:gridCol w="1645920"/>
-                <a:gridCol w="1371600"/>
-                <a:gridCol w="3383280"/>
+                <a:gridCol w="1280160">
+                  <a:extLst>
+                    <a:ext uri="{9D8B030D-6E8A-4147-A177-3AD203B41FA5}">
+                      <a16:colId xmlns:a16="http://schemas.microsoft.com/office/drawing/2014/main" val="20000"/>
+                    </a:ext>
+                  </a:extLst>
+                </a:gridCol>
+                <a:gridCol w="822960">
+                  <a:extLst>
+                    <a:ext uri="{9D8B030D-6E8A-4147-A177-3AD203B41FA5}">
+                      <a16:colId xmlns:a16="http://schemas.microsoft.com/office/drawing/2014/main" val="20001"/>
+                    </a:ext>
+                  </a:extLst>
+                </a:gridCol>
+                <a:gridCol w="1645920">
+                  <a:extLst>
+                    <a:ext uri="{9D8B030D-6E8A-4147-A177-3AD203B41FA5}">
+                      <a16:colId xmlns:a16="http://schemas.microsoft.com/office/drawing/2014/main" val="20002"/>
+                    </a:ext>
+                  </a:extLst>
+                </a:gridCol>
+                <a:gridCol w="1371600">
+                  <a:extLst>
+                    <a:ext uri="{9D8B030D-6E8A-4147-A177-3AD203B41FA5}">
+                      <a16:colId xmlns:a16="http://schemas.microsoft.com/office/drawing/2014/main" val="20003"/>
+                    </a:ext>
+                  </a:extLst>
+                </a:gridCol>
+                <a:gridCol w="3383280">
+                  <a:extLst>
+                    <a:ext uri="{9D8B030D-6E8A-4147-A177-3AD203B41FA5}">
+                      <a16:colId xmlns:a16="http://schemas.microsoft.com/office/drawing/2014/main" val="20004"/>
+                    </a:ext>
+                  </a:extLst>
+                </a:gridCol>
               </a:tblGrid>
               <a:tr h="310896">
                 <a:tc>
                   <a:txBody>
-                    <a:bodyPr wrap="square"/>
+                    <a:bodyPr/>
                     <a:lstStyle/>
                     <a:p>
                       <a:pPr algn="ctr"/>
@@ -15959,7 +16881,7 @@
                 </a:tc>
                 <a:tc>
                   <a:txBody>
-                    <a:bodyPr wrap="square"/>
+                    <a:bodyPr/>
                     <a:lstStyle/>
                     <a:p>
                       <a:pPr algn="ctr"/>
@@ -15983,7 +16905,7 @@
                 </a:tc>
                 <a:tc>
                   <a:txBody>
-                    <a:bodyPr wrap="square"/>
+                    <a:bodyPr/>
                     <a:lstStyle/>
                     <a:p>
                       <a:pPr algn="ctr"/>
@@ -16007,7 +16929,7 @@
                 </a:tc>
                 <a:tc>
                   <a:txBody>
-                    <a:bodyPr wrap="square"/>
+                    <a:bodyPr/>
                     <a:lstStyle/>
                     <a:p>
                       <a:pPr algn="ctr"/>
@@ -16031,7 +16953,7 @@
                 </a:tc>
                 <a:tc>
                   <a:txBody>
-                    <a:bodyPr wrap="square"/>
+                    <a:bodyPr/>
                     <a:lstStyle/>
                     <a:p>
                       <a:pPr algn="ctr"/>
@@ -16053,11 +16975,16 @@
                     </a:solidFill>
                   </a:tcPr>
                 </a:tc>
+                <a:extLst>
+                  <a:ext uri="{0D108BD9-81ED-4DB2-BD59-A6C34878D82A}">
+                    <a16:rowId xmlns:a16="http://schemas.microsoft.com/office/drawing/2014/main" val="10000"/>
+                  </a:ext>
+                </a:extLst>
               </a:tr>
               <a:tr h="310896">
                 <a:tc>
                   <a:txBody>
-                    <a:bodyPr wrap="square"/>
+                    <a:bodyPr/>
                     <a:lstStyle/>
                     <a:p>
                       <a:pPr algn="l"/>
@@ -16081,7 +17008,7 @@
                 </a:tc>
                 <a:tc>
                   <a:txBody>
-                    <a:bodyPr wrap="square"/>
+                    <a:bodyPr/>
                     <a:lstStyle/>
                     <a:p>
                       <a:pPr algn="ctr"/>
@@ -16105,7 +17032,7 @@
                 </a:tc>
                 <a:tc>
                   <a:txBody>
-                    <a:bodyPr wrap="square"/>
+                    <a:bodyPr/>
                     <a:lstStyle/>
                     <a:p>
                       <a:pPr algn="ctr"/>
@@ -16129,7 +17056,7 @@
                 </a:tc>
                 <a:tc>
                   <a:txBody>
-                    <a:bodyPr wrap="square"/>
+                    <a:bodyPr/>
                     <a:lstStyle/>
                     <a:p>
                       <a:pPr algn="ctr"/>
@@ -16153,7 +17080,7 @@
                 </a:tc>
                 <a:tc>
                   <a:txBody>
-                    <a:bodyPr wrap="square"/>
+                    <a:bodyPr/>
                     <a:lstStyle/>
                     <a:p>
                       <a:pPr algn="ctr"/>
@@ -16175,11 +17102,16 @@
                     </a:solidFill>
                   </a:tcPr>
                 </a:tc>
+                <a:extLst>
+                  <a:ext uri="{0D108BD9-81ED-4DB2-BD59-A6C34878D82A}">
+                    <a16:rowId xmlns:a16="http://schemas.microsoft.com/office/drawing/2014/main" val="10001"/>
+                  </a:ext>
+                </a:extLst>
               </a:tr>
               <a:tr h="310896">
                 <a:tc>
                   <a:txBody>
-                    <a:bodyPr wrap="square"/>
+                    <a:bodyPr/>
                     <a:lstStyle/>
                     <a:p>
                       <a:pPr algn="l"/>
@@ -16203,7 +17135,7 @@
                 </a:tc>
                 <a:tc>
                   <a:txBody>
-                    <a:bodyPr wrap="square"/>
+                    <a:bodyPr/>
                     <a:lstStyle/>
                     <a:p>
                       <a:pPr algn="ctr"/>
@@ -16227,7 +17159,7 @@
                 </a:tc>
                 <a:tc>
                   <a:txBody>
-                    <a:bodyPr wrap="square"/>
+                    <a:bodyPr/>
                     <a:lstStyle/>
                     <a:p>
                       <a:pPr algn="ctr"/>
@@ -16251,7 +17183,7 @@
                 </a:tc>
                 <a:tc>
                   <a:txBody>
-                    <a:bodyPr wrap="square"/>
+                    <a:bodyPr/>
                     <a:lstStyle/>
                     <a:p>
                       <a:pPr algn="ctr"/>
@@ -16275,7 +17207,7 @@
                 </a:tc>
                 <a:tc>
                   <a:txBody>
-                    <a:bodyPr wrap="square"/>
+                    <a:bodyPr/>
                     <a:lstStyle/>
                     <a:p>
                       <a:pPr algn="ctr"/>
@@ -16297,11 +17229,16 @@
                     </a:solidFill>
                   </a:tcPr>
                 </a:tc>
+                <a:extLst>
+                  <a:ext uri="{0D108BD9-81ED-4DB2-BD59-A6C34878D82A}">
+                    <a16:rowId xmlns:a16="http://schemas.microsoft.com/office/drawing/2014/main" val="10002"/>
+                  </a:ext>
+                </a:extLst>
               </a:tr>
               <a:tr h="310896">
                 <a:tc>
                   <a:txBody>
-                    <a:bodyPr wrap="square"/>
+                    <a:bodyPr/>
                     <a:lstStyle/>
                     <a:p>
                       <a:pPr algn="l"/>
@@ -16325,7 +17262,7 @@
                 </a:tc>
                 <a:tc>
                   <a:txBody>
-                    <a:bodyPr wrap="square"/>
+                    <a:bodyPr/>
                     <a:lstStyle/>
                     <a:p>
                       <a:pPr algn="ctr"/>
@@ -16349,7 +17286,7 @@
                 </a:tc>
                 <a:tc>
                   <a:txBody>
-                    <a:bodyPr wrap="square"/>
+                    <a:bodyPr/>
                     <a:lstStyle/>
                     <a:p>
                       <a:pPr algn="ctr"/>
@@ -16373,7 +17310,7 @@
                 </a:tc>
                 <a:tc>
                   <a:txBody>
-                    <a:bodyPr wrap="square"/>
+                    <a:bodyPr/>
                     <a:lstStyle/>
                     <a:p>
                       <a:pPr algn="ctr"/>
@@ -16397,7 +17334,7 @@
                 </a:tc>
                 <a:tc>
                   <a:txBody>
-                    <a:bodyPr wrap="square"/>
+                    <a:bodyPr/>
                     <a:lstStyle/>
                     <a:p>
                       <a:pPr algn="ctr"/>
@@ -16419,11 +17356,16 @@
                     </a:solidFill>
                   </a:tcPr>
                 </a:tc>
+                <a:extLst>
+                  <a:ext uri="{0D108BD9-81ED-4DB2-BD59-A6C34878D82A}">
+                    <a16:rowId xmlns:a16="http://schemas.microsoft.com/office/drawing/2014/main" val="10003"/>
+                  </a:ext>
+                </a:extLst>
               </a:tr>
               <a:tr h="310896">
                 <a:tc>
                   <a:txBody>
-                    <a:bodyPr wrap="square"/>
+                    <a:bodyPr/>
                     <a:lstStyle/>
                     <a:p>
                       <a:pPr algn="l"/>
@@ -16447,7 +17389,7 @@
                 </a:tc>
                 <a:tc>
                   <a:txBody>
-                    <a:bodyPr wrap="square"/>
+                    <a:bodyPr/>
                     <a:lstStyle/>
                     <a:p>
                       <a:pPr algn="ctr"/>
@@ -16471,7 +17413,7 @@
                 </a:tc>
                 <a:tc>
                   <a:txBody>
-                    <a:bodyPr wrap="square"/>
+                    <a:bodyPr/>
                     <a:lstStyle/>
                     <a:p>
                       <a:pPr algn="ctr"/>
@@ -16495,7 +17437,7 @@
                 </a:tc>
                 <a:tc>
                   <a:txBody>
-                    <a:bodyPr wrap="square"/>
+                    <a:bodyPr/>
                     <a:lstStyle/>
                     <a:p>
                       <a:pPr algn="ctr"/>
@@ -16519,7 +17461,7 @@
                 </a:tc>
                 <a:tc>
                   <a:txBody>
-                    <a:bodyPr wrap="square"/>
+                    <a:bodyPr/>
                     <a:lstStyle/>
                     <a:p>
                       <a:pPr algn="ctr"/>
@@ -16541,6 +17483,11 @@
                     </a:solidFill>
                   </a:tcPr>
                 </a:tc>
+                <a:extLst>
+                  <a:ext uri="{0D108BD9-81ED-4DB2-BD59-A6C34878D82A}">
+                    <a16:rowId xmlns:a16="http://schemas.microsoft.com/office/drawing/2014/main" val="10004"/>
+                  </a:ext>
+                </a:extLst>
               </a:tr>
             </a:tbl>
           </a:graphicData>
@@ -16565,18 +17512,60 @@
                 <a:tableStyleId>{5C22544A-7EE6-4342-B048-85BDC9FD1C3A}</a:tableStyleId>
               </a:tblPr>
               <a:tblGrid>
-                <a:gridCol w="1371600"/>
-                <a:gridCol w="1234440"/>
-                <a:gridCol w="640080"/>
-                <a:gridCol w="1417320"/>
-                <a:gridCol w="640080"/>
-                <a:gridCol w="1051560"/>
-                <a:gridCol w="1051560"/>
+                <a:gridCol w="1371600">
+                  <a:extLst>
+                    <a:ext uri="{9D8B030D-6E8A-4147-A177-3AD203B41FA5}">
+                      <a16:colId xmlns:a16="http://schemas.microsoft.com/office/drawing/2014/main" val="20000"/>
+                    </a:ext>
+                  </a:extLst>
+                </a:gridCol>
+                <a:gridCol w="1234440">
+                  <a:extLst>
+                    <a:ext uri="{9D8B030D-6E8A-4147-A177-3AD203B41FA5}">
+                      <a16:colId xmlns:a16="http://schemas.microsoft.com/office/drawing/2014/main" val="20001"/>
+                    </a:ext>
+                  </a:extLst>
+                </a:gridCol>
+                <a:gridCol w="640080">
+                  <a:extLst>
+                    <a:ext uri="{9D8B030D-6E8A-4147-A177-3AD203B41FA5}">
+                      <a16:colId xmlns:a16="http://schemas.microsoft.com/office/drawing/2014/main" val="20002"/>
+                    </a:ext>
+                  </a:extLst>
+                </a:gridCol>
+                <a:gridCol w="1417320">
+                  <a:extLst>
+                    <a:ext uri="{9D8B030D-6E8A-4147-A177-3AD203B41FA5}">
+                      <a16:colId xmlns:a16="http://schemas.microsoft.com/office/drawing/2014/main" val="20003"/>
+                    </a:ext>
+                  </a:extLst>
+                </a:gridCol>
+                <a:gridCol w="640080">
+                  <a:extLst>
+                    <a:ext uri="{9D8B030D-6E8A-4147-A177-3AD203B41FA5}">
+                      <a16:colId xmlns:a16="http://schemas.microsoft.com/office/drawing/2014/main" val="20004"/>
+                    </a:ext>
+                  </a:extLst>
+                </a:gridCol>
+                <a:gridCol w="1051560">
+                  <a:extLst>
+                    <a:ext uri="{9D8B030D-6E8A-4147-A177-3AD203B41FA5}">
+                      <a16:colId xmlns:a16="http://schemas.microsoft.com/office/drawing/2014/main" val="20005"/>
+                    </a:ext>
+                  </a:extLst>
+                </a:gridCol>
+                <a:gridCol w="1051560">
+                  <a:extLst>
+                    <a:ext uri="{9D8B030D-6E8A-4147-A177-3AD203B41FA5}">
+                      <a16:colId xmlns:a16="http://schemas.microsoft.com/office/drawing/2014/main" val="20006"/>
+                    </a:ext>
+                  </a:extLst>
+                </a:gridCol>
               </a:tblGrid>
               <a:tr h="280851">
                 <a:tc>
                   <a:txBody>
-                    <a:bodyPr wrap="square"/>
+                    <a:bodyPr/>
                     <a:lstStyle/>
                     <a:p>
                       <a:pPr algn="ctr"/>
@@ -16600,7 +17589,7 @@
                 </a:tc>
                 <a:tc>
                   <a:txBody>
-                    <a:bodyPr wrap="square"/>
+                    <a:bodyPr/>
                     <a:lstStyle/>
                     <a:p>
                       <a:pPr algn="ctr"/>
@@ -16624,7 +17613,7 @@
                 </a:tc>
                 <a:tc>
                   <a:txBody>
-                    <a:bodyPr wrap="square"/>
+                    <a:bodyPr/>
                     <a:lstStyle/>
                     <a:p>
                       <a:pPr algn="ctr"/>
@@ -16648,7 +17637,7 @@
                 </a:tc>
                 <a:tc>
                   <a:txBody>
-                    <a:bodyPr wrap="square"/>
+                    <a:bodyPr/>
                     <a:lstStyle/>
                     <a:p>
                       <a:pPr algn="ctr"/>
@@ -16672,7 +17661,7 @@
                 </a:tc>
                 <a:tc>
                   <a:txBody>
-                    <a:bodyPr wrap="square"/>
+                    <a:bodyPr/>
                     <a:lstStyle/>
                     <a:p>
                       <a:pPr algn="ctr"/>
@@ -16696,7 +17685,7 @@
                 </a:tc>
                 <a:tc>
                   <a:txBody>
-                    <a:bodyPr wrap="square"/>
+                    <a:bodyPr/>
                     <a:lstStyle/>
                     <a:p>
                       <a:pPr algn="ctr"/>
@@ -16720,7 +17709,7 @@
                 </a:tc>
                 <a:tc>
                   <a:txBody>
-                    <a:bodyPr wrap="square"/>
+                    <a:bodyPr/>
                     <a:lstStyle/>
                     <a:p>
                       <a:pPr algn="ctr"/>
@@ -16742,11 +17731,16 @@
                     </a:solidFill>
                   </a:tcPr>
                 </a:tc>
+                <a:extLst>
+                  <a:ext uri="{0D108BD9-81ED-4DB2-BD59-A6C34878D82A}">
+                    <a16:rowId xmlns:a16="http://schemas.microsoft.com/office/drawing/2014/main" val="10000"/>
+                  </a:ext>
+                </a:extLst>
               </a:tr>
               <a:tr h="280851">
                 <a:tc>
                   <a:txBody>
-                    <a:bodyPr wrap="square"/>
+                    <a:bodyPr/>
                     <a:lstStyle/>
                     <a:p>
                       <a:pPr algn="l"/>
@@ -16770,7 +17764,7 @@
                 </a:tc>
                 <a:tc>
                   <a:txBody>
-                    <a:bodyPr wrap="square"/>
+                    <a:bodyPr/>
                     <a:lstStyle/>
                     <a:p>
                       <a:pPr algn="ctr"/>
@@ -16794,7 +17788,7 @@
                 </a:tc>
                 <a:tc>
                   <a:txBody>
-                    <a:bodyPr wrap="square"/>
+                    <a:bodyPr/>
                     <a:lstStyle/>
                     <a:p>
                       <a:pPr algn="ctr"/>
@@ -16818,7 +17812,7 @@
                 </a:tc>
                 <a:tc>
                   <a:txBody>
-                    <a:bodyPr wrap="square"/>
+                    <a:bodyPr/>
                     <a:lstStyle/>
                     <a:p>
                       <a:pPr algn="ctr"/>
@@ -16842,7 +17836,7 @@
                 </a:tc>
                 <a:tc>
                   <a:txBody>
-                    <a:bodyPr wrap="square"/>
+                    <a:bodyPr/>
                     <a:lstStyle/>
                     <a:p>
                       <a:pPr algn="ctr"/>
@@ -16866,7 +17860,7 @@
                 </a:tc>
                 <a:tc>
                   <a:txBody>
-                    <a:bodyPr wrap="square"/>
+                    <a:bodyPr/>
                     <a:lstStyle/>
                     <a:p>
                       <a:pPr algn="ctr"/>
@@ -16890,7 +17884,7 @@
                 </a:tc>
                 <a:tc>
                   <a:txBody>
-                    <a:bodyPr wrap="square"/>
+                    <a:bodyPr/>
                     <a:lstStyle/>
                     <a:p>
                       <a:pPr algn="ctr"/>
@@ -16912,11 +17906,16 @@
                     </a:solidFill>
                   </a:tcPr>
                 </a:tc>
+                <a:extLst>
+                  <a:ext uri="{0D108BD9-81ED-4DB2-BD59-A6C34878D82A}">
+                    <a16:rowId xmlns:a16="http://schemas.microsoft.com/office/drawing/2014/main" val="10001"/>
+                  </a:ext>
+                </a:extLst>
               </a:tr>
               <a:tr h="280851">
                 <a:tc>
                   <a:txBody>
-                    <a:bodyPr wrap="square"/>
+                    <a:bodyPr/>
                     <a:lstStyle/>
                     <a:p>
                       <a:pPr algn="l"/>
@@ -16940,7 +17939,7 @@
                 </a:tc>
                 <a:tc>
                   <a:txBody>
-                    <a:bodyPr wrap="square"/>
+                    <a:bodyPr/>
                     <a:lstStyle/>
                     <a:p>
                       <a:pPr algn="ctr"/>
@@ -16964,7 +17963,7 @@
                 </a:tc>
                 <a:tc>
                   <a:txBody>
-                    <a:bodyPr wrap="square"/>
+                    <a:bodyPr/>
                     <a:lstStyle/>
                     <a:p>
                       <a:pPr algn="ctr"/>
@@ -16988,7 +17987,7 @@
                 </a:tc>
                 <a:tc>
                   <a:txBody>
-                    <a:bodyPr wrap="square"/>
+                    <a:bodyPr/>
                     <a:lstStyle/>
                     <a:p>
                       <a:pPr algn="ctr"/>
@@ -17012,7 +18011,7 @@
                 </a:tc>
                 <a:tc>
                   <a:txBody>
-                    <a:bodyPr wrap="square"/>
+                    <a:bodyPr/>
                     <a:lstStyle/>
                     <a:p>
                       <a:pPr algn="ctr"/>
@@ -17036,7 +18035,7 @@
                 </a:tc>
                 <a:tc>
                   <a:txBody>
-                    <a:bodyPr wrap="square"/>
+                    <a:bodyPr/>
                     <a:lstStyle/>
                     <a:p>
                       <a:pPr algn="ctr"/>
@@ -17060,7 +18059,7 @@
                 </a:tc>
                 <a:tc>
                   <a:txBody>
-                    <a:bodyPr wrap="square"/>
+                    <a:bodyPr/>
                     <a:lstStyle/>
                     <a:p>
                       <a:pPr algn="ctr"/>
@@ -17082,11 +18081,16 @@
                     </a:solidFill>
                   </a:tcPr>
                 </a:tc>
+                <a:extLst>
+                  <a:ext uri="{0D108BD9-81ED-4DB2-BD59-A6C34878D82A}">
+                    <a16:rowId xmlns:a16="http://schemas.microsoft.com/office/drawing/2014/main" val="10002"/>
+                  </a:ext>
+                </a:extLst>
               </a:tr>
               <a:tr h="280851">
                 <a:tc>
                   <a:txBody>
-                    <a:bodyPr wrap="square"/>
+                    <a:bodyPr/>
                     <a:lstStyle/>
                     <a:p>
                       <a:pPr algn="l"/>
@@ -17110,7 +18114,7 @@
                 </a:tc>
                 <a:tc>
                   <a:txBody>
-                    <a:bodyPr wrap="square"/>
+                    <a:bodyPr/>
                     <a:lstStyle/>
                     <a:p>
                       <a:pPr algn="ctr"/>
@@ -17134,7 +18138,7 @@
                 </a:tc>
                 <a:tc>
                   <a:txBody>
-                    <a:bodyPr wrap="square"/>
+                    <a:bodyPr/>
                     <a:lstStyle/>
                     <a:p>
                       <a:pPr algn="ctr"/>
@@ -17158,7 +18162,7 @@
                 </a:tc>
                 <a:tc>
                   <a:txBody>
-                    <a:bodyPr wrap="square"/>
+                    <a:bodyPr/>
                     <a:lstStyle/>
                     <a:p>
                       <a:pPr algn="ctr"/>
@@ -17182,7 +18186,7 @@
                 </a:tc>
                 <a:tc>
                   <a:txBody>
-                    <a:bodyPr wrap="square"/>
+                    <a:bodyPr/>
                     <a:lstStyle/>
                     <a:p>
                       <a:pPr algn="ctr"/>
@@ -17206,7 +18210,7 @@
                 </a:tc>
                 <a:tc>
                   <a:txBody>
-                    <a:bodyPr wrap="square"/>
+                    <a:bodyPr/>
                     <a:lstStyle/>
                     <a:p>
                       <a:pPr algn="ctr"/>
@@ -17230,7 +18234,7 @@
                 </a:tc>
                 <a:tc>
                   <a:txBody>
-                    <a:bodyPr wrap="square"/>
+                    <a:bodyPr/>
                     <a:lstStyle/>
                     <a:p>
                       <a:pPr algn="ctr"/>
@@ -17252,11 +18256,16 @@
                     </a:solidFill>
                   </a:tcPr>
                 </a:tc>
+                <a:extLst>
+                  <a:ext uri="{0D108BD9-81ED-4DB2-BD59-A6C34878D82A}">
+                    <a16:rowId xmlns:a16="http://schemas.microsoft.com/office/drawing/2014/main" val="10003"/>
+                  </a:ext>
+                </a:extLst>
               </a:tr>
               <a:tr h="280851">
                 <a:tc>
                   <a:txBody>
-                    <a:bodyPr wrap="square"/>
+                    <a:bodyPr/>
                     <a:lstStyle/>
                     <a:p>
                       <a:pPr algn="l"/>
@@ -17280,7 +18289,7 @@
                 </a:tc>
                 <a:tc>
                   <a:txBody>
-                    <a:bodyPr wrap="square"/>
+                    <a:bodyPr/>
                     <a:lstStyle/>
                     <a:p>
                       <a:pPr algn="ctr"/>
@@ -17304,7 +18313,7 @@
                 </a:tc>
                 <a:tc>
                   <a:txBody>
-                    <a:bodyPr wrap="square"/>
+                    <a:bodyPr/>
                     <a:lstStyle/>
                     <a:p>
                       <a:pPr algn="ctr"/>
@@ -17328,7 +18337,7 @@
                 </a:tc>
                 <a:tc>
                   <a:txBody>
-                    <a:bodyPr wrap="square"/>
+                    <a:bodyPr/>
                     <a:lstStyle/>
                     <a:p>
                       <a:pPr algn="ctr"/>
@@ -17352,7 +18361,7 @@
                 </a:tc>
                 <a:tc>
                   <a:txBody>
-                    <a:bodyPr wrap="square"/>
+                    <a:bodyPr/>
                     <a:lstStyle/>
                     <a:p>
                       <a:pPr algn="ctr"/>
@@ -17376,7 +18385,7 @@
                 </a:tc>
                 <a:tc>
                   <a:txBody>
-                    <a:bodyPr wrap="square"/>
+                    <a:bodyPr/>
                     <a:lstStyle/>
                     <a:p>
                       <a:pPr algn="ctr"/>
@@ -17400,7 +18409,7 @@
                 </a:tc>
                 <a:tc>
                   <a:txBody>
-                    <a:bodyPr wrap="square"/>
+                    <a:bodyPr/>
                     <a:lstStyle/>
                     <a:p>
                       <a:pPr algn="ctr"/>
@@ -17422,11 +18431,16 @@
                     </a:solidFill>
                   </a:tcPr>
                 </a:tc>
+                <a:extLst>
+                  <a:ext uri="{0D108BD9-81ED-4DB2-BD59-A6C34878D82A}">
+                    <a16:rowId xmlns:a16="http://schemas.microsoft.com/office/drawing/2014/main" val="10004"/>
+                  </a:ext>
+                </a:extLst>
               </a:tr>
               <a:tr h="280851">
                 <a:tc>
                   <a:txBody>
-                    <a:bodyPr wrap="square"/>
+                    <a:bodyPr/>
                     <a:lstStyle/>
                     <a:p>
                       <a:pPr algn="l"/>
@@ -17450,7 +18464,7 @@
                 </a:tc>
                 <a:tc>
                   <a:txBody>
-                    <a:bodyPr wrap="square"/>
+                    <a:bodyPr/>
                     <a:lstStyle/>
                     <a:p>
                       <a:pPr algn="ctr"/>
@@ -17474,7 +18488,7 @@
                 </a:tc>
                 <a:tc>
                   <a:txBody>
-                    <a:bodyPr wrap="square"/>
+                    <a:bodyPr/>
                     <a:lstStyle/>
                     <a:p>
                       <a:pPr algn="ctr"/>
@@ -17498,7 +18512,7 @@
                 </a:tc>
                 <a:tc>
                   <a:txBody>
-                    <a:bodyPr wrap="square"/>
+                    <a:bodyPr/>
                     <a:lstStyle/>
                     <a:p>
                       <a:pPr algn="ctr"/>
@@ -17522,7 +18536,7 @@
                 </a:tc>
                 <a:tc>
                   <a:txBody>
-                    <a:bodyPr wrap="square"/>
+                    <a:bodyPr/>
                     <a:lstStyle/>
                     <a:p>
                       <a:pPr algn="ctr"/>
@@ -17546,7 +18560,7 @@
                 </a:tc>
                 <a:tc>
                   <a:txBody>
-                    <a:bodyPr wrap="square"/>
+                    <a:bodyPr/>
                     <a:lstStyle/>
                     <a:p>
                       <a:pPr algn="ctr"/>
@@ -17570,7 +18584,7 @@
                 </a:tc>
                 <a:tc>
                   <a:txBody>
-                    <a:bodyPr wrap="square"/>
+                    <a:bodyPr/>
                     <a:lstStyle/>
                     <a:p>
                       <a:pPr algn="ctr"/>
@@ -17592,11 +18606,16 @@
                     </a:solidFill>
                   </a:tcPr>
                 </a:tc>
+                <a:extLst>
+                  <a:ext uri="{0D108BD9-81ED-4DB2-BD59-A6C34878D82A}">
+                    <a16:rowId xmlns:a16="http://schemas.microsoft.com/office/drawing/2014/main" val="10005"/>
+                  </a:ext>
+                </a:extLst>
               </a:tr>
               <a:tr h="280854">
                 <a:tc>
                   <a:txBody>
-                    <a:bodyPr wrap="square"/>
+                    <a:bodyPr/>
                     <a:lstStyle/>
                     <a:p>
                       <a:pPr algn="l"/>
@@ -17620,7 +18639,7 @@
                 </a:tc>
                 <a:tc>
                   <a:txBody>
-                    <a:bodyPr wrap="square"/>
+                    <a:bodyPr/>
                     <a:lstStyle/>
                     <a:p>
                       <a:pPr algn="ctr"/>
@@ -17644,7 +18663,7 @@
                 </a:tc>
                 <a:tc>
                   <a:txBody>
-                    <a:bodyPr wrap="square"/>
+                    <a:bodyPr/>
                     <a:lstStyle/>
                     <a:p>
                       <a:pPr algn="ctr"/>
@@ -17668,7 +18687,7 @@
                 </a:tc>
                 <a:tc>
                   <a:txBody>
-                    <a:bodyPr wrap="square"/>
+                    <a:bodyPr/>
                     <a:lstStyle/>
                     <a:p>
                       <a:pPr algn="ctr"/>
@@ -17692,7 +18711,7 @@
                 </a:tc>
                 <a:tc>
                   <a:txBody>
-                    <a:bodyPr wrap="square"/>
+                    <a:bodyPr/>
                     <a:lstStyle/>
                     <a:p>
                       <a:pPr algn="ctr"/>
@@ -17716,7 +18735,7 @@
                 </a:tc>
                 <a:tc>
                   <a:txBody>
-                    <a:bodyPr wrap="square"/>
+                    <a:bodyPr/>
                     <a:lstStyle/>
                     <a:p>
                       <a:pPr algn="ctr"/>
@@ -17740,7 +18759,7 @@
                 </a:tc>
                 <a:tc>
                   <a:txBody>
-                    <a:bodyPr wrap="square"/>
+                    <a:bodyPr/>
                     <a:lstStyle/>
                     <a:p>
                       <a:pPr algn="ctr"/>
@@ -17762,6 +18781,11 @@
                     </a:solidFill>
                   </a:tcPr>
                 </a:tc>
+                <a:extLst>
+                  <a:ext uri="{0D108BD9-81ED-4DB2-BD59-A6C34878D82A}">
+                    <a16:rowId xmlns:a16="http://schemas.microsoft.com/office/drawing/2014/main" val="10006"/>
+                  </a:ext>
+                </a:extLst>
               </a:tr>
             </a:tbl>
           </a:graphicData>
@@ -17847,7 +18871,7 @@
 </file>
 
 <file path=ppt/slides/slide4.xml><?xml version="1.0" encoding="utf-8"?>
-<p:sld xmlns:a="http://schemas.openxmlformats.org/drawingml/2006/main" xmlns:p="http://schemas.openxmlformats.org/presentationml/2006/main" xmlns:r="http://schemas.openxmlformats.org/officeDocument/2006/relationships">
+<p:sld xmlns:a="http://schemas.openxmlformats.org/drawingml/2006/main" xmlns:r="http://schemas.openxmlformats.org/officeDocument/2006/relationships" xmlns:p="http://schemas.openxmlformats.org/presentationml/2006/main">
   <p:cSld>
     <p:spTree>
       <p:nvGrpSpPr>
@@ -17855,7 +18879,14 @@
         <p:cNvGrpSpPr/>
         <p:nvPr/>
       </p:nvGrpSpPr>
-      <p:grpSpPr/>
+      <p:grpSpPr>
+        <a:xfrm>
+          <a:off x="0" y="0"/>
+          <a:ext cx="0" cy="0"/>
+          <a:chOff x="0" y="0"/>
+          <a:chExt cx="0" cy="0"/>
+        </a:xfrm>
+      </p:grpSpPr>
       <p:sp>
         <p:nvSpPr>
           <p:cNvPr id="2" name="TextBox 1"/>
@@ -17931,6 +18962,7 @@
           <a:lstStyle/>
           <a:p>
             <a:pPr algn="ctr"/>
+            <a:endParaRPr/>
           </a:p>
         </p:txBody>
       </p:sp>
@@ -18046,6 +19078,7 @@
           <a:lstStyle/>
           <a:p>
             <a:pPr algn="ctr"/>
+            <a:endParaRPr/>
           </a:p>
         </p:txBody>
       </p:sp>
@@ -18092,13 +19125,25 @@
                 <a:tableStyleId>{5C22544A-7EE6-4342-B048-85BDC9FD1C3A}</a:tableStyleId>
               </a:tblPr>
               <a:tblGrid>
-                <a:gridCol w="2011680"/>
-                <a:gridCol w="6217920"/>
+                <a:gridCol w="2011680">
+                  <a:extLst>
+                    <a:ext uri="{9D8B030D-6E8A-4147-A177-3AD203B41FA5}">
+                      <a16:colId xmlns:a16="http://schemas.microsoft.com/office/drawing/2014/main" val="20000"/>
+                    </a:ext>
+                  </a:extLst>
+                </a:gridCol>
+                <a:gridCol w="6217920">
+                  <a:extLst>
+                    <a:ext uri="{9D8B030D-6E8A-4147-A177-3AD203B41FA5}">
+                      <a16:colId xmlns:a16="http://schemas.microsoft.com/office/drawing/2014/main" val="20001"/>
+                    </a:ext>
+                  </a:extLst>
+                </a:gridCol>
               </a:tblGrid>
               <a:tr h="354330">
                 <a:tc>
                   <a:txBody>
-                    <a:bodyPr wrap="square"/>
+                    <a:bodyPr/>
                     <a:lstStyle/>
                     <a:p>
                       <a:pPr algn="ctr"/>
@@ -18122,7 +19167,7 @@
                 </a:tc>
                 <a:tc>
                   <a:txBody>
-                    <a:bodyPr wrap="square"/>
+                    <a:bodyPr/>
                     <a:lstStyle/>
                     <a:p>
                       <a:pPr algn="ctr"/>
@@ -18144,11 +19189,16 @@
                     </a:solidFill>
                   </a:tcPr>
                 </a:tc>
+                <a:extLst>
+                  <a:ext uri="{0D108BD9-81ED-4DB2-BD59-A6C34878D82A}">
+                    <a16:rowId xmlns:a16="http://schemas.microsoft.com/office/drawing/2014/main" val="10000"/>
+                  </a:ext>
+                </a:extLst>
               </a:tr>
               <a:tr h="354330">
                 <a:tc>
                   <a:txBody>
-                    <a:bodyPr wrap="square"/>
+                    <a:bodyPr/>
                     <a:lstStyle/>
                     <a:p>
                       <a:pPr algn="l"/>
@@ -18172,7 +19222,7 @@
                 </a:tc>
                 <a:tc>
                   <a:txBody>
-                    <a:bodyPr wrap="square"/>
+                    <a:bodyPr/>
                     <a:lstStyle/>
                     <a:p>
                       <a:pPr algn="l"/>
@@ -18194,11 +19244,16 @@
                     </a:solidFill>
                   </a:tcPr>
                 </a:tc>
+                <a:extLst>
+                  <a:ext uri="{0D108BD9-81ED-4DB2-BD59-A6C34878D82A}">
+                    <a16:rowId xmlns:a16="http://schemas.microsoft.com/office/drawing/2014/main" val="10001"/>
+                  </a:ext>
+                </a:extLst>
               </a:tr>
               <a:tr h="354330">
                 <a:tc>
                   <a:txBody>
-                    <a:bodyPr wrap="square"/>
+                    <a:bodyPr/>
                     <a:lstStyle/>
                     <a:p>
                       <a:pPr algn="l"/>
@@ -18222,7 +19277,7 @@
                 </a:tc>
                 <a:tc>
                   <a:txBody>
-                    <a:bodyPr wrap="square"/>
+                    <a:bodyPr/>
                     <a:lstStyle/>
                     <a:p>
                       <a:pPr algn="l"/>
@@ -18244,11 +19299,16 @@
                     </a:solidFill>
                   </a:tcPr>
                 </a:tc>
+                <a:extLst>
+                  <a:ext uri="{0D108BD9-81ED-4DB2-BD59-A6C34878D82A}">
+                    <a16:rowId xmlns:a16="http://schemas.microsoft.com/office/drawing/2014/main" val="10002"/>
+                  </a:ext>
+                </a:extLst>
               </a:tr>
               <a:tr h="354330">
                 <a:tc>
                   <a:txBody>
-                    <a:bodyPr wrap="square"/>
+                    <a:bodyPr/>
                     <a:lstStyle/>
                     <a:p>
                       <a:pPr algn="l"/>
@@ -18272,7 +19332,7 @@
                 </a:tc>
                 <a:tc>
                   <a:txBody>
-                    <a:bodyPr wrap="square"/>
+                    <a:bodyPr/>
                     <a:lstStyle/>
                     <a:p>
                       <a:pPr algn="l"/>
@@ -18294,6 +19354,11 @@
                     </a:solidFill>
                   </a:tcPr>
                 </a:tc>
+                <a:extLst>
+                  <a:ext uri="{0D108BD9-81ED-4DB2-BD59-A6C34878D82A}">
+                    <a16:rowId xmlns:a16="http://schemas.microsoft.com/office/drawing/2014/main" val="10003"/>
+                  </a:ext>
+                </a:extLst>
               </a:tr>
             </a:tbl>
           </a:graphicData>
@@ -18401,7 +19466,7 @@
 </file>
 
 <file path=ppt/slides/slide5.xml><?xml version="1.0" encoding="utf-8"?>
-<p:sld xmlns:a="http://schemas.openxmlformats.org/drawingml/2006/main" xmlns:p="http://schemas.openxmlformats.org/presentationml/2006/main" xmlns:r="http://schemas.openxmlformats.org/officeDocument/2006/relationships">
+<p:sld xmlns:a="http://schemas.openxmlformats.org/drawingml/2006/main" xmlns:r="http://schemas.openxmlformats.org/officeDocument/2006/relationships" xmlns:p="http://schemas.openxmlformats.org/presentationml/2006/main">
   <p:cSld>
     <p:spTree>
       <p:nvGrpSpPr>
@@ -18409,7 +19474,14 @@
         <p:cNvGrpSpPr/>
         <p:nvPr/>
       </p:nvGrpSpPr>
-      <p:grpSpPr/>
+      <p:grpSpPr>
+        <a:xfrm>
+          <a:off x="0" y="0"/>
+          <a:ext cx="0" cy="0"/>
+          <a:chOff x="0" y="0"/>
+          <a:chExt cx="0" cy="0"/>
+        </a:xfrm>
+      </p:grpSpPr>
       <p:sp>
         <p:nvSpPr>
           <p:cNvPr id="2" name="TextBox 1"/>
@@ -18485,6 +19557,7 @@
           <a:lstStyle/>
           <a:p>
             <a:pPr algn="ctr"/>
+            <a:endParaRPr/>
           </a:p>
         </p:txBody>
       </p:sp>
@@ -18565,6 +19638,7 @@
           <a:lstStyle/>
           <a:p>
             <a:pPr algn="ctr"/>
+            <a:endParaRPr/>
           </a:p>
         </p:txBody>
       </p:sp>
@@ -18669,6 +19743,7 @@
           <a:lstStyle/>
           <a:p>
             <a:pPr algn="ctr"/>
+            <a:endParaRPr/>
           </a:p>
         </p:txBody>
       </p:sp>
@@ -18734,7 +19809,7 @@
           </a:fontRef>
         </p:style>
         <p:txBody>
-          <a:bodyPr rtlCol="0" anchor="ctr" wrap="square"/>
+          <a:bodyPr wrap="square" rtlCol="0" anchor="ctr"/>
           <a:lstStyle/>
           <a:p>
             <a:pPr algn="ctr">
@@ -18765,7 +19840,7 @@
         </p:nvGraphicFramePr>
         <p:xfrm>
           <a:off x="457200" y="3931920"/>
-          <a:ext cx="8229600" cy="868680"/>
+          <a:ext cx="8229600" cy="1295400"/>
         </p:xfrm>
         <a:graphic>
           <a:graphicData uri="http://schemas.openxmlformats.org/drawingml/2006/table">
@@ -18774,14 +19849,32 @@
                 <a:tableStyleId>{5C22544A-7EE6-4342-B048-85BDC9FD1C3A}</a:tableStyleId>
               </a:tblPr>
               <a:tblGrid>
-                <a:gridCol w="1828800"/>
-                <a:gridCol w="2743200"/>
-                <a:gridCol w="3657600"/>
+                <a:gridCol w="1828800">
+                  <a:extLst>
+                    <a:ext uri="{9D8B030D-6E8A-4147-A177-3AD203B41FA5}">
+                      <a16:colId xmlns:a16="http://schemas.microsoft.com/office/drawing/2014/main" val="20000"/>
+                    </a:ext>
+                  </a:extLst>
+                </a:gridCol>
+                <a:gridCol w="2743200">
+                  <a:extLst>
+                    <a:ext uri="{9D8B030D-6E8A-4147-A177-3AD203B41FA5}">
+                      <a16:colId xmlns:a16="http://schemas.microsoft.com/office/drawing/2014/main" val="20001"/>
+                    </a:ext>
+                  </a:extLst>
+                </a:gridCol>
+                <a:gridCol w="3657600">
+                  <a:extLst>
+                    <a:ext uri="{9D8B030D-6E8A-4147-A177-3AD203B41FA5}">
+                      <a16:colId xmlns:a16="http://schemas.microsoft.com/office/drawing/2014/main" val="20002"/>
+                    </a:ext>
+                  </a:extLst>
+                </a:gridCol>
               </a:tblGrid>
               <a:tr h="173736">
                 <a:tc>
                   <a:txBody>
-                    <a:bodyPr wrap="square"/>
+                    <a:bodyPr/>
                     <a:lstStyle/>
                     <a:p>
                       <a:pPr algn="ctr"/>
@@ -18805,7 +19898,7 @@
                 </a:tc>
                 <a:tc>
                   <a:txBody>
-                    <a:bodyPr wrap="square"/>
+                    <a:bodyPr/>
                     <a:lstStyle/>
                     <a:p>
                       <a:pPr algn="ctr"/>
@@ -18829,7 +19922,7 @@
                 </a:tc>
                 <a:tc>
                   <a:txBody>
-                    <a:bodyPr wrap="square"/>
+                    <a:bodyPr/>
                     <a:lstStyle/>
                     <a:p>
                       <a:pPr algn="ctr"/>
@@ -18851,11 +19944,16 @@
                     </a:solidFill>
                   </a:tcPr>
                 </a:tc>
+                <a:extLst>
+                  <a:ext uri="{0D108BD9-81ED-4DB2-BD59-A6C34878D82A}">
+                    <a16:rowId xmlns:a16="http://schemas.microsoft.com/office/drawing/2014/main" val="10000"/>
+                  </a:ext>
+                </a:extLst>
               </a:tr>
               <a:tr h="173736">
                 <a:tc>
                   <a:txBody>
-                    <a:bodyPr wrap="square"/>
+                    <a:bodyPr/>
                     <a:lstStyle/>
                     <a:p>
                       <a:pPr algn="l"/>
@@ -18879,7 +19977,7 @@
                 </a:tc>
                 <a:tc>
                   <a:txBody>
-                    <a:bodyPr wrap="square"/>
+                    <a:bodyPr/>
                     <a:lstStyle/>
                     <a:p>
                       <a:pPr algn="ctr"/>
@@ -18903,7 +20001,7 @@
                 </a:tc>
                 <a:tc>
                   <a:txBody>
-                    <a:bodyPr wrap="square"/>
+                    <a:bodyPr/>
                     <a:lstStyle/>
                     <a:p>
                       <a:pPr algn="ctr"/>
@@ -18925,11 +20023,16 @@
                     </a:solidFill>
                   </a:tcPr>
                 </a:tc>
+                <a:extLst>
+                  <a:ext uri="{0D108BD9-81ED-4DB2-BD59-A6C34878D82A}">
+                    <a16:rowId xmlns:a16="http://schemas.microsoft.com/office/drawing/2014/main" val="10001"/>
+                  </a:ext>
+                </a:extLst>
               </a:tr>
               <a:tr h="173736">
                 <a:tc>
                   <a:txBody>
-                    <a:bodyPr wrap="square"/>
+                    <a:bodyPr/>
                     <a:lstStyle/>
                     <a:p>
                       <a:pPr algn="l"/>
@@ -18953,7 +20056,7 @@
                 </a:tc>
                 <a:tc>
                   <a:txBody>
-                    <a:bodyPr wrap="square"/>
+                    <a:bodyPr/>
                     <a:lstStyle/>
                     <a:p>
                       <a:pPr algn="ctr"/>
@@ -18977,7 +20080,7 @@
                 </a:tc>
                 <a:tc>
                   <a:txBody>
-                    <a:bodyPr wrap="square"/>
+                    <a:bodyPr/>
                     <a:lstStyle/>
                     <a:p>
                       <a:pPr algn="ctr"/>
@@ -18999,11 +20102,16 @@
                     </a:solidFill>
                   </a:tcPr>
                 </a:tc>
+                <a:extLst>
+                  <a:ext uri="{0D108BD9-81ED-4DB2-BD59-A6C34878D82A}">
+                    <a16:rowId xmlns:a16="http://schemas.microsoft.com/office/drawing/2014/main" val="10002"/>
+                  </a:ext>
+                </a:extLst>
               </a:tr>
               <a:tr h="173736">
                 <a:tc>
                   <a:txBody>
-                    <a:bodyPr wrap="square"/>
+                    <a:bodyPr/>
                     <a:lstStyle/>
                     <a:p>
                       <a:pPr algn="l"/>
@@ -19027,7 +20135,7 @@
                 </a:tc>
                 <a:tc>
                   <a:txBody>
-                    <a:bodyPr wrap="square"/>
+                    <a:bodyPr/>
                     <a:lstStyle/>
                     <a:p>
                       <a:pPr algn="ctr"/>
@@ -19051,7 +20159,7 @@
                 </a:tc>
                 <a:tc>
                   <a:txBody>
-                    <a:bodyPr wrap="square"/>
+                    <a:bodyPr/>
                     <a:lstStyle/>
                     <a:p>
                       <a:pPr algn="ctr"/>
@@ -19073,11 +20181,16 @@
                     </a:solidFill>
                   </a:tcPr>
                 </a:tc>
+                <a:extLst>
+                  <a:ext uri="{0D108BD9-81ED-4DB2-BD59-A6C34878D82A}">
+                    <a16:rowId xmlns:a16="http://schemas.microsoft.com/office/drawing/2014/main" val="10003"/>
+                  </a:ext>
+                </a:extLst>
               </a:tr>
               <a:tr h="173736">
                 <a:tc>
                   <a:txBody>
-                    <a:bodyPr wrap="square"/>
+                    <a:bodyPr/>
                     <a:lstStyle/>
                     <a:p>
                       <a:pPr algn="l"/>
@@ -19101,7 +20214,7 @@
                 </a:tc>
                 <a:tc>
                   <a:txBody>
-                    <a:bodyPr wrap="square"/>
+                    <a:bodyPr/>
                     <a:lstStyle/>
                     <a:p>
                       <a:pPr algn="ctr"/>
@@ -19125,7 +20238,7 @@
                 </a:tc>
                 <a:tc>
                   <a:txBody>
-                    <a:bodyPr wrap="square"/>
+                    <a:bodyPr/>
                     <a:lstStyle/>
                     <a:p>
                       <a:pPr algn="ctr"/>
@@ -19147,6 +20260,11 @@
                     </a:solidFill>
                   </a:tcPr>
                 </a:tc>
+                <a:extLst>
+                  <a:ext uri="{0D108BD9-81ED-4DB2-BD59-A6C34878D82A}">
+                    <a16:rowId xmlns:a16="http://schemas.microsoft.com/office/drawing/2014/main" val="10004"/>
+                  </a:ext>
+                </a:extLst>
               </a:tr>
             </a:tbl>
           </a:graphicData>
@@ -19197,7 +20315,7 @@
 </file>
 
 <file path=ppt/slides/slide6.xml><?xml version="1.0" encoding="utf-8"?>
-<p:sld xmlns:a="http://schemas.openxmlformats.org/drawingml/2006/main" xmlns:p="http://schemas.openxmlformats.org/presentationml/2006/main" xmlns:r="http://schemas.openxmlformats.org/officeDocument/2006/relationships">
+<p:sld xmlns:a="http://schemas.openxmlformats.org/drawingml/2006/main" xmlns:r="http://schemas.openxmlformats.org/officeDocument/2006/relationships" xmlns:p="http://schemas.openxmlformats.org/presentationml/2006/main">
   <p:cSld>
     <p:spTree>
       <p:nvGrpSpPr>
@@ -19205,7 +20323,14 @@
         <p:cNvGrpSpPr/>
         <p:nvPr/>
       </p:nvGrpSpPr>
-      <p:grpSpPr/>
+      <p:grpSpPr>
+        <a:xfrm>
+          <a:off x="0" y="0"/>
+          <a:ext cx="0" cy="0"/>
+          <a:chOff x="0" y="0"/>
+          <a:chExt cx="0" cy="0"/>
+        </a:xfrm>
+      </p:grpSpPr>
       <p:sp>
         <p:nvSpPr>
           <p:cNvPr id="2" name="TextBox 1"/>
@@ -19281,6 +20406,7 @@
           <a:lstStyle/>
           <a:p>
             <a:pPr algn="ctr"/>
+            <a:endParaRPr/>
           </a:p>
         </p:txBody>
       </p:sp>
@@ -19361,6 +20487,7 @@
           <a:lstStyle/>
           <a:p>
             <a:pPr algn="ctr"/>
+            <a:endParaRPr/>
           </a:p>
         </p:txBody>
       </p:sp>
@@ -19407,13 +20534,25 @@
                 <a:tableStyleId>{5C22544A-7EE6-4342-B048-85BDC9FD1C3A}</a:tableStyleId>
               </a:tblPr>
               <a:tblGrid>
-                <a:gridCol w="2011680"/>
-                <a:gridCol w="6217920"/>
+                <a:gridCol w="2011680">
+                  <a:extLst>
+                    <a:ext uri="{9D8B030D-6E8A-4147-A177-3AD203B41FA5}">
+                      <a16:colId xmlns:a16="http://schemas.microsoft.com/office/drawing/2014/main" val="20000"/>
+                    </a:ext>
+                  </a:extLst>
+                </a:gridCol>
+                <a:gridCol w="6217920">
+                  <a:extLst>
+                    <a:ext uri="{9D8B030D-6E8A-4147-A177-3AD203B41FA5}">
+                      <a16:colId xmlns:a16="http://schemas.microsoft.com/office/drawing/2014/main" val="20001"/>
+                    </a:ext>
+                  </a:extLst>
+                </a:gridCol>
               </a:tblGrid>
               <a:tr h="338328">
                 <a:tc>
                   <a:txBody>
-                    <a:bodyPr wrap="square"/>
+                    <a:bodyPr/>
                     <a:lstStyle/>
                     <a:p>
                       <a:pPr algn="ctr"/>
@@ -19437,7 +20576,7 @@
                 </a:tc>
                 <a:tc>
                   <a:txBody>
-                    <a:bodyPr wrap="square"/>
+                    <a:bodyPr/>
                     <a:lstStyle/>
                     <a:p>
                       <a:pPr algn="ctr"/>
@@ -19459,11 +20598,16 @@
                     </a:solidFill>
                   </a:tcPr>
                 </a:tc>
+                <a:extLst>
+                  <a:ext uri="{0D108BD9-81ED-4DB2-BD59-A6C34878D82A}">
+                    <a16:rowId xmlns:a16="http://schemas.microsoft.com/office/drawing/2014/main" val="10000"/>
+                  </a:ext>
+                </a:extLst>
               </a:tr>
               <a:tr h="338328">
                 <a:tc>
                   <a:txBody>
-                    <a:bodyPr wrap="square"/>
+                    <a:bodyPr/>
                     <a:lstStyle/>
                     <a:p>
                       <a:pPr algn="l"/>
@@ -19487,7 +20631,7 @@
                 </a:tc>
                 <a:tc>
                   <a:txBody>
-                    <a:bodyPr wrap="square"/>
+                    <a:bodyPr/>
                     <a:lstStyle/>
                     <a:p>
                       <a:pPr algn="l"/>
@@ -19509,11 +20653,16 @@
                     </a:solidFill>
                   </a:tcPr>
                 </a:tc>
+                <a:extLst>
+                  <a:ext uri="{0D108BD9-81ED-4DB2-BD59-A6C34878D82A}">
+                    <a16:rowId xmlns:a16="http://schemas.microsoft.com/office/drawing/2014/main" val="10001"/>
+                  </a:ext>
+                </a:extLst>
               </a:tr>
               <a:tr h="338328">
                 <a:tc>
                   <a:txBody>
-                    <a:bodyPr wrap="square"/>
+                    <a:bodyPr/>
                     <a:lstStyle/>
                     <a:p>
                       <a:pPr algn="l"/>
@@ -19537,7 +20686,7 @@
                 </a:tc>
                 <a:tc>
                   <a:txBody>
-                    <a:bodyPr wrap="square"/>
+                    <a:bodyPr/>
                     <a:lstStyle/>
                     <a:p>
                       <a:pPr algn="l"/>
@@ -19559,11 +20708,16 @@
                     </a:solidFill>
                   </a:tcPr>
                 </a:tc>
+                <a:extLst>
+                  <a:ext uri="{0D108BD9-81ED-4DB2-BD59-A6C34878D82A}">
+                    <a16:rowId xmlns:a16="http://schemas.microsoft.com/office/drawing/2014/main" val="10002"/>
+                  </a:ext>
+                </a:extLst>
               </a:tr>
               <a:tr h="338328">
                 <a:tc>
                   <a:txBody>
-                    <a:bodyPr wrap="square"/>
+                    <a:bodyPr/>
                     <a:lstStyle/>
                     <a:p>
                       <a:pPr algn="l"/>
@@ -19587,7 +20741,7 @@
                 </a:tc>
                 <a:tc>
                   <a:txBody>
-                    <a:bodyPr wrap="square"/>
+                    <a:bodyPr/>
                     <a:lstStyle/>
                     <a:p>
                       <a:pPr algn="l"/>
@@ -19609,11 +20763,16 @@
                     </a:solidFill>
                   </a:tcPr>
                 </a:tc>
+                <a:extLst>
+                  <a:ext uri="{0D108BD9-81ED-4DB2-BD59-A6C34878D82A}">
+                    <a16:rowId xmlns:a16="http://schemas.microsoft.com/office/drawing/2014/main" val="10003"/>
+                  </a:ext>
+                </a:extLst>
               </a:tr>
               <a:tr h="338328">
                 <a:tc>
                   <a:txBody>
-                    <a:bodyPr wrap="square"/>
+                    <a:bodyPr/>
                     <a:lstStyle/>
                     <a:p>
                       <a:pPr algn="l"/>
@@ -19637,7 +20796,7 @@
                 </a:tc>
                 <a:tc>
                   <a:txBody>
-                    <a:bodyPr wrap="square"/>
+                    <a:bodyPr/>
                     <a:lstStyle/>
                     <a:p>
                       <a:pPr algn="l"/>
@@ -19659,6 +20818,11 @@
                     </a:solidFill>
                   </a:tcPr>
                 </a:tc>
+                <a:extLst>
+                  <a:ext uri="{0D108BD9-81ED-4DB2-BD59-A6C34878D82A}">
+                    <a16:rowId xmlns:a16="http://schemas.microsoft.com/office/drawing/2014/main" val="10004"/>
+                  </a:ext>
+                </a:extLst>
               </a:tr>
             </a:tbl>
           </a:graphicData>
@@ -19702,7 +20866,7 @@
           </a:fontRef>
         </p:style>
         <p:txBody>
-          <a:bodyPr rtlCol="0" anchor="ctr" wrap="square"/>
+          <a:bodyPr wrap="square" rtlCol="0" anchor="ctr"/>
           <a:lstStyle/>
           <a:p>
             <a:pPr algn="ctr">
@@ -19768,7 +20932,7 @@
 </file>
 
 <file path=ppt/slides/slide7.xml><?xml version="1.0" encoding="utf-8"?>
-<p:sld xmlns:a="http://schemas.openxmlformats.org/drawingml/2006/main" xmlns:p="http://schemas.openxmlformats.org/presentationml/2006/main" xmlns:r="http://schemas.openxmlformats.org/officeDocument/2006/relationships">
+<p:sld xmlns:a="http://schemas.openxmlformats.org/drawingml/2006/main" xmlns:r="http://schemas.openxmlformats.org/officeDocument/2006/relationships" xmlns:p="http://schemas.openxmlformats.org/presentationml/2006/main">
   <p:cSld>
     <p:spTree>
       <p:nvGrpSpPr>
@@ -19776,7 +20940,14 @@
         <p:cNvGrpSpPr/>
         <p:nvPr/>
       </p:nvGrpSpPr>
-      <p:grpSpPr/>
+      <p:grpSpPr>
+        <a:xfrm>
+          <a:off x="0" y="0"/>
+          <a:ext cx="0" cy="0"/>
+          <a:chOff x="0" y="0"/>
+          <a:chExt cx="0" cy="0"/>
+        </a:xfrm>
+      </p:grpSpPr>
       <p:sp>
         <p:nvSpPr>
           <p:cNvPr id="2" name="TextBox 1"/>
@@ -19852,6 +21023,7 @@
           <a:lstStyle/>
           <a:p>
             <a:pPr algn="ctr"/>
+            <a:endParaRPr/>
           </a:p>
         </p:txBody>
       </p:sp>
@@ -19932,6 +21104,7 @@
           <a:lstStyle/>
           <a:p>
             <a:pPr algn="ctr"/>
+            <a:endParaRPr/>
           </a:p>
         </p:txBody>
       </p:sp>
@@ -19978,13 +21151,25 @@
                 <a:tableStyleId>{5C22544A-7EE6-4342-B048-85BDC9FD1C3A}</a:tableStyleId>
               </a:tblPr>
               <a:tblGrid>
-                <a:gridCol w="2011680"/>
-                <a:gridCol w="6217920"/>
+                <a:gridCol w="2011680">
+                  <a:extLst>
+                    <a:ext uri="{9D8B030D-6E8A-4147-A177-3AD203B41FA5}">
+                      <a16:colId xmlns:a16="http://schemas.microsoft.com/office/drawing/2014/main" val="20000"/>
+                    </a:ext>
+                  </a:extLst>
+                </a:gridCol>
+                <a:gridCol w="6217920">
+                  <a:extLst>
+                    <a:ext uri="{9D8B030D-6E8A-4147-A177-3AD203B41FA5}">
+                      <a16:colId xmlns:a16="http://schemas.microsoft.com/office/drawing/2014/main" val="20001"/>
+                    </a:ext>
+                  </a:extLst>
+                </a:gridCol>
               </a:tblGrid>
               <a:tr h="320040">
                 <a:tc>
                   <a:txBody>
-                    <a:bodyPr wrap="square"/>
+                    <a:bodyPr/>
                     <a:lstStyle/>
                     <a:p>
                       <a:pPr algn="ctr"/>
@@ -20008,7 +21193,7 @@
                 </a:tc>
                 <a:tc>
                   <a:txBody>
-                    <a:bodyPr wrap="square"/>
+                    <a:bodyPr/>
                     <a:lstStyle/>
                     <a:p>
                       <a:pPr algn="ctr"/>
@@ -20030,11 +21215,16 @@
                     </a:solidFill>
                   </a:tcPr>
                 </a:tc>
+                <a:extLst>
+                  <a:ext uri="{0D108BD9-81ED-4DB2-BD59-A6C34878D82A}">
+                    <a16:rowId xmlns:a16="http://schemas.microsoft.com/office/drawing/2014/main" val="10000"/>
+                  </a:ext>
+                </a:extLst>
               </a:tr>
               <a:tr h="320040">
                 <a:tc>
                   <a:txBody>
-                    <a:bodyPr wrap="square"/>
+                    <a:bodyPr/>
                     <a:lstStyle/>
                     <a:p>
                       <a:pPr algn="l"/>
@@ -20058,7 +21248,7 @@
                 </a:tc>
                 <a:tc>
                   <a:txBody>
-                    <a:bodyPr wrap="square"/>
+                    <a:bodyPr/>
                     <a:lstStyle/>
                     <a:p>
                       <a:pPr algn="l"/>
@@ -20080,11 +21270,16 @@
                     </a:solidFill>
                   </a:tcPr>
                 </a:tc>
+                <a:extLst>
+                  <a:ext uri="{0D108BD9-81ED-4DB2-BD59-A6C34878D82A}">
+                    <a16:rowId xmlns:a16="http://schemas.microsoft.com/office/drawing/2014/main" val="10001"/>
+                  </a:ext>
+                </a:extLst>
               </a:tr>
               <a:tr h="320040">
                 <a:tc>
                   <a:txBody>
-                    <a:bodyPr wrap="square"/>
+                    <a:bodyPr/>
                     <a:lstStyle/>
                     <a:p>
                       <a:pPr algn="l"/>
@@ -20108,7 +21303,7 @@
                 </a:tc>
                 <a:tc>
                   <a:txBody>
-                    <a:bodyPr wrap="square"/>
+                    <a:bodyPr/>
                     <a:lstStyle/>
                     <a:p>
                       <a:pPr algn="l"/>
@@ -20130,6 +21325,11 @@
                     </a:solidFill>
                   </a:tcPr>
                 </a:tc>
+                <a:extLst>
+                  <a:ext uri="{0D108BD9-81ED-4DB2-BD59-A6C34878D82A}">
+                    <a16:rowId xmlns:a16="http://schemas.microsoft.com/office/drawing/2014/main" val="10002"/>
+                  </a:ext>
+                </a:extLst>
               </a:tr>
             </a:tbl>
           </a:graphicData>
@@ -20212,6 +21412,7 @@
           <a:lstStyle/>
           <a:p>
             <a:pPr algn="ctr"/>
+            <a:endParaRPr/>
           </a:p>
         </p:txBody>
       </p:sp>
@@ -20284,7 +21485,7 @@
 </file>
 
 <file path=ppt/slides/slide8.xml><?xml version="1.0" encoding="utf-8"?>
-<p:sld xmlns:a="http://schemas.openxmlformats.org/drawingml/2006/main" xmlns:p="http://schemas.openxmlformats.org/presentationml/2006/main" xmlns:r="http://schemas.openxmlformats.org/officeDocument/2006/relationships">
+<p:sld xmlns:a="http://schemas.openxmlformats.org/drawingml/2006/main" xmlns:r="http://schemas.openxmlformats.org/officeDocument/2006/relationships" xmlns:p="http://schemas.openxmlformats.org/presentationml/2006/main">
   <p:cSld>
     <p:spTree>
       <p:nvGrpSpPr>
@@ -20292,7 +21493,14 @@
         <p:cNvGrpSpPr/>
         <p:nvPr/>
       </p:nvGrpSpPr>
-      <p:grpSpPr/>
+      <p:grpSpPr>
+        <a:xfrm>
+          <a:off x="0" y="0"/>
+          <a:ext cx="0" cy="0"/>
+          <a:chOff x="0" y="0"/>
+          <a:chExt cx="0" cy="0"/>
+        </a:xfrm>
+      </p:grpSpPr>
       <p:sp>
         <p:nvSpPr>
           <p:cNvPr id="2" name="TextBox 1"/>
@@ -20368,6 +21576,7 @@
           <a:lstStyle/>
           <a:p>
             <a:pPr algn="ctr"/>
+            <a:endParaRPr/>
           </a:p>
         </p:txBody>
       </p:sp>
@@ -20448,6 +21657,7 @@
           <a:lstStyle/>
           <a:p>
             <a:pPr algn="ctr"/>
+            <a:endParaRPr/>
           </a:p>
         </p:txBody>
       </p:sp>
@@ -20494,14 +21704,32 @@
                 <a:tableStyleId>{5C22544A-7EE6-4342-B048-85BDC9FD1C3A}</a:tableStyleId>
               </a:tblPr>
               <a:tblGrid>
-                <a:gridCol w="2286000"/>
-                <a:gridCol w="3200400"/>
-                <a:gridCol w="2743200"/>
+                <a:gridCol w="2286000">
+                  <a:extLst>
+                    <a:ext uri="{9D8B030D-6E8A-4147-A177-3AD203B41FA5}">
+                      <a16:colId xmlns:a16="http://schemas.microsoft.com/office/drawing/2014/main" val="20000"/>
+                    </a:ext>
+                  </a:extLst>
+                </a:gridCol>
+                <a:gridCol w="3200400">
+                  <a:extLst>
+                    <a:ext uri="{9D8B030D-6E8A-4147-A177-3AD203B41FA5}">
+                      <a16:colId xmlns:a16="http://schemas.microsoft.com/office/drawing/2014/main" val="20001"/>
+                    </a:ext>
+                  </a:extLst>
+                </a:gridCol>
+                <a:gridCol w="2743200">
+                  <a:extLst>
+                    <a:ext uri="{9D8B030D-6E8A-4147-A177-3AD203B41FA5}">
+                      <a16:colId xmlns:a16="http://schemas.microsoft.com/office/drawing/2014/main" val="20002"/>
+                    </a:ext>
+                  </a:extLst>
+                </a:gridCol>
               </a:tblGrid>
               <a:tr h="350520">
                 <a:tc>
                   <a:txBody>
-                    <a:bodyPr wrap="square"/>
+                    <a:bodyPr/>
                     <a:lstStyle/>
                     <a:p>
                       <a:pPr algn="ctr"/>
@@ -20525,7 +21753,7 @@
                 </a:tc>
                 <a:tc>
                   <a:txBody>
-                    <a:bodyPr wrap="square"/>
+                    <a:bodyPr/>
                     <a:lstStyle/>
                     <a:p>
                       <a:pPr algn="ctr"/>
@@ -20549,7 +21777,7 @@
                 </a:tc>
                 <a:tc>
                   <a:txBody>
-                    <a:bodyPr wrap="square"/>
+                    <a:bodyPr/>
                     <a:lstStyle/>
                     <a:p>
                       <a:pPr algn="ctr"/>
@@ -20571,11 +21799,16 @@
                     </a:solidFill>
                   </a:tcPr>
                 </a:tc>
+                <a:extLst>
+                  <a:ext uri="{0D108BD9-81ED-4DB2-BD59-A6C34878D82A}">
+                    <a16:rowId xmlns:a16="http://schemas.microsoft.com/office/drawing/2014/main" val="10000"/>
+                  </a:ext>
+                </a:extLst>
               </a:tr>
               <a:tr h="350520">
                 <a:tc>
                   <a:txBody>
-                    <a:bodyPr wrap="square"/>
+                    <a:bodyPr/>
                     <a:lstStyle/>
                     <a:p>
                       <a:pPr algn="l"/>
@@ -20599,7 +21832,7 @@
                 </a:tc>
                 <a:tc>
                   <a:txBody>
-                    <a:bodyPr wrap="square"/>
+                    <a:bodyPr/>
                     <a:lstStyle/>
                     <a:p>
                       <a:pPr algn="ctr"/>
@@ -20623,7 +21856,7 @@
                 </a:tc>
                 <a:tc>
                   <a:txBody>
-                    <a:bodyPr wrap="square"/>
+                    <a:bodyPr/>
                     <a:lstStyle/>
                     <a:p>
                       <a:pPr algn="ctr"/>
@@ -20645,11 +21878,16 @@
                     </a:solidFill>
                   </a:tcPr>
                 </a:tc>
+                <a:extLst>
+                  <a:ext uri="{0D108BD9-81ED-4DB2-BD59-A6C34878D82A}">
+                    <a16:rowId xmlns:a16="http://schemas.microsoft.com/office/drawing/2014/main" val="10001"/>
+                  </a:ext>
+                </a:extLst>
               </a:tr>
               <a:tr h="350520">
                 <a:tc>
                   <a:txBody>
-                    <a:bodyPr wrap="square"/>
+                    <a:bodyPr/>
                     <a:lstStyle/>
                     <a:p>
                       <a:pPr algn="l"/>
@@ -20673,7 +21911,7 @@
                 </a:tc>
                 <a:tc>
                   <a:txBody>
-                    <a:bodyPr wrap="square"/>
+                    <a:bodyPr/>
                     <a:lstStyle/>
                     <a:p>
                       <a:pPr algn="ctr"/>
@@ -20697,7 +21935,7 @@
                 </a:tc>
                 <a:tc>
                   <a:txBody>
-                    <a:bodyPr wrap="square"/>
+                    <a:bodyPr/>
                     <a:lstStyle/>
                     <a:p>
                       <a:pPr algn="ctr"/>
@@ -20719,6 +21957,11 @@
                     </a:solidFill>
                   </a:tcPr>
                 </a:tc>
+                <a:extLst>
+                  <a:ext uri="{0D108BD9-81ED-4DB2-BD59-A6C34878D82A}">
+                    <a16:rowId xmlns:a16="http://schemas.microsoft.com/office/drawing/2014/main" val="10002"/>
+                  </a:ext>
+                </a:extLst>
               </a:tr>
             </a:tbl>
           </a:graphicData>
@@ -20826,7 +22069,7 @@
 </file>
 
 <file path=ppt/slides/slide9.xml><?xml version="1.0" encoding="utf-8"?>
-<p:sld xmlns:a="http://schemas.openxmlformats.org/drawingml/2006/main" xmlns:p="http://schemas.openxmlformats.org/presentationml/2006/main" xmlns:r="http://schemas.openxmlformats.org/officeDocument/2006/relationships">
+<p:sld xmlns:a="http://schemas.openxmlformats.org/drawingml/2006/main" xmlns:r="http://schemas.openxmlformats.org/officeDocument/2006/relationships" xmlns:p="http://schemas.openxmlformats.org/presentationml/2006/main">
   <p:cSld>
     <p:spTree>
       <p:nvGrpSpPr>
@@ -20834,7 +22077,14 @@
         <p:cNvGrpSpPr/>
         <p:nvPr/>
       </p:nvGrpSpPr>
-      <p:grpSpPr/>
+      <p:grpSpPr>
+        <a:xfrm>
+          <a:off x="0" y="0"/>
+          <a:ext cx="0" cy="0"/>
+          <a:chOff x="0" y="0"/>
+          <a:chExt cx="0" cy="0"/>
+        </a:xfrm>
+      </p:grpSpPr>
       <p:sp>
         <p:nvSpPr>
           <p:cNvPr id="2" name="TextBox 1"/>
@@ -20910,6 +22160,7 @@
           <a:lstStyle/>
           <a:p>
             <a:pPr algn="ctr"/>
+            <a:endParaRPr/>
           </a:p>
         </p:txBody>
       </p:sp>
@@ -20990,6 +22241,7 @@
           <a:lstStyle/>
           <a:p>
             <a:pPr algn="ctr"/>
+            <a:endParaRPr/>
           </a:p>
         </p:txBody>
       </p:sp>
@@ -21094,6 +22346,7 @@
           <a:lstStyle/>
           <a:p>
             <a:pPr algn="ctr"/>
+            <a:endParaRPr/>
           </a:p>
         </p:txBody>
       </p:sp>
@@ -21140,13 +22393,25 @@
                 <a:tableStyleId>{5C22544A-7EE6-4342-B048-85BDC9FD1C3A}</a:tableStyleId>
               </a:tblPr>
               <a:tblGrid>
-                <a:gridCol w="2560320"/>
-                <a:gridCol w="2468880"/>
+                <a:gridCol w="2560320">
+                  <a:extLst>
+                    <a:ext uri="{9D8B030D-6E8A-4147-A177-3AD203B41FA5}">
+                      <a16:colId xmlns:a16="http://schemas.microsoft.com/office/drawing/2014/main" val="20000"/>
+                    </a:ext>
+                  </a:extLst>
+                </a:gridCol>
+                <a:gridCol w="2468880">
+                  <a:extLst>
+                    <a:ext uri="{9D8B030D-6E8A-4147-A177-3AD203B41FA5}">
+                      <a16:colId xmlns:a16="http://schemas.microsoft.com/office/drawing/2014/main" val="20001"/>
+                    </a:ext>
+                  </a:extLst>
+                </a:gridCol>
               </a:tblGrid>
               <a:tr h="285750">
                 <a:tc>
                   <a:txBody>
-                    <a:bodyPr wrap="square"/>
+                    <a:bodyPr/>
                     <a:lstStyle/>
                     <a:p>
                       <a:pPr algn="ctr"/>
@@ -21170,7 +22435,7 @@
                 </a:tc>
                 <a:tc>
                   <a:txBody>
-                    <a:bodyPr wrap="square"/>
+                    <a:bodyPr/>
                     <a:lstStyle/>
                     <a:p>
                       <a:pPr algn="ctr"/>
@@ -21192,11 +22457,16 @@
                     </a:solidFill>
                   </a:tcPr>
                 </a:tc>
+                <a:extLst>
+                  <a:ext uri="{0D108BD9-81ED-4DB2-BD59-A6C34878D82A}">
+                    <a16:rowId xmlns:a16="http://schemas.microsoft.com/office/drawing/2014/main" val="10000"/>
+                  </a:ext>
+                </a:extLst>
               </a:tr>
               <a:tr h="285750">
                 <a:tc>
                   <a:txBody>
-                    <a:bodyPr wrap="square"/>
+                    <a:bodyPr/>
                     <a:lstStyle/>
                     <a:p>
                       <a:pPr algn="l"/>
@@ -21220,7 +22490,7 @@
                 </a:tc>
                 <a:tc>
                   <a:txBody>
-                    <a:bodyPr wrap="square"/>
+                    <a:bodyPr/>
                     <a:lstStyle/>
                     <a:p>
                       <a:pPr algn="l"/>
@@ -21242,11 +22512,16 @@
                     </a:solidFill>
                   </a:tcPr>
                 </a:tc>
+                <a:extLst>
+                  <a:ext uri="{0D108BD9-81ED-4DB2-BD59-A6C34878D82A}">
+                    <a16:rowId xmlns:a16="http://schemas.microsoft.com/office/drawing/2014/main" val="10001"/>
+                  </a:ext>
+                </a:extLst>
               </a:tr>
               <a:tr h="285750">
                 <a:tc>
                   <a:txBody>
-                    <a:bodyPr wrap="square"/>
+                    <a:bodyPr/>
                     <a:lstStyle/>
                     <a:p>
                       <a:pPr algn="l"/>
@@ -21270,7 +22545,7 @@
                 </a:tc>
                 <a:tc>
                   <a:txBody>
-                    <a:bodyPr wrap="square"/>
+                    <a:bodyPr/>
                     <a:lstStyle/>
                     <a:p>
                       <a:pPr algn="l"/>
@@ -21292,11 +22567,16 @@
                     </a:solidFill>
                   </a:tcPr>
                 </a:tc>
+                <a:extLst>
+                  <a:ext uri="{0D108BD9-81ED-4DB2-BD59-A6C34878D82A}">
+                    <a16:rowId xmlns:a16="http://schemas.microsoft.com/office/drawing/2014/main" val="10002"/>
+                  </a:ext>
+                </a:extLst>
               </a:tr>
               <a:tr h="285750">
                 <a:tc>
                   <a:txBody>
-                    <a:bodyPr wrap="square"/>
+                    <a:bodyPr/>
                     <a:lstStyle/>
                     <a:p>
                       <a:pPr algn="l"/>
@@ -21320,7 +22600,7 @@
                 </a:tc>
                 <a:tc>
                   <a:txBody>
-                    <a:bodyPr wrap="square"/>
+                    <a:bodyPr/>
                     <a:lstStyle/>
                     <a:p>
                       <a:pPr algn="l"/>
@@ -21342,6 +22622,11 @@
                     </a:solidFill>
                   </a:tcPr>
                 </a:tc>
+                <a:extLst>
+                  <a:ext uri="{0D108BD9-81ED-4DB2-BD59-A6C34878D82A}">
+                    <a16:rowId xmlns:a16="http://schemas.microsoft.com/office/drawing/2014/main" val="10003"/>
+                  </a:ext>
+                </a:extLst>
               </a:tr>
             </a:tbl>
           </a:graphicData>
@@ -21385,7 +22670,7 @@
           </a:fontRef>
         </p:style>
         <p:txBody>
-          <a:bodyPr rtlCol="0" anchor="ctr" wrap="square"/>
+          <a:bodyPr wrap="square" rtlCol="0" anchor="ctr"/>
           <a:lstStyle/>
           <a:p>
             <a:pPr algn="ctr">
